--- a/native/HDDS_환경분석보고서_V1.0.pptx
+++ b/native/HDDS_환경분석보고서_V1.0.pptx
@@ -4047,42 +4047,77 @@
         </p:nvSpPr>
         <p:spPr>
           <a:xfrm>
-            <a:off x="365750" y="274320"/>
-            <a:ext cx="10972525" cy="480060"/>
-          </a:xfrm>
-          <a:prstGeom prst="rect">
-            <a:avLst/>
-          </a:prstGeom>
-          <a:noFill/>
-        </p:spPr>
-        <p:txBody>
-          <a:bodyPr wrap="square" lIns="36000" rIns="36000" tIns="18000" bIns="18000">
-            <a:spAutoFit/>
-          </a:bodyPr>
-          <a:lstStyle/>
-          <a:p>
-            <a:pPr algn="l"/>
-            <a:r>
-              <a:rPr sz="1700" b="1">
+            <a:off x="487667" y="137160"/>
+            <a:ext cx="7315017" cy="274320"/>
+          </a:xfrm>
+          <a:prstGeom prst="rect">
+            <a:avLst/>
+          </a:prstGeom>
+          <a:noFill/>
+        </p:spPr>
+        <p:txBody>
+          <a:bodyPr wrap="square" lIns="36000" rIns="36000" tIns="18000" bIns="18000">
+            <a:spAutoFit/>
+          </a:bodyPr>
+          <a:lstStyle/>
+          <a:p>
+            <a:pPr algn="l"/>
+            <a:r>
+              <a:rPr sz="900" b="0">
+                <a:solidFill>
+                  <a:srgbClr val="767676"/>
+                </a:solidFill>
+                <a:latin typeface="Pretendard"/>
+              </a:rPr>
+              <a:t>환경분석보고서</a:t>
+            </a:r>
+          </a:p>
+        </p:txBody>
+      </p:sp>
+      <p:sp>
+        <p:nvSpPr>
+          <p:cNvPr id="3" name="TextBox 2"/>
+          <p:cNvSpPr txBox="1"/>
+          <p:nvPr/>
+        </p:nvSpPr>
+        <p:spPr>
+          <a:xfrm>
+            <a:off x="487667" y="548640"/>
+            <a:ext cx="11216359" cy="548640"/>
+          </a:xfrm>
+          <a:prstGeom prst="rect">
+            <a:avLst/>
+          </a:prstGeom>
+          <a:noFill/>
+        </p:spPr>
+        <p:txBody>
+          <a:bodyPr wrap="square" lIns="36000" rIns="36000" tIns="18000" bIns="18000">
+            <a:spAutoFit/>
+          </a:bodyPr>
+          <a:lstStyle/>
+          <a:p>
+            <a:pPr algn="l"/>
+            <a:r>
+              <a:rPr sz="2400" b="1">
                 <a:solidFill>
                   <a:srgbClr val="1A1A1A"/>
                 </a:solidFill>
                 <a:latin typeface="Pretendard"/>
               </a:rPr>
-              <a:t>1. 거시환경 (PESTEL)</a:t>
-            </a:r>
-          </a:p>
-        </p:txBody>
-      </p:sp>
-      <p:sp>
-        <p:nvSpPr>
-          <p:cNvPr id="3" name="Rectangle 2"/>
+              <a:t>거시환경 (PESTEL)</a:t>
+            </a:r>
+          </a:p>
+        </p:txBody>
+      </p:sp>
+      <p:sp>
+        <p:nvSpPr>
+          <p:cNvPr id="4" name="Rectangle 3"/>
           <p:cNvSpPr/>
           <p:nvPr/>
         </p:nvSpPr>
         <p:spPr>
           <a:xfrm>
-            <a:off x="365750" y="891540"/>
+            <a:off x="487667" y="1234440"/>
             <a:ext cx="2194505" cy="377190"/>
           </a:xfrm>
           <a:prstGeom prst="rect">
@@ -4122,13 +4157,13 @@
       </p:sp>
       <p:sp>
         <p:nvSpPr>
-          <p:cNvPr id="4" name="TextBox 3"/>
-          <p:cNvSpPr txBox="1"/>
-          <p:nvPr/>
-        </p:nvSpPr>
-        <p:spPr>
-          <a:xfrm>
-            <a:off x="365750" y="946404"/>
+          <p:cNvPr id="5" name="TextBox 4"/>
+          <p:cNvSpPr txBox="1"/>
+          <p:nvPr/>
+        </p:nvSpPr>
+        <p:spPr>
+          <a:xfrm>
+            <a:off x="487667" y="1289304"/>
             <a:ext cx="2194505" cy="301752"/>
           </a:xfrm>
           <a:prstGeom prst="rect">
@@ -4157,13 +4192,13 @@
       </p:sp>
       <p:sp>
         <p:nvSpPr>
-          <p:cNvPr id="5" name="Rectangle 4"/>
+          <p:cNvPr id="6" name="Rectangle 5"/>
           <p:cNvSpPr/>
           <p:nvPr/>
         </p:nvSpPr>
         <p:spPr>
           <a:xfrm>
-            <a:off x="2560255" y="891540"/>
+            <a:off x="2682172" y="1234440"/>
             <a:ext cx="2316422" cy="377190"/>
           </a:xfrm>
           <a:prstGeom prst="rect">
@@ -4203,13 +4238,13 @@
       </p:sp>
       <p:sp>
         <p:nvSpPr>
-          <p:cNvPr id="6" name="TextBox 5"/>
-          <p:cNvSpPr txBox="1"/>
-          <p:nvPr/>
-        </p:nvSpPr>
-        <p:spPr>
-          <a:xfrm>
-            <a:off x="2560255" y="946404"/>
+          <p:cNvPr id="7" name="TextBox 6"/>
+          <p:cNvSpPr txBox="1"/>
+          <p:nvPr/>
+        </p:nvSpPr>
+        <p:spPr>
+          <a:xfrm>
+            <a:off x="2682172" y="1289304"/>
             <a:ext cx="2316422" cy="301752"/>
           </a:xfrm>
           <a:prstGeom prst="rect">
@@ -4238,13 +4273,13 @@
       </p:sp>
       <p:sp>
         <p:nvSpPr>
-          <p:cNvPr id="7" name="Rectangle 6"/>
+          <p:cNvPr id="8" name="Rectangle 7"/>
           <p:cNvSpPr/>
           <p:nvPr/>
         </p:nvSpPr>
         <p:spPr>
           <a:xfrm>
-            <a:off x="4876678" y="891540"/>
+            <a:off x="4998594" y="1234440"/>
             <a:ext cx="2316422" cy="377190"/>
           </a:xfrm>
           <a:prstGeom prst="rect">
@@ -4284,13 +4319,13 @@
       </p:sp>
       <p:sp>
         <p:nvSpPr>
-          <p:cNvPr id="8" name="TextBox 7"/>
-          <p:cNvSpPr txBox="1"/>
-          <p:nvPr/>
-        </p:nvSpPr>
-        <p:spPr>
-          <a:xfrm>
-            <a:off x="4876678" y="946404"/>
+          <p:cNvPr id="9" name="TextBox 8"/>
+          <p:cNvSpPr txBox="1"/>
+          <p:nvPr/>
+        </p:nvSpPr>
+        <p:spPr>
+          <a:xfrm>
+            <a:off x="4998594" y="1289304"/>
             <a:ext cx="2316422" cy="301752"/>
           </a:xfrm>
           <a:prstGeom prst="rect">
@@ -4319,13 +4354,13 @@
       </p:sp>
       <p:sp>
         <p:nvSpPr>
-          <p:cNvPr id="9" name="Rectangle 8"/>
+          <p:cNvPr id="10" name="Rectangle 9"/>
           <p:cNvSpPr/>
           <p:nvPr/>
         </p:nvSpPr>
         <p:spPr>
           <a:xfrm>
-            <a:off x="7193100" y="891540"/>
+            <a:off x="7315017" y="1234440"/>
             <a:ext cx="2316422" cy="377190"/>
           </a:xfrm>
           <a:prstGeom prst="rect">
@@ -4365,13 +4400,13 @@
       </p:sp>
       <p:sp>
         <p:nvSpPr>
-          <p:cNvPr id="10" name="TextBox 9"/>
-          <p:cNvSpPr txBox="1"/>
-          <p:nvPr/>
-        </p:nvSpPr>
-        <p:spPr>
-          <a:xfrm>
-            <a:off x="7193100" y="946404"/>
+          <p:cNvPr id="11" name="TextBox 10"/>
+          <p:cNvSpPr txBox="1"/>
+          <p:nvPr/>
+        </p:nvSpPr>
+        <p:spPr>
+          <a:xfrm>
+            <a:off x="7315017" y="1289304"/>
             <a:ext cx="2316422" cy="301752"/>
           </a:xfrm>
           <a:prstGeom prst="rect">
@@ -4400,13 +4435,13 @@
       </p:sp>
       <p:sp>
         <p:nvSpPr>
-          <p:cNvPr id="11" name="Rectangle 10"/>
+          <p:cNvPr id="12" name="Rectangle 11"/>
           <p:cNvSpPr/>
           <p:nvPr/>
         </p:nvSpPr>
         <p:spPr>
           <a:xfrm>
-            <a:off x="9509522" y="891540"/>
+            <a:off x="9631439" y="1234440"/>
             <a:ext cx="2316422" cy="377190"/>
           </a:xfrm>
           <a:prstGeom prst="rect">
@@ -4446,13 +4481,13 @@
       </p:sp>
       <p:sp>
         <p:nvSpPr>
-          <p:cNvPr id="12" name="TextBox 11"/>
-          <p:cNvSpPr txBox="1"/>
-          <p:nvPr/>
-        </p:nvSpPr>
-        <p:spPr>
-          <a:xfrm>
-            <a:off x="9509522" y="946404"/>
+          <p:cNvPr id="13" name="TextBox 12"/>
+          <p:cNvSpPr txBox="1"/>
+          <p:nvPr/>
+        </p:nvSpPr>
+        <p:spPr>
+          <a:xfrm>
+            <a:off x="9631439" y="1289304"/>
             <a:ext cx="2316422" cy="301752"/>
           </a:xfrm>
           <a:prstGeom prst="rect">
@@ -4481,13 +4516,13 @@
       </p:sp>
       <p:sp>
         <p:nvSpPr>
-          <p:cNvPr id="13" name="Rectangle 12"/>
+          <p:cNvPr id="14" name="Rectangle 13"/>
           <p:cNvSpPr/>
           <p:nvPr/>
         </p:nvSpPr>
         <p:spPr>
           <a:xfrm>
-            <a:off x="365750" y="1268730"/>
+            <a:off x="487667" y="1611630"/>
             <a:ext cx="2194505" cy="534924"/>
           </a:xfrm>
           <a:prstGeom prst="rect">
@@ -4527,13 +4562,13 @@
       </p:sp>
       <p:sp>
         <p:nvSpPr>
-          <p:cNvPr id="14" name="TextBox 13"/>
-          <p:cNvSpPr txBox="1"/>
-          <p:nvPr/>
-        </p:nvSpPr>
-        <p:spPr>
-          <a:xfrm>
-            <a:off x="365750" y="1296161"/>
+          <p:cNvPr id="15" name="TextBox 14"/>
+          <p:cNvSpPr txBox="1"/>
+          <p:nvPr/>
+        </p:nvSpPr>
+        <p:spPr>
+          <a:xfrm>
+            <a:off x="487667" y="1639062"/>
             <a:ext cx="2194505" cy="480060"/>
           </a:xfrm>
           <a:prstGeom prst="rect">
@@ -4549,7 +4584,7 @@
           <a:p>
             <a:pPr algn="l"/>
             <a:r>
-              <a:rPr sz="750" b="0">
+              <a:rPr sz="800" b="0">
                 <a:solidFill>
                   <a:srgbClr val="1A1A1A"/>
                 </a:solidFill>
@@ -4562,13 +4597,13 @@
       </p:sp>
       <p:sp>
         <p:nvSpPr>
-          <p:cNvPr id="15" name="Rectangle 14"/>
+          <p:cNvPr id="16" name="Rectangle 15"/>
           <p:cNvSpPr/>
           <p:nvPr/>
         </p:nvSpPr>
         <p:spPr>
           <a:xfrm>
-            <a:off x="2560255" y="1268730"/>
+            <a:off x="2682172" y="1611630"/>
             <a:ext cx="2316422" cy="534924"/>
           </a:xfrm>
           <a:prstGeom prst="rect">
@@ -4608,13 +4643,13 @@
       </p:sp>
       <p:sp>
         <p:nvSpPr>
-          <p:cNvPr id="16" name="TextBox 15"/>
-          <p:cNvSpPr txBox="1"/>
-          <p:nvPr/>
-        </p:nvSpPr>
-        <p:spPr>
-          <a:xfrm>
-            <a:off x="2560255" y="1296161"/>
+          <p:cNvPr id="17" name="TextBox 16"/>
+          <p:cNvSpPr txBox="1"/>
+          <p:nvPr/>
+        </p:nvSpPr>
+        <p:spPr>
+          <a:xfrm>
+            <a:off x="2682172" y="1639062"/>
             <a:ext cx="2316422" cy="480060"/>
           </a:xfrm>
           <a:prstGeom prst="rect">
@@ -4630,7 +4665,7 @@
           <a:p>
             <a:pPr algn="l"/>
             <a:r>
-              <a:rPr sz="750" b="0">
+              <a:rPr sz="800" b="0">
                 <a:solidFill>
                   <a:srgbClr val="1A1A1A"/>
                 </a:solidFill>
@@ -4643,13 +4678,13 @@
       </p:sp>
       <p:sp>
         <p:nvSpPr>
-          <p:cNvPr id="17" name="Rectangle 16"/>
+          <p:cNvPr id="18" name="Rectangle 17"/>
           <p:cNvSpPr/>
           <p:nvPr/>
         </p:nvSpPr>
         <p:spPr>
           <a:xfrm>
-            <a:off x="4876678" y="1268730"/>
+            <a:off x="4998594" y="1611630"/>
             <a:ext cx="2316422" cy="534924"/>
           </a:xfrm>
           <a:prstGeom prst="rect">
@@ -4689,13 +4724,13 @@
       </p:sp>
       <p:sp>
         <p:nvSpPr>
-          <p:cNvPr id="18" name="TextBox 17"/>
-          <p:cNvSpPr txBox="1"/>
-          <p:nvPr/>
-        </p:nvSpPr>
-        <p:spPr>
-          <a:xfrm>
-            <a:off x="4876678" y="1296161"/>
+          <p:cNvPr id="19" name="TextBox 18"/>
+          <p:cNvSpPr txBox="1"/>
+          <p:nvPr/>
+        </p:nvSpPr>
+        <p:spPr>
+          <a:xfrm>
+            <a:off x="4998594" y="1639062"/>
             <a:ext cx="2316422" cy="480060"/>
           </a:xfrm>
           <a:prstGeom prst="rect">
@@ -4711,7 +4746,7 @@
           <a:p>
             <a:pPr algn="l"/>
             <a:r>
-              <a:rPr sz="750" b="0">
+              <a:rPr sz="800" b="0">
                 <a:solidFill>
                   <a:srgbClr val="1A1A1A"/>
                 </a:solidFill>
@@ -4724,13 +4759,13 @@
       </p:sp>
       <p:sp>
         <p:nvSpPr>
-          <p:cNvPr id="19" name="Rectangle 18"/>
+          <p:cNvPr id="20" name="Rectangle 19"/>
           <p:cNvSpPr/>
           <p:nvPr/>
         </p:nvSpPr>
         <p:spPr>
           <a:xfrm>
-            <a:off x="7193100" y="1268730"/>
+            <a:off x="7315017" y="1611630"/>
             <a:ext cx="2316422" cy="534924"/>
           </a:xfrm>
           <a:prstGeom prst="rect">
@@ -4770,13 +4805,13 @@
       </p:sp>
       <p:sp>
         <p:nvSpPr>
-          <p:cNvPr id="20" name="TextBox 19"/>
-          <p:cNvSpPr txBox="1"/>
-          <p:nvPr/>
-        </p:nvSpPr>
-        <p:spPr>
-          <a:xfrm>
-            <a:off x="7193100" y="1296161"/>
+          <p:cNvPr id="21" name="TextBox 20"/>
+          <p:cNvSpPr txBox="1"/>
+          <p:nvPr/>
+        </p:nvSpPr>
+        <p:spPr>
+          <a:xfrm>
+            <a:off x="7315017" y="1639062"/>
             <a:ext cx="2316422" cy="480060"/>
           </a:xfrm>
           <a:prstGeom prst="rect">
@@ -4792,7 +4827,7 @@
           <a:p>
             <a:pPr algn="l"/>
             <a:r>
-              <a:rPr sz="750" b="0">
+              <a:rPr sz="800" b="0">
                 <a:solidFill>
                   <a:srgbClr val="1A1A1A"/>
                 </a:solidFill>
@@ -4805,13 +4840,13 @@
       </p:sp>
       <p:sp>
         <p:nvSpPr>
-          <p:cNvPr id="21" name="Rectangle 20"/>
+          <p:cNvPr id="22" name="Rectangle 21"/>
           <p:cNvSpPr/>
           <p:nvPr/>
         </p:nvSpPr>
         <p:spPr>
           <a:xfrm>
-            <a:off x="9509522" y="1268730"/>
+            <a:off x="9631439" y="1611630"/>
             <a:ext cx="2316422" cy="534924"/>
           </a:xfrm>
           <a:prstGeom prst="rect">
@@ -4851,13 +4886,13 @@
       </p:sp>
       <p:sp>
         <p:nvSpPr>
-          <p:cNvPr id="22" name="TextBox 21"/>
-          <p:cNvSpPr txBox="1"/>
-          <p:nvPr/>
-        </p:nvSpPr>
-        <p:spPr>
-          <a:xfrm>
-            <a:off x="9509522" y="1296161"/>
+          <p:cNvPr id="23" name="TextBox 22"/>
+          <p:cNvSpPr txBox="1"/>
+          <p:nvPr/>
+        </p:nvSpPr>
+        <p:spPr>
+          <a:xfrm>
+            <a:off x="9631439" y="1639062"/>
             <a:ext cx="2316422" cy="480060"/>
           </a:xfrm>
           <a:prstGeom prst="rect">
@@ -4873,7 +4908,7 @@
           <a:p>
             <a:pPr algn="l"/>
             <a:r>
-              <a:rPr sz="750" b="0">
+              <a:rPr sz="800" b="0">
                 <a:solidFill>
                   <a:srgbClr val="1A1A1A"/>
                 </a:solidFill>
@@ -4886,13 +4921,13 @@
       </p:sp>
       <p:sp>
         <p:nvSpPr>
-          <p:cNvPr id="23" name="Rectangle 22"/>
+          <p:cNvPr id="24" name="Rectangle 23"/>
           <p:cNvSpPr/>
           <p:nvPr/>
         </p:nvSpPr>
         <p:spPr>
           <a:xfrm>
-            <a:off x="365750" y="1803654"/>
+            <a:off x="487667" y="2146554"/>
             <a:ext cx="2194505" cy="534924"/>
           </a:xfrm>
           <a:prstGeom prst="rect">
@@ -4932,13 +4967,13 @@
       </p:sp>
       <p:sp>
         <p:nvSpPr>
-          <p:cNvPr id="24" name="TextBox 23"/>
-          <p:cNvSpPr txBox="1"/>
-          <p:nvPr/>
-        </p:nvSpPr>
-        <p:spPr>
-          <a:xfrm>
-            <a:off x="365750" y="1831086"/>
+          <p:cNvPr id="25" name="TextBox 24"/>
+          <p:cNvSpPr txBox="1"/>
+          <p:nvPr/>
+        </p:nvSpPr>
+        <p:spPr>
+          <a:xfrm>
+            <a:off x="487667" y="2173986"/>
             <a:ext cx="2194505" cy="480060"/>
           </a:xfrm>
           <a:prstGeom prst="rect">
@@ -4954,7 +4989,7 @@
           <a:p>
             <a:pPr algn="l"/>
             <a:r>
-              <a:rPr sz="750" b="0">
+              <a:rPr sz="800" b="0">
                 <a:solidFill>
                   <a:srgbClr val="1A1A1A"/>
                 </a:solidFill>
@@ -4967,13 +5002,13 @@
       </p:sp>
       <p:sp>
         <p:nvSpPr>
-          <p:cNvPr id="25" name="Rectangle 24"/>
+          <p:cNvPr id="26" name="Rectangle 25"/>
           <p:cNvSpPr/>
           <p:nvPr/>
         </p:nvSpPr>
         <p:spPr>
           <a:xfrm>
-            <a:off x="2560255" y="1803654"/>
+            <a:off x="2682172" y="2146554"/>
             <a:ext cx="2316422" cy="534924"/>
           </a:xfrm>
           <a:prstGeom prst="rect">
@@ -5013,13 +5048,13 @@
       </p:sp>
       <p:sp>
         <p:nvSpPr>
-          <p:cNvPr id="26" name="TextBox 25"/>
-          <p:cNvSpPr txBox="1"/>
-          <p:nvPr/>
-        </p:nvSpPr>
-        <p:spPr>
-          <a:xfrm>
-            <a:off x="2560255" y="1831086"/>
+          <p:cNvPr id="27" name="TextBox 26"/>
+          <p:cNvSpPr txBox="1"/>
+          <p:nvPr/>
+        </p:nvSpPr>
+        <p:spPr>
+          <a:xfrm>
+            <a:off x="2682172" y="2173986"/>
             <a:ext cx="2316422" cy="480060"/>
           </a:xfrm>
           <a:prstGeom prst="rect">
@@ -5035,7 +5070,7 @@
           <a:p>
             <a:pPr algn="l"/>
             <a:r>
-              <a:rPr sz="750" b="0">
+              <a:rPr sz="800" b="0">
                 <a:solidFill>
                   <a:srgbClr val="1A1A1A"/>
                 </a:solidFill>
@@ -5048,13 +5083,13 @@
       </p:sp>
       <p:sp>
         <p:nvSpPr>
-          <p:cNvPr id="27" name="Rectangle 26"/>
+          <p:cNvPr id="28" name="Rectangle 27"/>
           <p:cNvSpPr/>
           <p:nvPr/>
         </p:nvSpPr>
         <p:spPr>
           <a:xfrm>
-            <a:off x="4876678" y="1803654"/>
+            <a:off x="4998594" y="2146554"/>
             <a:ext cx="2316422" cy="534924"/>
           </a:xfrm>
           <a:prstGeom prst="rect">
@@ -5094,13 +5129,13 @@
       </p:sp>
       <p:sp>
         <p:nvSpPr>
-          <p:cNvPr id="28" name="TextBox 27"/>
-          <p:cNvSpPr txBox="1"/>
-          <p:nvPr/>
-        </p:nvSpPr>
-        <p:spPr>
-          <a:xfrm>
-            <a:off x="4876678" y="1831086"/>
+          <p:cNvPr id="29" name="TextBox 28"/>
+          <p:cNvSpPr txBox="1"/>
+          <p:nvPr/>
+        </p:nvSpPr>
+        <p:spPr>
+          <a:xfrm>
+            <a:off x="4998594" y="2173986"/>
             <a:ext cx="2316422" cy="480060"/>
           </a:xfrm>
           <a:prstGeom prst="rect">
@@ -5116,7 +5151,7 @@
           <a:p>
             <a:pPr algn="l"/>
             <a:r>
-              <a:rPr sz="750" b="0">
+              <a:rPr sz="800" b="0">
                 <a:solidFill>
                   <a:srgbClr val="1A1A1A"/>
                 </a:solidFill>
@@ -5129,13 +5164,13 @@
       </p:sp>
       <p:sp>
         <p:nvSpPr>
-          <p:cNvPr id="29" name="Rectangle 28"/>
+          <p:cNvPr id="30" name="Rectangle 29"/>
           <p:cNvSpPr/>
           <p:nvPr/>
         </p:nvSpPr>
         <p:spPr>
           <a:xfrm>
-            <a:off x="7193100" y="1803654"/>
+            <a:off x="7315017" y="2146554"/>
             <a:ext cx="2316422" cy="534924"/>
           </a:xfrm>
           <a:prstGeom prst="rect">
@@ -5175,13 +5210,13 @@
       </p:sp>
       <p:sp>
         <p:nvSpPr>
-          <p:cNvPr id="30" name="TextBox 29"/>
-          <p:cNvSpPr txBox="1"/>
-          <p:nvPr/>
-        </p:nvSpPr>
-        <p:spPr>
-          <a:xfrm>
-            <a:off x="7193100" y="1831086"/>
+          <p:cNvPr id="31" name="TextBox 30"/>
+          <p:cNvSpPr txBox="1"/>
+          <p:nvPr/>
+        </p:nvSpPr>
+        <p:spPr>
+          <a:xfrm>
+            <a:off x="7315017" y="2173986"/>
             <a:ext cx="2316422" cy="480060"/>
           </a:xfrm>
           <a:prstGeom prst="rect">
@@ -5197,7 +5232,7 @@
           <a:p>
             <a:pPr algn="l"/>
             <a:r>
-              <a:rPr sz="750" b="0">
+              <a:rPr sz="800" b="0">
                 <a:solidFill>
                   <a:srgbClr val="1A1A1A"/>
                 </a:solidFill>
@@ -5210,13 +5245,13 @@
       </p:sp>
       <p:sp>
         <p:nvSpPr>
-          <p:cNvPr id="31" name="Rectangle 30"/>
+          <p:cNvPr id="32" name="Rectangle 31"/>
           <p:cNvSpPr/>
           <p:nvPr/>
         </p:nvSpPr>
         <p:spPr>
           <a:xfrm>
-            <a:off x="9509522" y="1803654"/>
+            <a:off x="9631439" y="2146554"/>
             <a:ext cx="2316422" cy="534924"/>
           </a:xfrm>
           <a:prstGeom prst="rect">
@@ -5256,13 +5291,13 @@
       </p:sp>
       <p:sp>
         <p:nvSpPr>
-          <p:cNvPr id="32" name="TextBox 31"/>
-          <p:cNvSpPr txBox="1"/>
-          <p:nvPr/>
-        </p:nvSpPr>
-        <p:spPr>
-          <a:xfrm>
-            <a:off x="9509522" y="1831086"/>
+          <p:cNvPr id="33" name="TextBox 32"/>
+          <p:cNvSpPr txBox="1"/>
+          <p:nvPr/>
+        </p:nvSpPr>
+        <p:spPr>
+          <a:xfrm>
+            <a:off x="9631439" y="2173986"/>
             <a:ext cx="2316422" cy="480060"/>
           </a:xfrm>
           <a:prstGeom prst="rect">
@@ -5278,7 +5313,7 @@
           <a:p>
             <a:pPr algn="l"/>
             <a:r>
-              <a:rPr sz="750" b="0">
+              <a:rPr sz="800" b="0">
                 <a:solidFill>
                   <a:srgbClr val="1A1A1A"/>
                 </a:solidFill>
@@ -5291,13 +5326,13 @@
       </p:sp>
       <p:sp>
         <p:nvSpPr>
-          <p:cNvPr id="33" name="Rectangle 32"/>
+          <p:cNvPr id="34" name="Rectangle 33"/>
           <p:cNvSpPr/>
           <p:nvPr/>
         </p:nvSpPr>
         <p:spPr>
           <a:xfrm>
-            <a:off x="365750" y="2338578"/>
+            <a:off x="487667" y="2681478"/>
             <a:ext cx="2194505" cy="534924"/>
           </a:xfrm>
           <a:prstGeom prst="rect">
@@ -5337,13 +5372,13 @@
       </p:sp>
       <p:sp>
         <p:nvSpPr>
-          <p:cNvPr id="34" name="TextBox 33"/>
-          <p:cNvSpPr txBox="1"/>
-          <p:nvPr/>
-        </p:nvSpPr>
-        <p:spPr>
-          <a:xfrm>
-            <a:off x="365750" y="2366010"/>
+          <p:cNvPr id="35" name="TextBox 34"/>
+          <p:cNvSpPr txBox="1"/>
+          <p:nvPr/>
+        </p:nvSpPr>
+        <p:spPr>
+          <a:xfrm>
+            <a:off x="487667" y="2708910"/>
             <a:ext cx="2194505" cy="480060"/>
           </a:xfrm>
           <a:prstGeom prst="rect">
@@ -5359,7 +5394,7 @@
           <a:p>
             <a:pPr algn="l"/>
             <a:r>
-              <a:rPr sz="750" b="0">
+              <a:rPr sz="800" b="0">
                 <a:solidFill>
                   <a:srgbClr val="1A1A1A"/>
                 </a:solidFill>
@@ -5372,13 +5407,13 @@
       </p:sp>
       <p:sp>
         <p:nvSpPr>
-          <p:cNvPr id="35" name="Rectangle 34"/>
+          <p:cNvPr id="36" name="Rectangle 35"/>
           <p:cNvSpPr/>
           <p:nvPr/>
         </p:nvSpPr>
         <p:spPr>
           <a:xfrm>
-            <a:off x="2560255" y="2338578"/>
+            <a:off x="2682172" y="2681478"/>
             <a:ext cx="2316422" cy="534924"/>
           </a:xfrm>
           <a:prstGeom prst="rect">
@@ -5418,13 +5453,13 @@
       </p:sp>
       <p:sp>
         <p:nvSpPr>
-          <p:cNvPr id="36" name="TextBox 35"/>
-          <p:cNvSpPr txBox="1"/>
-          <p:nvPr/>
-        </p:nvSpPr>
-        <p:spPr>
-          <a:xfrm>
-            <a:off x="2560255" y="2366010"/>
+          <p:cNvPr id="37" name="TextBox 36"/>
+          <p:cNvSpPr txBox="1"/>
+          <p:nvPr/>
+        </p:nvSpPr>
+        <p:spPr>
+          <a:xfrm>
+            <a:off x="2682172" y="2708910"/>
             <a:ext cx="2316422" cy="480060"/>
           </a:xfrm>
           <a:prstGeom prst="rect">
@@ -5440,7 +5475,7 @@
           <a:p>
             <a:pPr algn="l"/>
             <a:r>
-              <a:rPr sz="750" b="0">
+              <a:rPr sz="800" b="0">
                 <a:solidFill>
                   <a:srgbClr val="1A1A1A"/>
                 </a:solidFill>
@@ -5453,13 +5488,13 @@
       </p:sp>
       <p:sp>
         <p:nvSpPr>
-          <p:cNvPr id="37" name="Rectangle 36"/>
+          <p:cNvPr id="38" name="Rectangle 37"/>
           <p:cNvSpPr/>
           <p:nvPr/>
         </p:nvSpPr>
         <p:spPr>
           <a:xfrm>
-            <a:off x="4876678" y="2338578"/>
+            <a:off x="4998594" y="2681478"/>
             <a:ext cx="2316422" cy="534924"/>
           </a:xfrm>
           <a:prstGeom prst="rect">
@@ -5499,13 +5534,13 @@
       </p:sp>
       <p:sp>
         <p:nvSpPr>
-          <p:cNvPr id="38" name="TextBox 37"/>
-          <p:cNvSpPr txBox="1"/>
-          <p:nvPr/>
-        </p:nvSpPr>
-        <p:spPr>
-          <a:xfrm>
-            <a:off x="4876678" y="2366010"/>
+          <p:cNvPr id="39" name="TextBox 38"/>
+          <p:cNvSpPr txBox="1"/>
+          <p:nvPr/>
+        </p:nvSpPr>
+        <p:spPr>
+          <a:xfrm>
+            <a:off x="4998594" y="2708910"/>
             <a:ext cx="2316422" cy="480060"/>
           </a:xfrm>
           <a:prstGeom prst="rect">
@@ -5521,7 +5556,7 @@
           <a:p>
             <a:pPr algn="l"/>
             <a:r>
-              <a:rPr sz="750" b="0">
+              <a:rPr sz="800" b="0">
                 <a:solidFill>
                   <a:srgbClr val="1A1A1A"/>
                 </a:solidFill>
@@ -5534,13 +5569,13 @@
       </p:sp>
       <p:sp>
         <p:nvSpPr>
-          <p:cNvPr id="39" name="Rectangle 38"/>
+          <p:cNvPr id="40" name="Rectangle 39"/>
           <p:cNvSpPr/>
           <p:nvPr/>
         </p:nvSpPr>
         <p:spPr>
           <a:xfrm>
-            <a:off x="7193100" y="2338578"/>
+            <a:off x="7315017" y="2681478"/>
             <a:ext cx="2316422" cy="534924"/>
           </a:xfrm>
           <a:prstGeom prst="rect">
@@ -5580,13 +5615,13 @@
       </p:sp>
       <p:sp>
         <p:nvSpPr>
-          <p:cNvPr id="40" name="TextBox 39"/>
-          <p:cNvSpPr txBox="1"/>
-          <p:nvPr/>
-        </p:nvSpPr>
-        <p:spPr>
-          <a:xfrm>
-            <a:off x="7193100" y="2366010"/>
+          <p:cNvPr id="41" name="TextBox 40"/>
+          <p:cNvSpPr txBox="1"/>
+          <p:nvPr/>
+        </p:nvSpPr>
+        <p:spPr>
+          <a:xfrm>
+            <a:off x="7315017" y="2708910"/>
             <a:ext cx="2316422" cy="480060"/>
           </a:xfrm>
           <a:prstGeom prst="rect">
@@ -5602,7 +5637,7 @@
           <a:p>
             <a:pPr algn="l"/>
             <a:r>
-              <a:rPr sz="750" b="0">
+              <a:rPr sz="800" b="0">
                 <a:solidFill>
                   <a:srgbClr val="1A1A1A"/>
                 </a:solidFill>
@@ -5615,13 +5650,13 @@
       </p:sp>
       <p:sp>
         <p:nvSpPr>
-          <p:cNvPr id="41" name="Rectangle 40"/>
+          <p:cNvPr id="42" name="Rectangle 41"/>
           <p:cNvSpPr/>
           <p:nvPr/>
         </p:nvSpPr>
         <p:spPr>
           <a:xfrm>
-            <a:off x="9509522" y="2338578"/>
+            <a:off x="9631439" y="2681478"/>
             <a:ext cx="2316422" cy="534924"/>
           </a:xfrm>
           <a:prstGeom prst="rect">
@@ -5661,13 +5696,13 @@
       </p:sp>
       <p:sp>
         <p:nvSpPr>
-          <p:cNvPr id="42" name="TextBox 41"/>
-          <p:cNvSpPr txBox="1"/>
-          <p:nvPr/>
-        </p:nvSpPr>
-        <p:spPr>
-          <a:xfrm>
-            <a:off x="9509522" y="2366010"/>
+          <p:cNvPr id="43" name="TextBox 42"/>
+          <p:cNvSpPr txBox="1"/>
+          <p:nvPr/>
+        </p:nvSpPr>
+        <p:spPr>
+          <a:xfrm>
+            <a:off x="9631439" y="2708910"/>
             <a:ext cx="2316422" cy="480060"/>
           </a:xfrm>
           <a:prstGeom prst="rect">
@@ -5683,7 +5718,7 @@
           <a:p>
             <a:pPr algn="l"/>
             <a:r>
-              <a:rPr sz="750" b="0">
+              <a:rPr sz="800" b="0">
                 <a:solidFill>
                   <a:srgbClr val="1A1A1A"/>
                 </a:solidFill>
@@ -5696,13 +5731,13 @@
       </p:sp>
       <p:sp>
         <p:nvSpPr>
-          <p:cNvPr id="43" name="Rectangle 42"/>
+          <p:cNvPr id="44" name="Rectangle 43"/>
           <p:cNvSpPr/>
           <p:nvPr/>
         </p:nvSpPr>
         <p:spPr>
           <a:xfrm>
-            <a:off x="365750" y="2873502"/>
+            <a:off x="487667" y="3216402"/>
             <a:ext cx="2194505" cy="411480"/>
           </a:xfrm>
           <a:prstGeom prst="rect">
@@ -5742,13 +5777,13 @@
       </p:sp>
       <p:sp>
         <p:nvSpPr>
-          <p:cNvPr id="44" name="TextBox 43"/>
-          <p:cNvSpPr txBox="1"/>
-          <p:nvPr/>
-        </p:nvSpPr>
-        <p:spPr>
-          <a:xfrm>
-            <a:off x="365750" y="2900934"/>
+          <p:cNvPr id="45" name="TextBox 44"/>
+          <p:cNvSpPr txBox="1"/>
+          <p:nvPr/>
+        </p:nvSpPr>
+        <p:spPr>
+          <a:xfrm>
+            <a:off x="487667" y="3243834"/>
             <a:ext cx="2194505" cy="356616"/>
           </a:xfrm>
           <a:prstGeom prst="rect">
@@ -5764,7 +5799,7 @@
           <a:p>
             <a:pPr algn="l"/>
             <a:r>
-              <a:rPr sz="750" b="0">
+              <a:rPr sz="800" b="0">
                 <a:solidFill>
                   <a:srgbClr val="1A1A1A"/>
                 </a:solidFill>
@@ -5777,13 +5812,13 @@
       </p:sp>
       <p:sp>
         <p:nvSpPr>
-          <p:cNvPr id="45" name="Rectangle 44"/>
+          <p:cNvPr id="46" name="Rectangle 45"/>
           <p:cNvSpPr/>
           <p:nvPr/>
         </p:nvSpPr>
         <p:spPr>
           <a:xfrm>
-            <a:off x="2560255" y="2873502"/>
+            <a:off x="2682172" y="3216402"/>
             <a:ext cx="2316422" cy="411480"/>
           </a:xfrm>
           <a:prstGeom prst="rect">
@@ -5823,13 +5858,13 @@
       </p:sp>
       <p:sp>
         <p:nvSpPr>
-          <p:cNvPr id="46" name="TextBox 45"/>
-          <p:cNvSpPr txBox="1"/>
-          <p:nvPr/>
-        </p:nvSpPr>
-        <p:spPr>
-          <a:xfrm>
-            <a:off x="2560255" y="2900934"/>
+          <p:cNvPr id="47" name="TextBox 46"/>
+          <p:cNvSpPr txBox="1"/>
+          <p:nvPr/>
+        </p:nvSpPr>
+        <p:spPr>
+          <a:xfrm>
+            <a:off x="2682172" y="3243834"/>
             <a:ext cx="2316422" cy="356616"/>
           </a:xfrm>
           <a:prstGeom prst="rect">
@@ -5845,7 +5880,7 @@
           <a:p>
             <a:pPr algn="l"/>
             <a:r>
-              <a:rPr sz="750" b="0">
+              <a:rPr sz="800" b="0">
                 <a:solidFill>
                   <a:srgbClr val="1A1A1A"/>
                 </a:solidFill>
@@ -5858,13 +5893,13 @@
       </p:sp>
       <p:sp>
         <p:nvSpPr>
-          <p:cNvPr id="47" name="Rectangle 46"/>
+          <p:cNvPr id="48" name="Rectangle 47"/>
           <p:cNvSpPr/>
           <p:nvPr/>
         </p:nvSpPr>
         <p:spPr>
           <a:xfrm>
-            <a:off x="4876678" y="2873502"/>
+            <a:off x="4998594" y="3216402"/>
             <a:ext cx="2316422" cy="411480"/>
           </a:xfrm>
           <a:prstGeom prst="rect">
@@ -5904,13 +5939,13 @@
       </p:sp>
       <p:sp>
         <p:nvSpPr>
-          <p:cNvPr id="48" name="TextBox 47"/>
-          <p:cNvSpPr txBox="1"/>
-          <p:nvPr/>
-        </p:nvSpPr>
-        <p:spPr>
-          <a:xfrm>
-            <a:off x="4876678" y="2900934"/>
+          <p:cNvPr id="49" name="TextBox 48"/>
+          <p:cNvSpPr txBox="1"/>
+          <p:nvPr/>
+        </p:nvSpPr>
+        <p:spPr>
+          <a:xfrm>
+            <a:off x="4998594" y="3243834"/>
             <a:ext cx="2316422" cy="356616"/>
           </a:xfrm>
           <a:prstGeom prst="rect">
@@ -5926,7 +5961,7 @@
           <a:p>
             <a:pPr algn="l"/>
             <a:r>
-              <a:rPr sz="750" b="0">
+              <a:rPr sz="800" b="0">
                 <a:solidFill>
                   <a:srgbClr val="1A1A1A"/>
                 </a:solidFill>
@@ -5939,13 +5974,13 @@
       </p:sp>
       <p:sp>
         <p:nvSpPr>
-          <p:cNvPr id="49" name="Rectangle 48"/>
+          <p:cNvPr id="50" name="Rectangle 49"/>
           <p:cNvSpPr/>
           <p:nvPr/>
         </p:nvSpPr>
         <p:spPr>
           <a:xfrm>
-            <a:off x="7193100" y="2873502"/>
+            <a:off x="7315017" y="3216402"/>
             <a:ext cx="2316422" cy="411480"/>
           </a:xfrm>
           <a:prstGeom prst="rect">
@@ -5985,13 +6020,13 @@
       </p:sp>
       <p:sp>
         <p:nvSpPr>
-          <p:cNvPr id="50" name="TextBox 49"/>
-          <p:cNvSpPr txBox="1"/>
-          <p:nvPr/>
-        </p:nvSpPr>
-        <p:spPr>
-          <a:xfrm>
-            <a:off x="7193100" y="2900934"/>
+          <p:cNvPr id="51" name="TextBox 50"/>
+          <p:cNvSpPr txBox="1"/>
+          <p:nvPr/>
+        </p:nvSpPr>
+        <p:spPr>
+          <a:xfrm>
+            <a:off x="7315017" y="3243834"/>
             <a:ext cx="2316422" cy="356616"/>
           </a:xfrm>
           <a:prstGeom prst="rect">
@@ -6007,7 +6042,7 @@
           <a:p>
             <a:pPr algn="l"/>
             <a:r>
-              <a:rPr sz="750" b="0">
+              <a:rPr sz="800" b="0">
                 <a:solidFill>
                   <a:srgbClr val="1A1A1A"/>
                 </a:solidFill>
@@ -6020,13 +6055,13 @@
       </p:sp>
       <p:sp>
         <p:nvSpPr>
-          <p:cNvPr id="51" name="Rectangle 50"/>
+          <p:cNvPr id="52" name="Rectangle 51"/>
           <p:cNvSpPr/>
           <p:nvPr/>
         </p:nvSpPr>
         <p:spPr>
           <a:xfrm>
-            <a:off x="9509522" y="2873502"/>
+            <a:off x="9631439" y="3216402"/>
             <a:ext cx="2316422" cy="411480"/>
           </a:xfrm>
           <a:prstGeom prst="rect">
@@ -6066,13 +6101,13 @@
       </p:sp>
       <p:sp>
         <p:nvSpPr>
-          <p:cNvPr id="52" name="TextBox 51"/>
-          <p:cNvSpPr txBox="1"/>
-          <p:nvPr/>
-        </p:nvSpPr>
-        <p:spPr>
-          <a:xfrm>
-            <a:off x="9509522" y="2900934"/>
+          <p:cNvPr id="53" name="TextBox 52"/>
+          <p:cNvSpPr txBox="1"/>
+          <p:nvPr/>
+        </p:nvSpPr>
+        <p:spPr>
+          <a:xfrm>
+            <a:off x="9631439" y="3243834"/>
             <a:ext cx="2316422" cy="356616"/>
           </a:xfrm>
           <a:prstGeom prst="rect">
@@ -6088,7 +6123,7 @@
           <a:p>
             <a:pPr algn="l"/>
             <a:r>
-              <a:rPr sz="750" b="0">
+              <a:rPr sz="800" b="0">
                 <a:solidFill>
                   <a:srgbClr val="1A1A1A"/>
                 </a:solidFill>
@@ -6101,13 +6136,13 @@
       </p:sp>
       <p:sp>
         <p:nvSpPr>
-          <p:cNvPr id="53" name="Rectangle 52"/>
+          <p:cNvPr id="54" name="Rectangle 53"/>
           <p:cNvSpPr/>
           <p:nvPr/>
         </p:nvSpPr>
         <p:spPr>
           <a:xfrm>
-            <a:off x="365750" y="3284982"/>
+            <a:off x="487667" y="3627882"/>
             <a:ext cx="2194505" cy="534924"/>
           </a:xfrm>
           <a:prstGeom prst="rect">
@@ -6147,13 +6182,13 @@
       </p:sp>
       <p:sp>
         <p:nvSpPr>
-          <p:cNvPr id="54" name="TextBox 53"/>
-          <p:cNvSpPr txBox="1"/>
-          <p:nvPr/>
-        </p:nvSpPr>
-        <p:spPr>
-          <a:xfrm>
-            <a:off x="365750" y="3312414"/>
+          <p:cNvPr id="55" name="TextBox 54"/>
+          <p:cNvSpPr txBox="1"/>
+          <p:nvPr/>
+        </p:nvSpPr>
+        <p:spPr>
+          <a:xfrm>
+            <a:off x="487667" y="3655314"/>
             <a:ext cx="2194505" cy="480060"/>
           </a:xfrm>
           <a:prstGeom prst="rect">
@@ -6169,7 +6204,7 @@
           <a:p>
             <a:pPr algn="l"/>
             <a:r>
-              <a:rPr sz="750" b="0">
+              <a:rPr sz="800" b="0">
                 <a:solidFill>
                   <a:srgbClr val="1A1A1A"/>
                 </a:solidFill>
@@ -6182,13 +6217,13 @@
       </p:sp>
       <p:sp>
         <p:nvSpPr>
-          <p:cNvPr id="55" name="Rectangle 54"/>
+          <p:cNvPr id="56" name="Rectangle 55"/>
           <p:cNvSpPr/>
           <p:nvPr/>
         </p:nvSpPr>
         <p:spPr>
           <a:xfrm>
-            <a:off x="2560255" y="3284982"/>
+            <a:off x="2682172" y="3627882"/>
             <a:ext cx="2316422" cy="534924"/>
           </a:xfrm>
           <a:prstGeom prst="rect">
@@ -6228,13 +6263,13 @@
       </p:sp>
       <p:sp>
         <p:nvSpPr>
-          <p:cNvPr id="56" name="TextBox 55"/>
-          <p:cNvSpPr txBox="1"/>
-          <p:nvPr/>
-        </p:nvSpPr>
-        <p:spPr>
-          <a:xfrm>
-            <a:off x="2560255" y="3312414"/>
+          <p:cNvPr id="57" name="TextBox 56"/>
+          <p:cNvSpPr txBox="1"/>
+          <p:nvPr/>
+        </p:nvSpPr>
+        <p:spPr>
+          <a:xfrm>
+            <a:off x="2682172" y="3655314"/>
             <a:ext cx="2316422" cy="480060"/>
           </a:xfrm>
           <a:prstGeom prst="rect">
@@ -6250,7 +6285,7 @@
           <a:p>
             <a:pPr algn="l"/>
             <a:r>
-              <a:rPr sz="750" b="0">
+              <a:rPr sz="800" b="0">
                 <a:solidFill>
                   <a:srgbClr val="1A1A1A"/>
                 </a:solidFill>
@@ -6263,13 +6298,13 @@
       </p:sp>
       <p:sp>
         <p:nvSpPr>
-          <p:cNvPr id="57" name="Rectangle 56"/>
+          <p:cNvPr id="58" name="Rectangle 57"/>
           <p:cNvSpPr/>
           <p:nvPr/>
         </p:nvSpPr>
         <p:spPr>
           <a:xfrm>
-            <a:off x="4876678" y="3284982"/>
+            <a:off x="4998594" y="3627882"/>
             <a:ext cx="2316422" cy="534924"/>
           </a:xfrm>
           <a:prstGeom prst="rect">
@@ -6309,13 +6344,13 @@
       </p:sp>
       <p:sp>
         <p:nvSpPr>
-          <p:cNvPr id="58" name="TextBox 57"/>
-          <p:cNvSpPr txBox="1"/>
-          <p:nvPr/>
-        </p:nvSpPr>
-        <p:spPr>
-          <a:xfrm>
-            <a:off x="4876678" y="3312414"/>
+          <p:cNvPr id="59" name="TextBox 58"/>
+          <p:cNvSpPr txBox="1"/>
+          <p:nvPr/>
+        </p:nvSpPr>
+        <p:spPr>
+          <a:xfrm>
+            <a:off x="4998594" y="3655314"/>
             <a:ext cx="2316422" cy="480060"/>
           </a:xfrm>
           <a:prstGeom prst="rect">
@@ -6331,7 +6366,7 @@
           <a:p>
             <a:pPr algn="l"/>
             <a:r>
-              <a:rPr sz="750" b="0">
+              <a:rPr sz="800" b="0">
                 <a:solidFill>
                   <a:srgbClr val="1A1A1A"/>
                 </a:solidFill>
@@ -6344,13 +6379,13 @@
       </p:sp>
       <p:sp>
         <p:nvSpPr>
-          <p:cNvPr id="59" name="Rectangle 58"/>
+          <p:cNvPr id="60" name="Rectangle 59"/>
           <p:cNvSpPr/>
           <p:nvPr/>
         </p:nvSpPr>
         <p:spPr>
           <a:xfrm>
-            <a:off x="7193100" y="3284982"/>
+            <a:off x="7315017" y="3627882"/>
             <a:ext cx="2316422" cy="534924"/>
           </a:xfrm>
           <a:prstGeom prst="rect">
@@ -6390,13 +6425,13 @@
       </p:sp>
       <p:sp>
         <p:nvSpPr>
-          <p:cNvPr id="60" name="TextBox 59"/>
-          <p:cNvSpPr txBox="1"/>
-          <p:nvPr/>
-        </p:nvSpPr>
-        <p:spPr>
-          <a:xfrm>
-            <a:off x="7193100" y="3312414"/>
+          <p:cNvPr id="61" name="TextBox 60"/>
+          <p:cNvSpPr txBox="1"/>
+          <p:nvPr/>
+        </p:nvSpPr>
+        <p:spPr>
+          <a:xfrm>
+            <a:off x="7315017" y="3655314"/>
             <a:ext cx="2316422" cy="480060"/>
           </a:xfrm>
           <a:prstGeom prst="rect">
@@ -6412,7 +6447,7 @@
           <a:p>
             <a:pPr algn="l"/>
             <a:r>
-              <a:rPr sz="750" b="0">
+              <a:rPr sz="800" b="0">
                 <a:solidFill>
                   <a:srgbClr val="1A1A1A"/>
                 </a:solidFill>
@@ -6425,13 +6460,13 @@
       </p:sp>
       <p:sp>
         <p:nvSpPr>
-          <p:cNvPr id="61" name="Rectangle 60"/>
+          <p:cNvPr id="62" name="Rectangle 61"/>
           <p:cNvSpPr/>
           <p:nvPr/>
         </p:nvSpPr>
         <p:spPr>
           <a:xfrm>
-            <a:off x="9509522" y="3284982"/>
+            <a:off x="9631439" y="3627882"/>
             <a:ext cx="2316422" cy="534924"/>
           </a:xfrm>
           <a:prstGeom prst="rect">
@@ -6471,13 +6506,13 @@
       </p:sp>
       <p:sp>
         <p:nvSpPr>
-          <p:cNvPr id="62" name="TextBox 61"/>
-          <p:cNvSpPr txBox="1"/>
-          <p:nvPr/>
-        </p:nvSpPr>
-        <p:spPr>
-          <a:xfrm>
-            <a:off x="9509522" y="3312414"/>
+          <p:cNvPr id="63" name="TextBox 62"/>
+          <p:cNvSpPr txBox="1"/>
+          <p:nvPr/>
+        </p:nvSpPr>
+        <p:spPr>
+          <a:xfrm>
+            <a:off x="9631439" y="3655314"/>
             <a:ext cx="2316422" cy="480060"/>
           </a:xfrm>
           <a:prstGeom prst="rect">
@@ -6493,7 +6528,7 @@
           <a:p>
             <a:pPr algn="l"/>
             <a:r>
-              <a:rPr sz="750" b="0">
+              <a:rPr sz="800" b="0">
                 <a:solidFill>
                   <a:srgbClr val="1A1A1A"/>
                 </a:solidFill>
@@ -6506,13 +6541,13 @@
       </p:sp>
       <p:sp>
         <p:nvSpPr>
-          <p:cNvPr id="63" name="Rectangle 62"/>
+          <p:cNvPr id="64" name="Rectangle 63"/>
           <p:cNvSpPr/>
           <p:nvPr/>
         </p:nvSpPr>
         <p:spPr>
           <a:xfrm>
-            <a:off x="365750" y="3819906"/>
+            <a:off x="487667" y="4162806"/>
             <a:ext cx="2194505" cy="534924"/>
           </a:xfrm>
           <a:prstGeom prst="rect">
@@ -6552,13 +6587,13 @@
       </p:sp>
       <p:sp>
         <p:nvSpPr>
-          <p:cNvPr id="64" name="TextBox 63"/>
-          <p:cNvSpPr txBox="1"/>
-          <p:nvPr/>
-        </p:nvSpPr>
-        <p:spPr>
-          <a:xfrm>
-            <a:off x="365750" y="3847337"/>
+          <p:cNvPr id="65" name="TextBox 64"/>
+          <p:cNvSpPr txBox="1"/>
+          <p:nvPr/>
+        </p:nvSpPr>
+        <p:spPr>
+          <a:xfrm>
+            <a:off x="487667" y="4190237"/>
             <a:ext cx="2194505" cy="480060"/>
           </a:xfrm>
           <a:prstGeom prst="rect">
@@ -6574,7 +6609,7 @@
           <a:p>
             <a:pPr algn="l"/>
             <a:r>
-              <a:rPr sz="750" b="0">
+              <a:rPr sz="800" b="0">
                 <a:solidFill>
                   <a:srgbClr val="1A1A1A"/>
                 </a:solidFill>
@@ -6587,13 +6622,13 @@
       </p:sp>
       <p:sp>
         <p:nvSpPr>
-          <p:cNvPr id="65" name="Rectangle 64"/>
+          <p:cNvPr id="66" name="Rectangle 65"/>
           <p:cNvSpPr/>
           <p:nvPr/>
         </p:nvSpPr>
         <p:spPr>
           <a:xfrm>
-            <a:off x="2560255" y="3819906"/>
+            <a:off x="2682172" y="4162806"/>
             <a:ext cx="2316422" cy="534924"/>
           </a:xfrm>
           <a:prstGeom prst="rect">
@@ -6633,13 +6668,13 @@
       </p:sp>
       <p:sp>
         <p:nvSpPr>
-          <p:cNvPr id="66" name="TextBox 65"/>
-          <p:cNvSpPr txBox="1"/>
-          <p:nvPr/>
-        </p:nvSpPr>
-        <p:spPr>
-          <a:xfrm>
-            <a:off x="2560255" y="3847337"/>
+          <p:cNvPr id="67" name="TextBox 66"/>
+          <p:cNvSpPr txBox="1"/>
+          <p:nvPr/>
+        </p:nvSpPr>
+        <p:spPr>
+          <a:xfrm>
+            <a:off x="2682172" y="4190237"/>
             <a:ext cx="2316422" cy="480060"/>
           </a:xfrm>
           <a:prstGeom prst="rect">
@@ -6655,7 +6690,7 @@
           <a:p>
             <a:pPr algn="l"/>
             <a:r>
-              <a:rPr sz="750" b="0">
+              <a:rPr sz="800" b="0">
                 <a:solidFill>
                   <a:srgbClr val="1A1A1A"/>
                 </a:solidFill>
@@ -6668,13 +6703,13 @@
       </p:sp>
       <p:sp>
         <p:nvSpPr>
-          <p:cNvPr id="67" name="Rectangle 66"/>
+          <p:cNvPr id="68" name="Rectangle 67"/>
           <p:cNvSpPr/>
           <p:nvPr/>
         </p:nvSpPr>
         <p:spPr>
           <a:xfrm>
-            <a:off x="4876678" y="3819906"/>
+            <a:off x="4998594" y="4162806"/>
             <a:ext cx="2316422" cy="534924"/>
           </a:xfrm>
           <a:prstGeom prst="rect">
@@ -6714,13 +6749,13 @@
       </p:sp>
       <p:sp>
         <p:nvSpPr>
-          <p:cNvPr id="68" name="TextBox 67"/>
-          <p:cNvSpPr txBox="1"/>
-          <p:nvPr/>
-        </p:nvSpPr>
-        <p:spPr>
-          <a:xfrm>
-            <a:off x="4876678" y="3847337"/>
+          <p:cNvPr id="69" name="TextBox 68"/>
+          <p:cNvSpPr txBox="1"/>
+          <p:nvPr/>
+        </p:nvSpPr>
+        <p:spPr>
+          <a:xfrm>
+            <a:off x="4998594" y="4190237"/>
             <a:ext cx="2316422" cy="480060"/>
           </a:xfrm>
           <a:prstGeom prst="rect">
@@ -6736,7 +6771,7 @@
           <a:p>
             <a:pPr algn="l"/>
             <a:r>
-              <a:rPr sz="750" b="0">
+              <a:rPr sz="800" b="0">
                 <a:solidFill>
                   <a:srgbClr val="1A1A1A"/>
                 </a:solidFill>
@@ -6749,13 +6784,13 @@
       </p:sp>
       <p:sp>
         <p:nvSpPr>
-          <p:cNvPr id="69" name="Rectangle 68"/>
+          <p:cNvPr id="70" name="Rectangle 69"/>
           <p:cNvSpPr/>
           <p:nvPr/>
         </p:nvSpPr>
         <p:spPr>
           <a:xfrm>
-            <a:off x="7193100" y="3819906"/>
+            <a:off x="7315017" y="4162806"/>
             <a:ext cx="2316422" cy="534924"/>
           </a:xfrm>
           <a:prstGeom prst="rect">
@@ -6795,13 +6830,13 @@
       </p:sp>
       <p:sp>
         <p:nvSpPr>
-          <p:cNvPr id="70" name="TextBox 69"/>
-          <p:cNvSpPr txBox="1"/>
-          <p:nvPr/>
-        </p:nvSpPr>
-        <p:spPr>
-          <a:xfrm>
-            <a:off x="7193100" y="3847337"/>
+          <p:cNvPr id="71" name="TextBox 70"/>
+          <p:cNvSpPr txBox="1"/>
+          <p:nvPr/>
+        </p:nvSpPr>
+        <p:spPr>
+          <a:xfrm>
+            <a:off x="7315017" y="4190237"/>
             <a:ext cx="2316422" cy="480060"/>
           </a:xfrm>
           <a:prstGeom prst="rect">
@@ -6817,7 +6852,7 @@
           <a:p>
             <a:pPr algn="l"/>
             <a:r>
-              <a:rPr sz="750" b="0">
+              <a:rPr sz="800" b="0">
                 <a:solidFill>
                   <a:srgbClr val="1A1A1A"/>
                 </a:solidFill>
@@ -6830,13 +6865,13 @@
       </p:sp>
       <p:sp>
         <p:nvSpPr>
-          <p:cNvPr id="71" name="Rectangle 70"/>
+          <p:cNvPr id="72" name="Rectangle 71"/>
           <p:cNvSpPr/>
           <p:nvPr/>
         </p:nvSpPr>
         <p:spPr>
           <a:xfrm>
-            <a:off x="9509522" y="3819906"/>
+            <a:off x="9631439" y="4162806"/>
             <a:ext cx="2316422" cy="534924"/>
           </a:xfrm>
           <a:prstGeom prst="rect">
@@ -6876,13 +6911,13 @@
       </p:sp>
       <p:sp>
         <p:nvSpPr>
-          <p:cNvPr id="72" name="TextBox 71"/>
-          <p:cNvSpPr txBox="1"/>
-          <p:nvPr/>
-        </p:nvSpPr>
-        <p:spPr>
-          <a:xfrm>
-            <a:off x="9509522" y="3847337"/>
+          <p:cNvPr id="73" name="TextBox 72"/>
+          <p:cNvSpPr txBox="1"/>
+          <p:nvPr/>
+        </p:nvSpPr>
+        <p:spPr>
+          <a:xfrm>
+            <a:off x="9631439" y="4190237"/>
             <a:ext cx="2316422" cy="480060"/>
           </a:xfrm>
           <a:prstGeom prst="rect">
@@ -6898,7 +6933,7 @@
           <a:p>
             <a:pPr algn="l"/>
             <a:r>
-              <a:rPr sz="750" b="0">
+              <a:rPr sz="800" b="0">
                 <a:solidFill>
                   <a:srgbClr val="1A1A1A"/>
                 </a:solidFill>
@@ -6911,13 +6946,13 @@
       </p:sp>
       <p:sp>
         <p:nvSpPr>
-          <p:cNvPr id="73" name="Rectangle 72"/>
+          <p:cNvPr id="74" name="Rectangle 73"/>
           <p:cNvSpPr/>
           <p:nvPr/>
         </p:nvSpPr>
         <p:spPr>
           <a:xfrm>
-            <a:off x="365750" y="4354829"/>
+            <a:off x="487667" y="4697730"/>
             <a:ext cx="2194505" cy="534924"/>
           </a:xfrm>
           <a:prstGeom prst="rect">
@@ -6957,13 +6992,13 @@
       </p:sp>
       <p:sp>
         <p:nvSpPr>
-          <p:cNvPr id="74" name="TextBox 73"/>
-          <p:cNvSpPr txBox="1"/>
-          <p:nvPr/>
-        </p:nvSpPr>
-        <p:spPr>
-          <a:xfrm>
-            <a:off x="365750" y="4382261"/>
+          <p:cNvPr id="75" name="TextBox 74"/>
+          <p:cNvSpPr txBox="1"/>
+          <p:nvPr/>
+        </p:nvSpPr>
+        <p:spPr>
+          <a:xfrm>
+            <a:off x="487667" y="4725162"/>
             <a:ext cx="2194505" cy="480060"/>
           </a:xfrm>
           <a:prstGeom prst="rect">
@@ -6979,7 +7014,7 @@
           <a:p>
             <a:pPr algn="l"/>
             <a:r>
-              <a:rPr sz="750" b="0">
+              <a:rPr sz="800" b="0">
                 <a:solidFill>
                   <a:srgbClr val="1A1A1A"/>
                 </a:solidFill>
@@ -6992,13 +7027,13 @@
       </p:sp>
       <p:sp>
         <p:nvSpPr>
-          <p:cNvPr id="75" name="Rectangle 74"/>
+          <p:cNvPr id="76" name="Rectangle 75"/>
           <p:cNvSpPr/>
           <p:nvPr/>
         </p:nvSpPr>
         <p:spPr>
           <a:xfrm>
-            <a:off x="2560255" y="4354829"/>
+            <a:off x="2682172" y="4697730"/>
             <a:ext cx="2316422" cy="534924"/>
           </a:xfrm>
           <a:prstGeom prst="rect">
@@ -7038,13 +7073,13 @@
       </p:sp>
       <p:sp>
         <p:nvSpPr>
-          <p:cNvPr id="76" name="TextBox 75"/>
-          <p:cNvSpPr txBox="1"/>
-          <p:nvPr/>
-        </p:nvSpPr>
-        <p:spPr>
-          <a:xfrm>
-            <a:off x="2560255" y="4382261"/>
+          <p:cNvPr id="77" name="TextBox 76"/>
+          <p:cNvSpPr txBox="1"/>
+          <p:nvPr/>
+        </p:nvSpPr>
+        <p:spPr>
+          <a:xfrm>
+            <a:off x="2682172" y="4725162"/>
             <a:ext cx="2316422" cy="480060"/>
           </a:xfrm>
           <a:prstGeom prst="rect">
@@ -7060,7 +7095,7 @@
           <a:p>
             <a:pPr algn="l"/>
             <a:r>
-              <a:rPr sz="750" b="0">
+              <a:rPr sz="800" b="0">
                 <a:solidFill>
                   <a:srgbClr val="1A1A1A"/>
                 </a:solidFill>
@@ -7073,13 +7108,13 @@
       </p:sp>
       <p:sp>
         <p:nvSpPr>
-          <p:cNvPr id="77" name="Rectangle 76"/>
+          <p:cNvPr id="78" name="Rectangle 77"/>
           <p:cNvSpPr/>
           <p:nvPr/>
         </p:nvSpPr>
         <p:spPr>
           <a:xfrm>
-            <a:off x="4876678" y="4354829"/>
+            <a:off x="4998594" y="4697730"/>
             <a:ext cx="2316422" cy="534924"/>
           </a:xfrm>
           <a:prstGeom prst="rect">
@@ -7119,13 +7154,13 @@
       </p:sp>
       <p:sp>
         <p:nvSpPr>
-          <p:cNvPr id="78" name="TextBox 77"/>
-          <p:cNvSpPr txBox="1"/>
-          <p:nvPr/>
-        </p:nvSpPr>
-        <p:spPr>
-          <a:xfrm>
-            <a:off x="4876678" y="4382261"/>
+          <p:cNvPr id="79" name="TextBox 78"/>
+          <p:cNvSpPr txBox="1"/>
+          <p:nvPr/>
+        </p:nvSpPr>
+        <p:spPr>
+          <a:xfrm>
+            <a:off x="4998594" y="4725162"/>
             <a:ext cx="2316422" cy="480060"/>
           </a:xfrm>
           <a:prstGeom prst="rect">
@@ -7141,7 +7176,7 @@
           <a:p>
             <a:pPr algn="l"/>
             <a:r>
-              <a:rPr sz="750" b="0">
+              <a:rPr sz="800" b="0">
                 <a:solidFill>
                   <a:srgbClr val="1A1A1A"/>
                 </a:solidFill>
@@ -7154,13 +7189,13 @@
       </p:sp>
       <p:sp>
         <p:nvSpPr>
-          <p:cNvPr id="79" name="Rectangle 78"/>
+          <p:cNvPr id="80" name="Rectangle 79"/>
           <p:cNvSpPr/>
           <p:nvPr/>
         </p:nvSpPr>
         <p:spPr>
           <a:xfrm>
-            <a:off x="7193100" y="4354829"/>
+            <a:off x="7315017" y="4697730"/>
             <a:ext cx="2316422" cy="534924"/>
           </a:xfrm>
           <a:prstGeom prst="rect">
@@ -7200,13 +7235,13 @@
       </p:sp>
       <p:sp>
         <p:nvSpPr>
-          <p:cNvPr id="80" name="TextBox 79"/>
-          <p:cNvSpPr txBox="1"/>
-          <p:nvPr/>
-        </p:nvSpPr>
-        <p:spPr>
-          <a:xfrm>
-            <a:off x="7193100" y="4382261"/>
+          <p:cNvPr id="81" name="TextBox 80"/>
+          <p:cNvSpPr txBox="1"/>
+          <p:nvPr/>
+        </p:nvSpPr>
+        <p:spPr>
+          <a:xfrm>
+            <a:off x="7315017" y="4725162"/>
             <a:ext cx="2316422" cy="480060"/>
           </a:xfrm>
           <a:prstGeom prst="rect">
@@ -7222,7 +7257,7 @@
           <a:p>
             <a:pPr algn="l"/>
             <a:r>
-              <a:rPr sz="750" b="0">
+              <a:rPr sz="800" b="0">
                 <a:solidFill>
                   <a:srgbClr val="1A1A1A"/>
                 </a:solidFill>
@@ -7235,13 +7270,13 @@
       </p:sp>
       <p:sp>
         <p:nvSpPr>
-          <p:cNvPr id="81" name="Rectangle 80"/>
+          <p:cNvPr id="82" name="Rectangle 81"/>
           <p:cNvSpPr/>
           <p:nvPr/>
         </p:nvSpPr>
         <p:spPr>
           <a:xfrm>
-            <a:off x="9509522" y="4354829"/>
+            <a:off x="9631439" y="4697730"/>
             <a:ext cx="2316422" cy="534924"/>
           </a:xfrm>
           <a:prstGeom prst="rect">
@@ -7281,13 +7316,13 @@
       </p:sp>
       <p:sp>
         <p:nvSpPr>
-          <p:cNvPr id="82" name="TextBox 81"/>
-          <p:cNvSpPr txBox="1"/>
-          <p:nvPr/>
-        </p:nvSpPr>
-        <p:spPr>
-          <a:xfrm>
-            <a:off x="9509522" y="4382261"/>
+          <p:cNvPr id="83" name="TextBox 82"/>
+          <p:cNvSpPr txBox="1"/>
+          <p:nvPr/>
+        </p:nvSpPr>
+        <p:spPr>
+          <a:xfrm>
+            <a:off x="9631439" y="4725162"/>
             <a:ext cx="2316422" cy="480060"/>
           </a:xfrm>
           <a:prstGeom prst="rect">
@@ -7303,7 +7338,7 @@
           <a:p>
             <a:pPr algn="l"/>
             <a:r>
-              <a:rPr sz="750" b="0">
+              <a:rPr sz="800" b="0">
                 <a:solidFill>
                   <a:srgbClr val="1A1A1A"/>
                 </a:solidFill>
@@ -7316,13 +7351,13 @@
       </p:sp>
       <p:sp>
         <p:nvSpPr>
-          <p:cNvPr id="83" name="Rectangle 82"/>
+          <p:cNvPr id="84" name="Rectangle 83"/>
           <p:cNvSpPr/>
           <p:nvPr/>
         </p:nvSpPr>
         <p:spPr>
           <a:xfrm>
-            <a:off x="365750" y="4889754"/>
+            <a:off x="487667" y="5232654"/>
             <a:ext cx="2194505" cy="534924"/>
           </a:xfrm>
           <a:prstGeom prst="rect">
@@ -7362,13 +7397,13 @@
       </p:sp>
       <p:sp>
         <p:nvSpPr>
-          <p:cNvPr id="84" name="TextBox 83"/>
-          <p:cNvSpPr txBox="1"/>
-          <p:nvPr/>
-        </p:nvSpPr>
-        <p:spPr>
-          <a:xfrm>
-            <a:off x="365750" y="4917186"/>
+          <p:cNvPr id="85" name="TextBox 84"/>
+          <p:cNvSpPr txBox="1"/>
+          <p:nvPr/>
+        </p:nvSpPr>
+        <p:spPr>
+          <a:xfrm>
+            <a:off x="487667" y="5260086"/>
             <a:ext cx="2194505" cy="480060"/>
           </a:xfrm>
           <a:prstGeom prst="rect">
@@ -7384,7 +7419,7 @@
           <a:p>
             <a:pPr algn="l"/>
             <a:r>
-              <a:rPr sz="750" b="0">
+              <a:rPr sz="800" b="0">
                 <a:solidFill>
                   <a:srgbClr val="1A1A1A"/>
                 </a:solidFill>
@@ -7397,13 +7432,13 @@
       </p:sp>
       <p:sp>
         <p:nvSpPr>
-          <p:cNvPr id="85" name="Rectangle 84"/>
+          <p:cNvPr id="86" name="Rectangle 85"/>
           <p:cNvSpPr/>
           <p:nvPr/>
         </p:nvSpPr>
         <p:spPr>
           <a:xfrm>
-            <a:off x="2560255" y="4889754"/>
+            <a:off x="2682172" y="5232654"/>
             <a:ext cx="2316422" cy="534924"/>
           </a:xfrm>
           <a:prstGeom prst="rect">
@@ -7443,13 +7478,13 @@
       </p:sp>
       <p:sp>
         <p:nvSpPr>
-          <p:cNvPr id="86" name="TextBox 85"/>
-          <p:cNvSpPr txBox="1"/>
-          <p:nvPr/>
-        </p:nvSpPr>
-        <p:spPr>
-          <a:xfrm>
-            <a:off x="2560255" y="4917186"/>
+          <p:cNvPr id="87" name="TextBox 86"/>
+          <p:cNvSpPr txBox="1"/>
+          <p:nvPr/>
+        </p:nvSpPr>
+        <p:spPr>
+          <a:xfrm>
+            <a:off x="2682172" y="5260086"/>
             <a:ext cx="2316422" cy="480060"/>
           </a:xfrm>
           <a:prstGeom prst="rect">
@@ -7465,7 +7500,7 @@
           <a:p>
             <a:pPr algn="l"/>
             <a:r>
-              <a:rPr sz="750" b="0">
+              <a:rPr sz="800" b="0">
                 <a:solidFill>
                   <a:srgbClr val="1A1A1A"/>
                 </a:solidFill>
@@ -7478,13 +7513,13 @@
       </p:sp>
       <p:sp>
         <p:nvSpPr>
-          <p:cNvPr id="87" name="Rectangle 86"/>
+          <p:cNvPr id="88" name="Rectangle 87"/>
           <p:cNvSpPr/>
           <p:nvPr/>
         </p:nvSpPr>
         <p:spPr>
           <a:xfrm>
-            <a:off x="4876678" y="4889754"/>
+            <a:off x="4998594" y="5232654"/>
             <a:ext cx="2316422" cy="534924"/>
           </a:xfrm>
           <a:prstGeom prst="rect">
@@ -7524,13 +7559,13 @@
       </p:sp>
       <p:sp>
         <p:nvSpPr>
-          <p:cNvPr id="88" name="TextBox 87"/>
-          <p:cNvSpPr txBox="1"/>
-          <p:nvPr/>
-        </p:nvSpPr>
-        <p:spPr>
-          <a:xfrm>
-            <a:off x="4876678" y="4917186"/>
+          <p:cNvPr id="89" name="TextBox 88"/>
+          <p:cNvSpPr txBox="1"/>
+          <p:nvPr/>
+        </p:nvSpPr>
+        <p:spPr>
+          <a:xfrm>
+            <a:off x="4998594" y="5260086"/>
             <a:ext cx="2316422" cy="480060"/>
           </a:xfrm>
           <a:prstGeom prst="rect">
@@ -7546,7 +7581,7 @@
           <a:p>
             <a:pPr algn="l"/>
             <a:r>
-              <a:rPr sz="750" b="0">
+              <a:rPr sz="800" b="0">
                 <a:solidFill>
                   <a:srgbClr val="1A1A1A"/>
                 </a:solidFill>
@@ -7559,13 +7594,13 @@
       </p:sp>
       <p:sp>
         <p:nvSpPr>
-          <p:cNvPr id="89" name="Rectangle 88"/>
+          <p:cNvPr id="90" name="Rectangle 89"/>
           <p:cNvSpPr/>
           <p:nvPr/>
         </p:nvSpPr>
         <p:spPr>
           <a:xfrm>
-            <a:off x="7193100" y="4889754"/>
+            <a:off x="7315017" y="5232654"/>
             <a:ext cx="2316422" cy="534924"/>
           </a:xfrm>
           <a:prstGeom prst="rect">
@@ -7605,13 +7640,13 @@
       </p:sp>
       <p:sp>
         <p:nvSpPr>
-          <p:cNvPr id="90" name="TextBox 89"/>
-          <p:cNvSpPr txBox="1"/>
-          <p:nvPr/>
-        </p:nvSpPr>
-        <p:spPr>
-          <a:xfrm>
-            <a:off x="7193100" y="4917186"/>
+          <p:cNvPr id="91" name="TextBox 90"/>
+          <p:cNvSpPr txBox="1"/>
+          <p:nvPr/>
+        </p:nvSpPr>
+        <p:spPr>
+          <a:xfrm>
+            <a:off x="7315017" y="5260086"/>
             <a:ext cx="2316422" cy="480060"/>
           </a:xfrm>
           <a:prstGeom prst="rect">
@@ -7627,7 +7662,7 @@
           <a:p>
             <a:pPr algn="l"/>
             <a:r>
-              <a:rPr sz="750" b="0">
+              <a:rPr sz="800" b="0">
                 <a:solidFill>
                   <a:srgbClr val="1A1A1A"/>
                 </a:solidFill>
@@ -7640,13 +7675,13 @@
       </p:sp>
       <p:sp>
         <p:nvSpPr>
-          <p:cNvPr id="91" name="Rectangle 90"/>
+          <p:cNvPr id="92" name="Rectangle 91"/>
           <p:cNvSpPr/>
           <p:nvPr/>
         </p:nvSpPr>
         <p:spPr>
           <a:xfrm>
-            <a:off x="9509522" y="4889754"/>
+            <a:off x="9631439" y="5232654"/>
             <a:ext cx="2316422" cy="534924"/>
           </a:xfrm>
           <a:prstGeom prst="rect">
@@ -7686,13 +7721,13 @@
       </p:sp>
       <p:sp>
         <p:nvSpPr>
-          <p:cNvPr id="92" name="TextBox 91"/>
-          <p:cNvSpPr txBox="1"/>
-          <p:nvPr/>
-        </p:nvSpPr>
-        <p:spPr>
-          <a:xfrm>
-            <a:off x="9509522" y="4917186"/>
+          <p:cNvPr id="93" name="TextBox 92"/>
+          <p:cNvSpPr txBox="1"/>
+          <p:nvPr/>
+        </p:nvSpPr>
+        <p:spPr>
+          <a:xfrm>
+            <a:off x="9631439" y="5260086"/>
             <a:ext cx="2316422" cy="480060"/>
           </a:xfrm>
           <a:prstGeom prst="rect">
@@ -7708,7 +7743,7 @@
           <a:p>
             <a:pPr algn="l"/>
             <a:r>
-              <a:rPr sz="750" b="0">
+              <a:rPr sz="800" b="0">
                 <a:solidFill>
                   <a:srgbClr val="1A1A1A"/>
                 </a:solidFill>
@@ -7721,13 +7756,13 @@
       </p:sp>
       <p:sp>
         <p:nvSpPr>
-          <p:cNvPr id="93" name="Rectangle 92"/>
+          <p:cNvPr id="94" name="Rectangle 93"/>
           <p:cNvSpPr/>
           <p:nvPr/>
         </p:nvSpPr>
         <p:spPr>
           <a:xfrm>
-            <a:off x="365750" y="5424678"/>
+            <a:off x="487667" y="5767578"/>
             <a:ext cx="2194505" cy="411480"/>
           </a:xfrm>
           <a:prstGeom prst="rect">
@@ -7767,13 +7802,13 @@
       </p:sp>
       <p:sp>
         <p:nvSpPr>
-          <p:cNvPr id="94" name="TextBox 93"/>
-          <p:cNvSpPr txBox="1"/>
-          <p:nvPr/>
-        </p:nvSpPr>
-        <p:spPr>
-          <a:xfrm>
-            <a:off x="365750" y="5452110"/>
+          <p:cNvPr id="95" name="TextBox 94"/>
+          <p:cNvSpPr txBox="1"/>
+          <p:nvPr/>
+        </p:nvSpPr>
+        <p:spPr>
+          <a:xfrm>
+            <a:off x="487667" y="5795010"/>
             <a:ext cx="2194505" cy="356616"/>
           </a:xfrm>
           <a:prstGeom prst="rect">
@@ -7789,7 +7824,7 @@
           <a:p>
             <a:pPr algn="l"/>
             <a:r>
-              <a:rPr sz="750" b="0">
+              <a:rPr sz="800" b="0">
                 <a:solidFill>
                   <a:srgbClr val="1A1A1A"/>
                 </a:solidFill>
@@ -7802,13 +7837,13 @@
       </p:sp>
       <p:sp>
         <p:nvSpPr>
-          <p:cNvPr id="95" name="Rectangle 94"/>
+          <p:cNvPr id="96" name="Rectangle 95"/>
           <p:cNvSpPr/>
           <p:nvPr/>
         </p:nvSpPr>
         <p:spPr>
           <a:xfrm>
-            <a:off x="2560255" y="5424678"/>
+            <a:off x="2682172" y="5767578"/>
             <a:ext cx="2316422" cy="411480"/>
           </a:xfrm>
           <a:prstGeom prst="rect">
@@ -7848,13 +7883,13 @@
       </p:sp>
       <p:sp>
         <p:nvSpPr>
-          <p:cNvPr id="96" name="TextBox 95"/>
-          <p:cNvSpPr txBox="1"/>
-          <p:nvPr/>
-        </p:nvSpPr>
-        <p:spPr>
-          <a:xfrm>
-            <a:off x="2560255" y="5452110"/>
+          <p:cNvPr id="97" name="TextBox 96"/>
+          <p:cNvSpPr txBox="1"/>
+          <p:nvPr/>
+        </p:nvSpPr>
+        <p:spPr>
+          <a:xfrm>
+            <a:off x="2682172" y="5795010"/>
             <a:ext cx="2316422" cy="356616"/>
           </a:xfrm>
           <a:prstGeom prst="rect">
@@ -7870,7 +7905,7 @@
           <a:p>
             <a:pPr algn="l"/>
             <a:r>
-              <a:rPr sz="750" b="0">
+              <a:rPr sz="800" b="0">
                 <a:solidFill>
                   <a:srgbClr val="1A1A1A"/>
                 </a:solidFill>
@@ -7883,13 +7918,13 @@
       </p:sp>
       <p:sp>
         <p:nvSpPr>
-          <p:cNvPr id="97" name="Rectangle 96"/>
+          <p:cNvPr id="98" name="Rectangle 97"/>
           <p:cNvSpPr/>
           <p:nvPr/>
         </p:nvSpPr>
         <p:spPr>
           <a:xfrm>
-            <a:off x="4876678" y="5424678"/>
+            <a:off x="4998594" y="5767578"/>
             <a:ext cx="2316422" cy="411480"/>
           </a:xfrm>
           <a:prstGeom prst="rect">
@@ -7929,13 +7964,13 @@
       </p:sp>
       <p:sp>
         <p:nvSpPr>
-          <p:cNvPr id="98" name="TextBox 97"/>
-          <p:cNvSpPr txBox="1"/>
-          <p:nvPr/>
-        </p:nvSpPr>
-        <p:spPr>
-          <a:xfrm>
-            <a:off x="4876678" y="5452110"/>
+          <p:cNvPr id="99" name="TextBox 98"/>
+          <p:cNvSpPr txBox="1"/>
+          <p:nvPr/>
+        </p:nvSpPr>
+        <p:spPr>
+          <a:xfrm>
+            <a:off x="4998594" y="5795010"/>
             <a:ext cx="2316422" cy="356616"/>
           </a:xfrm>
           <a:prstGeom prst="rect">
@@ -7951,7 +7986,7 @@
           <a:p>
             <a:pPr algn="l"/>
             <a:r>
-              <a:rPr sz="750" b="0">
+              <a:rPr sz="800" b="0">
                 <a:solidFill>
                   <a:srgbClr val="1A1A1A"/>
                 </a:solidFill>
@@ -7964,13 +7999,13 @@
       </p:sp>
       <p:sp>
         <p:nvSpPr>
-          <p:cNvPr id="99" name="Rectangle 98"/>
+          <p:cNvPr id="100" name="Rectangle 99"/>
           <p:cNvSpPr/>
           <p:nvPr/>
         </p:nvSpPr>
         <p:spPr>
           <a:xfrm>
-            <a:off x="7193100" y="5424678"/>
+            <a:off x="7315017" y="5767578"/>
             <a:ext cx="2316422" cy="411480"/>
           </a:xfrm>
           <a:prstGeom prst="rect">
@@ -8010,13 +8045,13 @@
       </p:sp>
       <p:sp>
         <p:nvSpPr>
-          <p:cNvPr id="100" name="TextBox 99"/>
-          <p:cNvSpPr txBox="1"/>
-          <p:nvPr/>
-        </p:nvSpPr>
-        <p:spPr>
-          <a:xfrm>
-            <a:off x="7193100" y="5452110"/>
+          <p:cNvPr id="101" name="TextBox 100"/>
+          <p:cNvSpPr txBox="1"/>
+          <p:nvPr/>
+        </p:nvSpPr>
+        <p:spPr>
+          <a:xfrm>
+            <a:off x="7315017" y="5795010"/>
             <a:ext cx="2316422" cy="356616"/>
           </a:xfrm>
           <a:prstGeom prst="rect">
@@ -8032,7 +8067,7 @@
           <a:p>
             <a:pPr algn="l"/>
             <a:r>
-              <a:rPr sz="750" b="0">
+              <a:rPr sz="800" b="0">
                 <a:solidFill>
                   <a:srgbClr val="1A1A1A"/>
                 </a:solidFill>
@@ -8045,13 +8080,13 @@
       </p:sp>
       <p:sp>
         <p:nvSpPr>
-          <p:cNvPr id="101" name="Rectangle 100"/>
+          <p:cNvPr id="102" name="Rectangle 101"/>
           <p:cNvSpPr/>
           <p:nvPr/>
         </p:nvSpPr>
         <p:spPr>
           <a:xfrm>
-            <a:off x="9509522" y="5424678"/>
+            <a:off x="9631439" y="5767578"/>
             <a:ext cx="2316422" cy="411480"/>
           </a:xfrm>
           <a:prstGeom prst="rect">
@@ -8091,13 +8126,13 @@
       </p:sp>
       <p:sp>
         <p:nvSpPr>
-          <p:cNvPr id="102" name="TextBox 101"/>
-          <p:cNvSpPr txBox="1"/>
-          <p:nvPr/>
-        </p:nvSpPr>
-        <p:spPr>
-          <a:xfrm>
-            <a:off x="9509522" y="5452110"/>
+          <p:cNvPr id="103" name="TextBox 102"/>
+          <p:cNvSpPr txBox="1"/>
+          <p:nvPr/>
+        </p:nvSpPr>
+        <p:spPr>
+          <a:xfrm>
+            <a:off x="9631439" y="5795010"/>
             <a:ext cx="2316422" cy="356616"/>
           </a:xfrm>
           <a:prstGeom prst="rect">
@@ -8113,7 +8148,7 @@
           <a:p>
             <a:pPr algn="l"/>
             <a:r>
-              <a:rPr sz="750" b="0">
+              <a:rPr sz="800" b="0">
                 <a:solidFill>
                   <a:srgbClr val="1A1A1A"/>
                 </a:solidFill>
@@ -8126,14 +8161,14 @@
       </p:sp>
       <p:sp>
         <p:nvSpPr>
-          <p:cNvPr id="103" name="TextBox 102"/>
-          <p:cNvSpPr txBox="1"/>
-          <p:nvPr/>
-        </p:nvSpPr>
-        <p:spPr>
-          <a:xfrm>
-            <a:off x="365750" y="5904738"/>
-            <a:ext cx="10972525" cy="274320"/>
+          <p:cNvPr id="104" name="TextBox 103"/>
+          <p:cNvSpPr txBox="1"/>
+          <p:nvPr/>
+        </p:nvSpPr>
+        <p:spPr>
+          <a:xfrm>
+            <a:off x="487667" y="6247638"/>
+            <a:ext cx="11216359" cy="274320"/>
           </a:xfrm>
           <a:prstGeom prst="rect">
             <a:avLst/>
@@ -8161,7 +8196,7 @@
       </p:sp>
       <p:sp>
         <p:nvSpPr>
-          <p:cNvPr id="104" name="TextBox 103"/>
+          <p:cNvPr id="105" name="TextBox 104"/>
           <p:cNvSpPr txBox="1"/>
           <p:nvPr/>
         </p:nvSpPr>
@@ -8196,7 +8231,7 @@
       </p:sp>
       <p:sp>
         <p:nvSpPr>
-          <p:cNvPr id="105" name="TextBox 104"/>
+          <p:cNvPr id="106" name="TextBox 105"/>
           <p:cNvSpPr txBox="1"/>
           <p:nvPr/>
         </p:nvSpPr>
@@ -8255,42 +8290,77 @@
         </p:nvSpPr>
         <p:spPr>
           <a:xfrm>
-            <a:off x="365750" y="274320"/>
-            <a:ext cx="10972525" cy="480060"/>
-          </a:xfrm>
-          <a:prstGeom prst="rect">
-            <a:avLst/>
-          </a:prstGeom>
-          <a:noFill/>
-        </p:spPr>
-        <p:txBody>
-          <a:bodyPr wrap="square" lIns="36000" rIns="36000" tIns="18000" bIns="18000">
-            <a:spAutoFit/>
-          </a:bodyPr>
-          <a:lstStyle/>
-          <a:p>
-            <a:pPr algn="l"/>
-            <a:r>
-              <a:rPr sz="1700" b="1">
+            <a:off x="487667" y="137160"/>
+            <a:ext cx="7315017" cy="274320"/>
+          </a:xfrm>
+          <a:prstGeom prst="rect">
+            <a:avLst/>
+          </a:prstGeom>
+          <a:noFill/>
+        </p:spPr>
+        <p:txBody>
+          <a:bodyPr wrap="square" lIns="36000" rIns="36000" tIns="18000" bIns="18000">
+            <a:spAutoFit/>
+          </a:bodyPr>
+          <a:lstStyle/>
+          <a:p>
+            <a:pPr algn="l"/>
+            <a:r>
+              <a:rPr sz="900" b="0">
+                <a:solidFill>
+                  <a:srgbClr val="767676"/>
+                </a:solidFill>
+                <a:latin typeface="Pretendard"/>
+              </a:rPr>
+              <a:t>환경분석보고서</a:t>
+            </a:r>
+          </a:p>
+        </p:txBody>
+      </p:sp>
+      <p:sp>
+        <p:nvSpPr>
+          <p:cNvPr id="3" name="TextBox 2"/>
+          <p:cNvSpPr txBox="1"/>
+          <p:nvPr/>
+        </p:nvSpPr>
+        <p:spPr>
+          <a:xfrm>
+            <a:off x="487667" y="548640"/>
+            <a:ext cx="11216359" cy="548640"/>
+          </a:xfrm>
+          <a:prstGeom prst="rect">
+            <a:avLst/>
+          </a:prstGeom>
+          <a:noFill/>
+        </p:spPr>
+        <p:txBody>
+          <a:bodyPr wrap="square" lIns="36000" rIns="36000" tIns="18000" bIns="18000">
+            <a:spAutoFit/>
+          </a:bodyPr>
+          <a:lstStyle/>
+          <a:p>
+            <a:pPr algn="l"/>
+            <a:r>
+              <a:rPr sz="2400" b="1">
                 <a:solidFill>
                   <a:srgbClr val="1A1A1A"/>
                 </a:solidFill>
                 <a:latin typeface="Pretendard"/>
               </a:rPr>
-              <a:t>2. 시장·트렌드</a:t>
-            </a:r>
-          </a:p>
-        </p:txBody>
-      </p:sp>
-      <p:sp>
-        <p:nvSpPr>
-          <p:cNvPr id="3" name="Rectangle 2"/>
+              <a:t>시장·트렌드</a:t>
+            </a:r>
+          </a:p>
+        </p:txBody>
+      </p:sp>
+      <p:sp>
+        <p:nvSpPr>
+          <p:cNvPr id="4" name="Rectangle 3"/>
           <p:cNvSpPr/>
           <p:nvPr/>
         </p:nvSpPr>
         <p:spPr>
           <a:xfrm>
-            <a:off x="365750" y="891540"/>
+            <a:off x="487667" y="1234440"/>
             <a:ext cx="3169840" cy="377190"/>
           </a:xfrm>
           <a:prstGeom prst="rect">
@@ -8330,13 +8400,13 @@
       </p:sp>
       <p:sp>
         <p:nvSpPr>
-          <p:cNvPr id="4" name="TextBox 3"/>
-          <p:cNvSpPr txBox="1"/>
-          <p:nvPr/>
-        </p:nvSpPr>
-        <p:spPr>
-          <a:xfrm>
-            <a:off x="365750" y="946404"/>
+          <p:cNvPr id="5" name="TextBox 4"/>
+          <p:cNvSpPr txBox="1"/>
+          <p:nvPr/>
+        </p:nvSpPr>
+        <p:spPr>
+          <a:xfrm>
+            <a:off x="487667" y="1289304"/>
             <a:ext cx="3169840" cy="301752"/>
           </a:xfrm>
           <a:prstGeom prst="rect">
@@ -8365,13 +8435,13 @@
       </p:sp>
       <p:sp>
         <p:nvSpPr>
-          <p:cNvPr id="5" name="Rectangle 4"/>
+          <p:cNvPr id="6" name="Rectangle 5"/>
           <p:cNvSpPr/>
           <p:nvPr/>
         </p:nvSpPr>
         <p:spPr>
           <a:xfrm>
-            <a:off x="3535591" y="891540"/>
+            <a:off x="3657508" y="1234440"/>
             <a:ext cx="4145176" cy="377190"/>
           </a:xfrm>
           <a:prstGeom prst="rect">
@@ -8411,13 +8481,13 @@
       </p:sp>
       <p:sp>
         <p:nvSpPr>
-          <p:cNvPr id="6" name="TextBox 5"/>
-          <p:cNvSpPr txBox="1"/>
-          <p:nvPr/>
-        </p:nvSpPr>
-        <p:spPr>
-          <a:xfrm>
-            <a:off x="3535591" y="946404"/>
+          <p:cNvPr id="7" name="TextBox 6"/>
+          <p:cNvSpPr txBox="1"/>
+          <p:nvPr/>
+        </p:nvSpPr>
+        <p:spPr>
+          <a:xfrm>
+            <a:off x="3657508" y="1289304"/>
             <a:ext cx="4145176" cy="301752"/>
           </a:xfrm>
           <a:prstGeom prst="rect">
@@ -8446,13 +8516,13 @@
       </p:sp>
       <p:sp>
         <p:nvSpPr>
-          <p:cNvPr id="7" name="Rectangle 6"/>
+          <p:cNvPr id="8" name="Rectangle 7"/>
           <p:cNvSpPr/>
           <p:nvPr/>
         </p:nvSpPr>
         <p:spPr>
           <a:xfrm>
-            <a:off x="7680767" y="891540"/>
+            <a:off x="7802684" y="1234440"/>
             <a:ext cx="4145176" cy="377190"/>
           </a:xfrm>
           <a:prstGeom prst="rect">
@@ -8492,13 +8562,13 @@
       </p:sp>
       <p:sp>
         <p:nvSpPr>
-          <p:cNvPr id="8" name="TextBox 7"/>
-          <p:cNvSpPr txBox="1"/>
-          <p:nvPr/>
-        </p:nvSpPr>
-        <p:spPr>
-          <a:xfrm>
-            <a:off x="7680767" y="946404"/>
+          <p:cNvPr id="9" name="TextBox 8"/>
+          <p:cNvSpPr txBox="1"/>
+          <p:nvPr/>
+        </p:nvSpPr>
+        <p:spPr>
+          <a:xfrm>
+            <a:off x="7802684" y="1289304"/>
             <a:ext cx="4145176" cy="301752"/>
           </a:xfrm>
           <a:prstGeom prst="rect">
@@ -8527,13 +8597,13 @@
       </p:sp>
       <p:sp>
         <p:nvSpPr>
-          <p:cNvPr id="9" name="Rectangle 8"/>
+          <p:cNvPr id="10" name="Rectangle 9"/>
           <p:cNvSpPr/>
           <p:nvPr/>
         </p:nvSpPr>
         <p:spPr>
           <a:xfrm>
-            <a:off x="365750" y="1268730"/>
+            <a:off x="487667" y="1611630"/>
             <a:ext cx="3169840" cy="534924"/>
           </a:xfrm>
           <a:prstGeom prst="rect">
@@ -8573,13 +8643,13 @@
       </p:sp>
       <p:sp>
         <p:nvSpPr>
-          <p:cNvPr id="10" name="TextBox 9"/>
-          <p:cNvSpPr txBox="1"/>
-          <p:nvPr/>
-        </p:nvSpPr>
-        <p:spPr>
-          <a:xfrm>
-            <a:off x="365750" y="1296161"/>
+          <p:cNvPr id="11" name="TextBox 10"/>
+          <p:cNvSpPr txBox="1"/>
+          <p:nvPr/>
+        </p:nvSpPr>
+        <p:spPr>
+          <a:xfrm>
+            <a:off x="487667" y="1639062"/>
             <a:ext cx="3169840" cy="480060"/>
           </a:xfrm>
           <a:prstGeom prst="rect">
@@ -8595,7 +8665,7 @@
           <a:p>
             <a:pPr algn="l"/>
             <a:r>
-              <a:rPr sz="750" b="0">
+              <a:rPr sz="800" b="0">
                 <a:solidFill>
                   <a:srgbClr val="1A1A1A"/>
                 </a:solidFill>
@@ -8608,13 +8678,13 @@
       </p:sp>
       <p:sp>
         <p:nvSpPr>
-          <p:cNvPr id="11" name="Rectangle 10"/>
+          <p:cNvPr id="12" name="Rectangle 11"/>
           <p:cNvSpPr/>
           <p:nvPr/>
         </p:nvSpPr>
         <p:spPr>
           <a:xfrm>
-            <a:off x="3535591" y="1268730"/>
+            <a:off x="3657508" y="1611630"/>
             <a:ext cx="4145176" cy="534924"/>
           </a:xfrm>
           <a:prstGeom prst="rect">
@@ -8654,13 +8724,13 @@
       </p:sp>
       <p:sp>
         <p:nvSpPr>
-          <p:cNvPr id="12" name="TextBox 11"/>
-          <p:cNvSpPr txBox="1"/>
-          <p:nvPr/>
-        </p:nvSpPr>
-        <p:spPr>
-          <a:xfrm>
-            <a:off x="3535591" y="1296161"/>
+          <p:cNvPr id="13" name="TextBox 12"/>
+          <p:cNvSpPr txBox="1"/>
+          <p:nvPr/>
+        </p:nvSpPr>
+        <p:spPr>
+          <a:xfrm>
+            <a:off x="3657508" y="1639062"/>
             <a:ext cx="4145176" cy="480060"/>
           </a:xfrm>
           <a:prstGeom prst="rect">
@@ -8676,7 +8746,7 @@
           <a:p>
             <a:pPr algn="l"/>
             <a:r>
-              <a:rPr sz="750" b="0">
+              <a:rPr sz="800" b="0">
                 <a:solidFill>
                   <a:srgbClr val="1A1A1A"/>
                 </a:solidFill>
@@ -8689,13 +8759,13 @@
       </p:sp>
       <p:sp>
         <p:nvSpPr>
-          <p:cNvPr id="13" name="Rectangle 12"/>
+          <p:cNvPr id="14" name="Rectangle 13"/>
           <p:cNvSpPr/>
           <p:nvPr/>
         </p:nvSpPr>
         <p:spPr>
           <a:xfrm>
-            <a:off x="7680767" y="1268730"/>
+            <a:off x="7802684" y="1611630"/>
             <a:ext cx="4145176" cy="534924"/>
           </a:xfrm>
           <a:prstGeom prst="rect">
@@ -8735,13 +8805,13 @@
       </p:sp>
       <p:sp>
         <p:nvSpPr>
-          <p:cNvPr id="14" name="TextBox 13"/>
-          <p:cNvSpPr txBox="1"/>
-          <p:nvPr/>
-        </p:nvSpPr>
-        <p:spPr>
-          <a:xfrm>
-            <a:off x="7680767" y="1296161"/>
+          <p:cNvPr id="15" name="TextBox 14"/>
+          <p:cNvSpPr txBox="1"/>
+          <p:nvPr/>
+        </p:nvSpPr>
+        <p:spPr>
+          <a:xfrm>
+            <a:off x="7802684" y="1639062"/>
             <a:ext cx="4145176" cy="480060"/>
           </a:xfrm>
           <a:prstGeom prst="rect">
@@ -8757,7 +8827,7 @@
           <a:p>
             <a:pPr algn="l"/>
             <a:r>
-              <a:rPr sz="750" b="0">
+              <a:rPr sz="800" b="0">
                 <a:solidFill>
                   <a:srgbClr val="1A1A1A"/>
                 </a:solidFill>
@@ -8770,13 +8840,13 @@
       </p:sp>
       <p:sp>
         <p:nvSpPr>
-          <p:cNvPr id="15" name="Rectangle 14"/>
+          <p:cNvPr id="16" name="Rectangle 15"/>
           <p:cNvSpPr/>
           <p:nvPr/>
         </p:nvSpPr>
         <p:spPr>
           <a:xfrm>
-            <a:off x="365750" y="1803654"/>
+            <a:off x="487667" y="2146554"/>
             <a:ext cx="3169840" cy="534924"/>
           </a:xfrm>
           <a:prstGeom prst="rect">
@@ -8816,13 +8886,13 @@
       </p:sp>
       <p:sp>
         <p:nvSpPr>
-          <p:cNvPr id="16" name="TextBox 15"/>
-          <p:cNvSpPr txBox="1"/>
-          <p:nvPr/>
-        </p:nvSpPr>
-        <p:spPr>
-          <a:xfrm>
-            <a:off x="365750" y="1831086"/>
+          <p:cNvPr id="17" name="TextBox 16"/>
+          <p:cNvSpPr txBox="1"/>
+          <p:nvPr/>
+        </p:nvSpPr>
+        <p:spPr>
+          <a:xfrm>
+            <a:off x="487667" y="2173986"/>
             <a:ext cx="3169840" cy="480060"/>
           </a:xfrm>
           <a:prstGeom prst="rect">
@@ -8838,7 +8908,7 @@
           <a:p>
             <a:pPr algn="l"/>
             <a:r>
-              <a:rPr sz="750" b="0">
+              <a:rPr sz="800" b="0">
                 <a:solidFill>
                   <a:srgbClr val="1A1A1A"/>
                 </a:solidFill>
@@ -8851,13 +8921,13 @@
       </p:sp>
       <p:sp>
         <p:nvSpPr>
-          <p:cNvPr id="17" name="Rectangle 16"/>
+          <p:cNvPr id="18" name="Rectangle 17"/>
           <p:cNvSpPr/>
           <p:nvPr/>
         </p:nvSpPr>
         <p:spPr>
           <a:xfrm>
-            <a:off x="3535591" y="1803654"/>
+            <a:off x="3657508" y="2146554"/>
             <a:ext cx="4145176" cy="534924"/>
           </a:xfrm>
           <a:prstGeom prst="rect">
@@ -8897,13 +8967,13 @@
       </p:sp>
       <p:sp>
         <p:nvSpPr>
-          <p:cNvPr id="18" name="TextBox 17"/>
-          <p:cNvSpPr txBox="1"/>
-          <p:nvPr/>
-        </p:nvSpPr>
-        <p:spPr>
-          <a:xfrm>
-            <a:off x="3535591" y="1831086"/>
+          <p:cNvPr id="19" name="TextBox 18"/>
+          <p:cNvSpPr txBox="1"/>
+          <p:nvPr/>
+        </p:nvSpPr>
+        <p:spPr>
+          <a:xfrm>
+            <a:off x="3657508" y="2173986"/>
             <a:ext cx="4145176" cy="480060"/>
           </a:xfrm>
           <a:prstGeom prst="rect">
@@ -8919,7 +8989,7 @@
           <a:p>
             <a:pPr algn="l"/>
             <a:r>
-              <a:rPr sz="750" b="0">
+              <a:rPr sz="800" b="0">
                 <a:solidFill>
                   <a:srgbClr val="1A1A1A"/>
                 </a:solidFill>
@@ -8932,13 +9002,13 @@
       </p:sp>
       <p:sp>
         <p:nvSpPr>
-          <p:cNvPr id="19" name="Rectangle 18"/>
+          <p:cNvPr id="20" name="Rectangle 19"/>
           <p:cNvSpPr/>
           <p:nvPr/>
         </p:nvSpPr>
         <p:spPr>
           <a:xfrm>
-            <a:off x="7680767" y="1803654"/>
+            <a:off x="7802684" y="2146554"/>
             <a:ext cx="4145176" cy="534924"/>
           </a:xfrm>
           <a:prstGeom prst="rect">
@@ -8978,13 +9048,13 @@
       </p:sp>
       <p:sp>
         <p:nvSpPr>
-          <p:cNvPr id="20" name="TextBox 19"/>
-          <p:cNvSpPr txBox="1"/>
-          <p:nvPr/>
-        </p:nvSpPr>
-        <p:spPr>
-          <a:xfrm>
-            <a:off x="7680767" y="1831086"/>
+          <p:cNvPr id="21" name="TextBox 20"/>
+          <p:cNvSpPr txBox="1"/>
+          <p:nvPr/>
+        </p:nvSpPr>
+        <p:spPr>
+          <a:xfrm>
+            <a:off x="7802684" y="2173986"/>
             <a:ext cx="4145176" cy="480060"/>
           </a:xfrm>
           <a:prstGeom prst="rect">
@@ -9000,7 +9070,7 @@
           <a:p>
             <a:pPr algn="l"/>
             <a:r>
-              <a:rPr sz="750" b="0">
+              <a:rPr sz="800" b="0">
                 <a:solidFill>
                   <a:srgbClr val="1A1A1A"/>
                 </a:solidFill>
@@ -9013,13 +9083,13 @@
       </p:sp>
       <p:sp>
         <p:nvSpPr>
-          <p:cNvPr id="21" name="Rectangle 20"/>
+          <p:cNvPr id="22" name="Rectangle 21"/>
           <p:cNvSpPr/>
           <p:nvPr/>
         </p:nvSpPr>
         <p:spPr>
           <a:xfrm>
-            <a:off x="365750" y="2338578"/>
+            <a:off x="487667" y="2681478"/>
             <a:ext cx="3169840" cy="534924"/>
           </a:xfrm>
           <a:prstGeom prst="rect">
@@ -9059,13 +9129,13 @@
       </p:sp>
       <p:sp>
         <p:nvSpPr>
-          <p:cNvPr id="22" name="TextBox 21"/>
-          <p:cNvSpPr txBox="1"/>
-          <p:nvPr/>
-        </p:nvSpPr>
-        <p:spPr>
-          <a:xfrm>
-            <a:off x="365750" y="2366010"/>
+          <p:cNvPr id="23" name="TextBox 22"/>
+          <p:cNvSpPr txBox="1"/>
+          <p:nvPr/>
+        </p:nvSpPr>
+        <p:spPr>
+          <a:xfrm>
+            <a:off x="487667" y="2708910"/>
             <a:ext cx="3169840" cy="480060"/>
           </a:xfrm>
           <a:prstGeom prst="rect">
@@ -9081,7 +9151,7 @@
           <a:p>
             <a:pPr algn="l"/>
             <a:r>
-              <a:rPr sz="750" b="0">
+              <a:rPr sz="800" b="0">
                 <a:solidFill>
                   <a:srgbClr val="1A1A1A"/>
                 </a:solidFill>
@@ -9094,13 +9164,13 @@
       </p:sp>
       <p:sp>
         <p:nvSpPr>
-          <p:cNvPr id="23" name="Rectangle 22"/>
+          <p:cNvPr id="24" name="Rectangle 23"/>
           <p:cNvSpPr/>
           <p:nvPr/>
         </p:nvSpPr>
         <p:spPr>
           <a:xfrm>
-            <a:off x="3535591" y="2338578"/>
+            <a:off x="3657508" y="2681478"/>
             <a:ext cx="4145176" cy="534924"/>
           </a:xfrm>
           <a:prstGeom prst="rect">
@@ -9140,13 +9210,13 @@
       </p:sp>
       <p:sp>
         <p:nvSpPr>
-          <p:cNvPr id="24" name="TextBox 23"/>
-          <p:cNvSpPr txBox="1"/>
-          <p:nvPr/>
-        </p:nvSpPr>
-        <p:spPr>
-          <a:xfrm>
-            <a:off x="3535591" y="2366010"/>
+          <p:cNvPr id="25" name="TextBox 24"/>
+          <p:cNvSpPr txBox="1"/>
+          <p:nvPr/>
+        </p:nvSpPr>
+        <p:spPr>
+          <a:xfrm>
+            <a:off x="3657508" y="2708910"/>
             <a:ext cx="4145176" cy="480060"/>
           </a:xfrm>
           <a:prstGeom prst="rect">
@@ -9162,7 +9232,7 @@
           <a:p>
             <a:pPr algn="l"/>
             <a:r>
-              <a:rPr sz="750" b="0">
+              <a:rPr sz="800" b="0">
                 <a:solidFill>
                   <a:srgbClr val="1A1A1A"/>
                 </a:solidFill>
@@ -9175,13 +9245,13 @@
       </p:sp>
       <p:sp>
         <p:nvSpPr>
-          <p:cNvPr id="25" name="Rectangle 24"/>
+          <p:cNvPr id="26" name="Rectangle 25"/>
           <p:cNvSpPr/>
           <p:nvPr/>
         </p:nvSpPr>
         <p:spPr>
           <a:xfrm>
-            <a:off x="7680767" y="2338578"/>
+            <a:off x="7802684" y="2681478"/>
             <a:ext cx="4145176" cy="534924"/>
           </a:xfrm>
           <a:prstGeom prst="rect">
@@ -9221,13 +9291,13 @@
       </p:sp>
       <p:sp>
         <p:nvSpPr>
-          <p:cNvPr id="26" name="TextBox 25"/>
-          <p:cNvSpPr txBox="1"/>
-          <p:nvPr/>
-        </p:nvSpPr>
-        <p:spPr>
-          <a:xfrm>
-            <a:off x="7680767" y="2366010"/>
+          <p:cNvPr id="27" name="TextBox 26"/>
+          <p:cNvSpPr txBox="1"/>
+          <p:nvPr/>
+        </p:nvSpPr>
+        <p:spPr>
+          <a:xfrm>
+            <a:off x="7802684" y="2708910"/>
             <a:ext cx="4145176" cy="480060"/>
           </a:xfrm>
           <a:prstGeom prst="rect">
@@ -9243,7 +9313,7 @@
           <a:p>
             <a:pPr algn="l"/>
             <a:r>
-              <a:rPr sz="750" b="0">
+              <a:rPr sz="800" b="0">
                 <a:solidFill>
                   <a:srgbClr val="1A1A1A"/>
                 </a:solidFill>
@@ -9256,13 +9326,13 @@
       </p:sp>
       <p:sp>
         <p:nvSpPr>
-          <p:cNvPr id="27" name="Rectangle 26"/>
+          <p:cNvPr id="28" name="Rectangle 27"/>
           <p:cNvSpPr/>
           <p:nvPr/>
         </p:nvSpPr>
         <p:spPr>
           <a:xfrm>
-            <a:off x="365750" y="2873502"/>
+            <a:off x="487667" y="3216402"/>
             <a:ext cx="3169840" cy="411480"/>
           </a:xfrm>
           <a:prstGeom prst="rect">
@@ -9302,13 +9372,13 @@
       </p:sp>
       <p:sp>
         <p:nvSpPr>
-          <p:cNvPr id="28" name="TextBox 27"/>
-          <p:cNvSpPr txBox="1"/>
-          <p:nvPr/>
-        </p:nvSpPr>
-        <p:spPr>
-          <a:xfrm>
-            <a:off x="365750" y="2900934"/>
+          <p:cNvPr id="29" name="TextBox 28"/>
+          <p:cNvSpPr txBox="1"/>
+          <p:nvPr/>
+        </p:nvSpPr>
+        <p:spPr>
+          <a:xfrm>
+            <a:off x="487667" y="3243834"/>
             <a:ext cx="3169840" cy="356616"/>
           </a:xfrm>
           <a:prstGeom prst="rect">
@@ -9324,7 +9394,7 @@
           <a:p>
             <a:pPr algn="l"/>
             <a:r>
-              <a:rPr sz="750" b="0">
+              <a:rPr sz="800" b="0">
                 <a:solidFill>
                   <a:srgbClr val="1A1A1A"/>
                 </a:solidFill>
@@ -9337,13 +9407,13 @@
       </p:sp>
       <p:sp>
         <p:nvSpPr>
-          <p:cNvPr id="29" name="Rectangle 28"/>
+          <p:cNvPr id="30" name="Rectangle 29"/>
           <p:cNvSpPr/>
           <p:nvPr/>
         </p:nvSpPr>
         <p:spPr>
           <a:xfrm>
-            <a:off x="3535591" y="2873502"/>
+            <a:off x="3657508" y="3216402"/>
             <a:ext cx="4145176" cy="411480"/>
           </a:xfrm>
           <a:prstGeom prst="rect">
@@ -9383,13 +9453,13 @@
       </p:sp>
       <p:sp>
         <p:nvSpPr>
-          <p:cNvPr id="30" name="TextBox 29"/>
-          <p:cNvSpPr txBox="1"/>
-          <p:nvPr/>
-        </p:nvSpPr>
-        <p:spPr>
-          <a:xfrm>
-            <a:off x="3535591" y="2900934"/>
+          <p:cNvPr id="31" name="TextBox 30"/>
+          <p:cNvSpPr txBox="1"/>
+          <p:nvPr/>
+        </p:nvSpPr>
+        <p:spPr>
+          <a:xfrm>
+            <a:off x="3657508" y="3243834"/>
             <a:ext cx="4145176" cy="356616"/>
           </a:xfrm>
           <a:prstGeom prst="rect">
@@ -9405,7 +9475,7 @@
           <a:p>
             <a:pPr algn="l"/>
             <a:r>
-              <a:rPr sz="750" b="0">
+              <a:rPr sz="800" b="0">
                 <a:solidFill>
                   <a:srgbClr val="1A1A1A"/>
                 </a:solidFill>
@@ -9418,13 +9488,13 @@
       </p:sp>
       <p:sp>
         <p:nvSpPr>
-          <p:cNvPr id="31" name="Rectangle 30"/>
+          <p:cNvPr id="32" name="Rectangle 31"/>
           <p:cNvSpPr/>
           <p:nvPr/>
         </p:nvSpPr>
         <p:spPr>
           <a:xfrm>
-            <a:off x="7680767" y="2873502"/>
+            <a:off x="7802684" y="3216402"/>
             <a:ext cx="4145176" cy="411480"/>
           </a:xfrm>
           <a:prstGeom prst="rect">
@@ -9464,13 +9534,13 @@
       </p:sp>
       <p:sp>
         <p:nvSpPr>
-          <p:cNvPr id="32" name="TextBox 31"/>
-          <p:cNvSpPr txBox="1"/>
-          <p:nvPr/>
-        </p:nvSpPr>
-        <p:spPr>
-          <a:xfrm>
-            <a:off x="7680767" y="2900934"/>
+          <p:cNvPr id="33" name="TextBox 32"/>
+          <p:cNvSpPr txBox="1"/>
+          <p:nvPr/>
+        </p:nvSpPr>
+        <p:spPr>
+          <a:xfrm>
+            <a:off x="7802684" y="3243834"/>
             <a:ext cx="4145176" cy="356616"/>
           </a:xfrm>
           <a:prstGeom prst="rect">
@@ -9486,7 +9556,7 @@
           <a:p>
             <a:pPr algn="l"/>
             <a:r>
-              <a:rPr sz="750" b="0">
+              <a:rPr sz="800" b="0">
                 <a:solidFill>
                   <a:srgbClr val="1A1A1A"/>
                 </a:solidFill>
@@ -9499,13 +9569,13 @@
       </p:sp>
       <p:sp>
         <p:nvSpPr>
-          <p:cNvPr id="33" name="Rectangle 32"/>
+          <p:cNvPr id="34" name="Rectangle 33"/>
           <p:cNvSpPr/>
           <p:nvPr/>
         </p:nvSpPr>
         <p:spPr>
           <a:xfrm>
-            <a:off x="365750" y="3284982"/>
+            <a:off x="487667" y="3627882"/>
             <a:ext cx="3169840" cy="534924"/>
           </a:xfrm>
           <a:prstGeom prst="rect">
@@ -9545,13 +9615,13 @@
       </p:sp>
       <p:sp>
         <p:nvSpPr>
-          <p:cNvPr id="34" name="TextBox 33"/>
-          <p:cNvSpPr txBox="1"/>
-          <p:nvPr/>
-        </p:nvSpPr>
-        <p:spPr>
-          <a:xfrm>
-            <a:off x="365750" y="3312414"/>
+          <p:cNvPr id="35" name="TextBox 34"/>
+          <p:cNvSpPr txBox="1"/>
+          <p:nvPr/>
+        </p:nvSpPr>
+        <p:spPr>
+          <a:xfrm>
+            <a:off x="487667" y="3655314"/>
             <a:ext cx="3169840" cy="480060"/>
           </a:xfrm>
           <a:prstGeom prst="rect">
@@ -9567,7 +9637,7 @@
           <a:p>
             <a:pPr algn="l"/>
             <a:r>
-              <a:rPr sz="750" b="0">
+              <a:rPr sz="800" b="0">
                 <a:solidFill>
                   <a:srgbClr val="1A1A1A"/>
                 </a:solidFill>
@@ -9580,13 +9650,13 @@
       </p:sp>
       <p:sp>
         <p:nvSpPr>
-          <p:cNvPr id="35" name="Rectangle 34"/>
+          <p:cNvPr id="36" name="Rectangle 35"/>
           <p:cNvSpPr/>
           <p:nvPr/>
         </p:nvSpPr>
         <p:spPr>
           <a:xfrm>
-            <a:off x="3535591" y="3284982"/>
+            <a:off x="3657508" y="3627882"/>
             <a:ext cx="4145176" cy="534924"/>
           </a:xfrm>
           <a:prstGeom prst="rect">
@@ -9626,13 +9696,13 @@
       </p:sp>
       <p:sp>
         <p:nvSpPr>
-          <p:cNvPr id="36" name="TextBox 35"/>
-          <p:cNvSpPr txBox="1"/>
-          <p:nvPr/>
-        </p:nvSpPr>
-        <p:spPr>
-          <a:xfrm>
-            <a:off x="3535591" y="3312414"/>
+          <p:cNvPr id="37" name="TextBox 36"/>
+          <p:cNvSpPr txBox="1"/>
+          <p:nvPr/>
+        </p:nvSpPr>
+        <p:spPr>
+          <a:xfrm>
+            <a:off x="3657508" y="3655314"/>
             <a:ext cx="4145176" cy="480060"/>
           </a:xfrm>
           <a:prstGeom prst="rect">
@@ -9648,7 +9718,7 @@
           <a:p>
             <a:pPr algn="l"/>
             <a:r>
-              <a:rPr sz="750" b="0">
+              <a:rPr sz="800" b="0">
                 <a:solidFill>
                   <a:srgbClr val="1A1A1A"/>
                 </a:solidFill>
@@ -9661,13 +9731,13 @@
       </p:sp>
       <p:sp>
         <p:nvSpPr>
-          <p:cNvPr id="37" name="Rectangle 36"/>
+          <p:cNvPr id="38" name="Rectangle 37"/>
           <p:cNvSpPr/>
           <p:nvPr/>
         </p:nvSpPr>
         <p:spPr>
           <a:xfrm>
-            <a:off x="7680767" y="3284982"/>
+            <a:off x="7802684" y="3627882"/>
             <a:ext cx="4145176" cy="534924"/>
           </a:xfrm>
           <a:prstGeom prst="rect">
@@ -9707,13 +9777,13 @@
       </p:sp>
       <p:sp>
         <p:nvSpPr>
-          <p:cNvPr id="38" name="TextBox 37"/>
-          <p:cNvSpPr txBox="1"/>
-          <p:nvPr/>
-        </p:nvSpPr>
-        <p:spPr>
-          <a:xfrm>
-            <a:off x="7680767" y="3312414"/>
+          <p:cNvPr id="39" name="TextBox 38"/>
+          <p:cNvSpPr txBox="1"/>
+          <p:nvPr/>
+        </p:nvSpPr>
+        <p:spPr>
+          <a:xfrm>
+            <a:off x="7802684" y="3655314"/>
             <a:ext cx="4145176" cy="480060"/>
           </a:xfrm>
           <a:prstGeom prst="rect">
@@ -9729,7 +9799,7 @@
           <a:p>
             <a:pPr algn="l"/>
             <a:r>
-              <a:rPr sz="750" b="0">
+              <a:rPr sz="800" b="0">
                 <a:solidFill>
                   <a:srgbClr val="1A1A1A"/>
                 </a:solidFill>
@@ -9742,7 +9812,7 @@
       </p:sp>
       <p:sp>
         <p:nvSpPr>
-          <p:cNvPr id="39" name="TextBox 38"/>
+          <p:cNvPr id="40" name="TextBox 39"/>
           <p:cNvSpPr txBox="1"/>
           <p:nvPr/>
         </p:nvSpPr>
@@ -9777,7 +9847,7 @@
       </p:sp>
       <p:sp>
         <p:nvSpPr>
-          <p:cNvPr id="40" name="TextBox 39"/>
+          <p:cNvPr id="41" name="TextBox 40"/>
           <p:cNvSpPr txBox="1"/>
           <p:nvPr/>
         </p:nvSpPr>
@@ -9836,42 +9906,77 @@
         </p:nvSpPr>
         <p:spPr>
           <a:xfrm>
-            <a:off x="365750" y="274320"/>
-            <a:ext cx="10972525" cy="480060"/>
-          </a:xfrm>
-          <a:prstGeom prst="rect">
-            <a:avLst/>
-          </a:prstGeom>
-          <a:noFill/>
-        </p:spPr>
-        <p:txBody>
-          <a:bodyPr wrap="square" lIns="36000" rIns="36000" tIns="18000" bIns="18000">
-            <a:spAutoFit/>
-          </a:bodyPr>
-          <a:lstStyle/>
-          <a:p>
-            <a:pPr algn="l"/>
-            <a:r>
-              <a:rPr sz="1700" b="1">
+            <a:off x="487667" y="137160"/>
+            <a:ext cx="7315017" cy="274320"/>
+          </a:xfrm>
+          <a:prstGeom prst="rect">
+            <a:avLst/>
+          </a:prstGeom>
+          <a:noFill/>
+        </p:spPr>
+        <p:txBody>
+          <a:bodyPr wrap="square" lIns="36000" rIns="36000" tIns="18000" bIns="18000">
+            <a:spAutoFit/>
+          </a:bodyPr>
+          <a:lstStyle/>
+          <a:p>
+            <a:pPr algn="l"/>
+            <a:r>
+              <a:rPr sz="900" b="0">
+                <a:solidFill>
+                  <a:srgbClr val="767676"/>
+                </a:solidFill>
+                <a:latin typeface="Pretendard"/>
+              </a:rPr>
+              <a:t>환경분석보고서</a:t>
+            </a:r>
+          </a:p>
+        </p:txBody>
+      </p:sp>
+      <p:sp>
+        <p:nvSpPr>
+          <p:cNvPr id="3" name="TextBox 2"/>
+          <p:cNvSpPr txBox="1"/>
+          <p:nvPr/>
+        </p:nvSpPr>
+        <p:spPr>
+          <a:xfrm>
+            <a:off x="487667" y="548640"/>
+            <a:ext cx="11216359" cy="548640"/>
+          </a:xfrm>
+          <a:prstGeom prst="rect">
+            <a:avLst/>
+          </a:prstGeom>
+          <a:noFill/>
+        </p:spPr>
+        <p:txBody>
+          <a:bodyPr wrap="square" lIns="36000" rIns="36000" tIns="18000" bIns="18000">
+            <a:spAutoFit/>
+          </a:bodyPr>
+          <a:lstStyle/>
+          <a:p>
+            <a:pPr algn="l"/>
+            <a:r>
+              <a:rPr sz="2400" b="1">
                 <a:solidFill>
                   <a:srgbClr val="1A1A1A"/>
                 </a:solidFill>
                 <a:latin typeface="Pretendard"/>
               </a:rPr>
-              <a:t>3. 브랜드</a:t>
-            </a:r>
-          </a:p>
-        </p:txBody>
-      </p:sp>
-      <p:sp>
-        <p:nvSpPr>
-          <p:cNvPr id="3" name="Rectangle 2"/>
+              <a:t>브랜드</a:t>
+            </a:r>
+          </a:p>
+        </p:txBody>
+      </p:sp>
+      <p:sp>
+        <p:nvSpPr>
+          <p:cNvPr id="4" name="Rectangle 3"/>
           <p:cNvSpPr/>
           <p:nvPr/>
         </p:nvSpPr>
         <p:spPr>
           <a:xfrm>
-            <a:off x="365750" y="891540"/>
+            <a:off x="487667" y="1234440"/>
             <a:ext cx="3169840" cy="377190"/>
           </a:xfrm>
           <a:prstGeom prst="rect">
@@ -9911,13 +10016,13 @@
       </p:sp>
       <p:sp>
         <p:nvSpPr>
-          <p:cNvPr id="4" name="TextBox 3"/>
-          <p:cNvSpPr txBox="1"/>
-          <p:nvPr/>
-        </p:nvSpPr>
-        <p:spPr>
-          <a:xfrm>
-            <a:off x="365750" y="946404"/>
+          <p:cNvPr id="5" name="TextBox 4"/>
+          <p:cNvSpPr txBox="1"/>
+          <p:nvPr/>
+        </p:nvSpPr>
+        <p:spPr>
+          <a:xfrm>
+            <a:off x="487667" y="1289304"/>
             <a:ext cx="3169840" cy="301752"/>
           </a:xfrm>
           <a:prstGeom prst="rect">
@@ -9946,13 +10051,13 @@
       </p:sp>
       <p:sp>
         <p:nvSpPr>
-          <p:cNvPr id="5" name="Rectangle 4"/>
+          <p:cNvPr id="6" name="Rectangle 5"/>
           <p:cNvSpPr/>
           <p:nvPr/>
         </p:nvSpPr>
         <p:spPr>
           <a:xfrm>
-            <a:off x="3535591" y="891540"/>
+            <a:off x="3657508" y="1234440"/>
             <a:ext cx="4145176" cy="377190"/>
           </a:xfrm>
           <a:prstGeom prst="rect">
@@ -9992,13 +10097,13 @@
       </p:sp>
       <p:sp>
         <p:nvSpPr>
-          <p:cNvPr id="6" name="TextBox 5"/>
-          <p:cNvSpPr txBox="1"/>
-          <p:nvPr/>
-        </p:nvSpPr>
-        <p:spPr>
-          <a:xfrm>
-            <a:off x="3535591" y="946404"/>
+          <p:cNvPr id="7" name="TextBox 6"/>
+          <p:cNvSpPr txBox="1"/>
+          <p:nvPr/>
+        </p:nvSpPr>
+        <p:spPr>
+          <a:xfrm>
+            <a:off x="3657508" y="1289304"/>
             <a:ext cx="4145176" cy="301752"/>
           </a:xfrm>
           <a:prstGeom prst="rect">
@@ -10027,13 +10132,13 @@
       </p:sp>
       <p:sp>
         <p:nvSpPr>
-          <p:cNvPr id="7" name="Rectangle 6"/>
+          <p:cNvPr id="8" name="Rectangle 7"/>
           <p:cNvSpPr/>
           <p:nvPr/>
         </p:nvSpPr>
         <p:spPr>
           <a:xfrm>
-            <a:off x="7680767" y="891540"/>
+            <a:off x="7802684" y="1234440"/>
             <a:ext cx="4145176" cy="377190"/>
           </a:xfrm>
           <a:prstGeom prst="rect">
@@ -10073,13 +10178,13 @@
       </p:sp>
       <p:sp>
         <p:nvSpPr>
-          <p:cNvPr id="8" name="TextBox 7"/>
-          <p:cNvSpPr txBox="1"/>
-          <p:nvPr/>
-        </p:nvSpPr>
-        <p:spPr>
-          <a:xfrm>
-            <a:off x="7680767" y="946404"/>
+          <p:cNvPr id="9" name="TextBox 8"/>
+          <p:cNvSpPr txBox="1"/>
+          <p:nvPr/>
+        </p:nvSpPr>
+        <p:spPr>
+          <a:xfrm>
+            <a:off x="7802684" y="1289304"/>
             <a:ext cx="4145176" cy="301752"/>
           </a:xfrm>
           <a:prstGeom prst="rect">
@@ -10108,13 +10213,13 @@
       </p:sp>
       <p:sp>
         <p:nvSpPr>
-          <p:cNvPr id="9" name="Rectangle 8"/>
+          <p:cNvPr id="10" name="Rectangle 9"/>
           <p:cNvSpPr/>
           <p:nvPr/>
         </p:nvSpPr>
         <p:spPr>
           <a:xfrm>
-            <a:off x="365750" y="1268730"/>
+            <a:off x="487667" y="1611630"/>
             <a:ext cx="3169840" cy="534924"/>
           </a:xfrm>
           <a:prstGeom prst="rect">
@@ -10154,13 +10259,13 @@
       </p:sp>
       <p:sp>
         <p:nvSpPr>
-          <p:cNvPr id="10" name="TextBox 9"/>
-          <p:cNvSpPr txBox="1"/>
-          <p:nvPr/>
-        </p:nvSpPr>
-        <p:spPr>
-          <a:xfrm>
-            <a:off x="365750" y="1296161"/>
+          <p:cNvPr id="11" name="TextBox 10"/>
+          <p:cNvSpPr txBox="1"/>
+          <p:nvPr/>
+        </p:nvSpPr>
+        <p:spPr>
+          <a:xfrm>
+            <a:off x="487667" y="1639062"/>
             <a:ext cx="3169840" cy="480060"/>
           </a:xfrm>
           <a:prstGeom prst="rect">
@@ -10176,7 +10281,7 @@
           <a:p>
             <a:pPr algn="l"/>
             <a:r>
-              <a:rPr sz="750" b="0">
+              <a:rPr sz="800" b="0">
                 <a:solidFill>
                   <a:srgbClr val="1A1A1A"/>
                 </a:solidFill>
@@ -10189,13 +10294,13 @@
       </p:sp>
       <p:sp>
         <p:nvSpPr>
-          <p:cNvPr id="11" name="Rectangle 10"/>
+          <p:cNvPr id="12" name="Rectangle 11"/>
           <p:cNvSpPr/>
           <p:nvPr/>
         </p:nvSpPr>
         <p:spPr>
           <a:xfrm>
-            <a:off x="3535591" y="1268730"/>
+            <a:off x="3657508" y="1611630"/>
             <a:ext cx="4145176" cy="534924"/>
           </a:xfrm>
           <a:prstGeom prst="rect">
@@ -10235,13 +10340,13 @@
       </p:sp>
       <p:sp>
         <p:nvSpPr>
-          <p:cNvPr id="12" name="TextBox 11"/>
-          <p:cNvSpPr txBox="1"/>
-          <p:nvPr/>
-        </p:nvSpPr>
-        <p:spPr>
-          <a:xfrm>
-            <a:off x="3535591" y="1296161"/>
+          <p:cNvPr id="13" name="TextBox 12"/>
+          <p:cNvSpPr txBox="1"/>
+          <p:nvPr/>
+        </p:nvSpPr>
+        <p:spPr>
+          <a:xfrm>
+            <a:off x="3657508" y="1639062"/>
             <a:ext cx="4145176" cy="480060"/>
           </a:xfrm>
           <a:prstGeom prst="rect">
@@ -10257,7 +10362,7 @@
           <a:p>
             <a:pPr algn="l"/>
             <a:r>
-              <a:rPr sz="750" b="0">
+              <a:rPr sz="800" b="0">
                 <a:solidFill>
                   <a:srgbClr val="1A1A1A"/>
                 </a:solidFill>
@@ -10270,13 +10375,13 @@
       </p:sp>
       <p:sp>
         <p:nvSpPr>
-          <p:cNvPr id="13" name="Rectangle 12"/>
+          <p:cNvPr id="14" name="Rectangle 13"/>
           <p:cNvSpPr/>
           <p:nvPr/>
         </p:nvSpPr>
         <p:spPr>
           <a:xfrm>
-            <a:off x="7680767" y="1268730"/>
+            <a:off x="7802684" y="1611630"/>
             <a:ext cx="4145176" cy="534924"/>
           </a:xfrm>
           <a:prstGeom prst="rect">
@@ -10316,13 +10421,13 @@
       </p:sp>
       <p:sp>
         <p:nvSpPr>
-          <p:cNvPr id="14" name="TextBox 13"/>
-          <p:cNvSpPr txBox="1"/>
-          <p:nvPr/>
-        </p:nvSpPr>
-        <p:spPr>
-          <a:xfrm>
-            <a:off x="7680767" y="1296161"/>
+          <p:cNvPr id="15" name="TextBox 14"/>
+          <p:cNvSpPr txBox="1"/>
+          <p:nvPr/>
+        </p:nvSpPr>
+        <p:spPr>
+          <a:xfrm>
+            <a:off x="7802684" y="1639062"/>
             <a:ext cx="4145176" cy="480060"/>
           </a:xfrm>
           <a:prstGeom prst="rect">
@@ -10338,7 +10443,7 @@
           <a:p>
             <a:pPr algn="l"/>
             <a:r>
-              <a:rPr sz="750" b="0">
+              <a:rPr sz="800" b="0">
                 <a:solidFill>
                   <a:srgbClr val="1A1A1A"/>
                 </a:solidFill>
@@ -10351,13 +10456,13 @@
       </p:sp>
       <p:sp>
         <p:nvSpPr>
-          <p:cNvPr id="15" name="Rectangle 14"/>
+          <p:cNvPr id="16" name="Rectangle 15"/>
           <p:cNvSpPr/>
           <p:nvPr/>
         </p:nvSpPr>
         <p:spPr>
           <a:xfrm>
-            <a:off x="365750" y="1803654"/>
+            <a:off x="487667" y="2146554"/>
             <a:ext cx="3169840" cy="534924"/>
           </a:xfrm>
           <a:prstGeom prst="rect">
@@ -10397,13 +10502,13 @@
       </p:sp>
       <p:sp>
         <p:nvSpPr>
-          <p:cNvPr id="16" name="TextBox 15"/>
-          <p:cNvSpPr txBox="1"/>
-          <p:nvPr/>
-        </p:nvSpPr>
-        <p:spPr>
-          <a:xfrm>
-            <a:off x="365750" y="1831086"/>
+          <p:cNvPr id="17" name="TextBox 16"/>
+          <p:cNvSpPr txBox="1"/>
+          <p:nvPr/>
+        </p:nvSpPr>
+        <p:spPr>
+          <a:xfrm>
+            <a:off x="487667" y="2173986"/>
             <a:ext cx="3169840" cy="480060"/>
           </a:xfrm>
           <a:prstGeom prst="rect">
@@ -10419,7 +10524,7 @@
           <a:p>
             <a:pPr algn="l"/>
             <a:r>
-              <a:rPr sz="750" b="0">
+              <a:rPr sz="800" b="0">
                 <a:solidFill>
                   <a:srgbClr val="1A1A1A"/>
                 </a:solidFill>
@@ -10432,13 +10537,13 @@
       </p:sp>
       <p:sp>
         <p:nvSpPr>
-          <p:cNvPr id="17" name="Rectangle 16"/>
+          <p:cNvPr id="18" name="Rectangle 17"/>
           <p:cNvSpPr/>
           <p:nvPr/>
         </p:nvSpPr>
         <p:spPr>
           <a:xfrm>
-            <a:off x="3535591" y="1803654"/>
+            <a:off x="3657508" y="2146554"/>
             <a:ext cx="4145176" cy="534924"/>
           </a:xfrm>
           <a:prstGeom prst="rect">
@@ -10478,13 +10583,13 @@
       </p:sp>
       <p:sp>
         <p:nvSpPr>
-          <p:cNvPr id="18" name="TextBox 17"/>
-          <p:cNvSpPr txBox="1"/>
-          <p:nvPr/>
-        </p:nvSpPr>
-        <p:spPr>
-          <a:xfrm>
-            <a:off x="3535591" y="1831086"/>
+          <p:cNvPr id="19" name="TextBox 18"/>
+          <p:cNvSpPr txBox="1"/>
+          <p:nvPr/>
+        </p:nvSpPr>
+        <p:spPr>
+          <a:xfrm>
+            <a:off x="3657508" y="2173986"/>
             <a:ext cx="4145176" cy="480060"/>
           </a:xfrm>
           <a:prstGeom prst="rect">
@@ -10500,7 +10605,7 @@
           <a:p>
             <a:pPr algn="l"/>
             <a:r>
-              <a:rPr sz="750" b="0">
+              <a:rPr sz="800" b="0">
                 <a:solidFill>
                   <a:srgbClr val="1A1A1A"/>
                 </a:solidFill>
@@ -10513,13 +10618,13 @@
       </p:sp>
       <p:sp>
         <p:nvSpPr>
-          <p:cNvPr id="19" name="Rectangle 18"/>
+          <p:cNvPr id="20" name="Rectangle 19"/>
           <p:cNvSpPr/>
           <p:nvPr/>
         </p:nvSpPr>
         <p:spPr>
           <a:xfrm>
-            <a:off x="7680767" y="1803654"/>
+            <a:off x="7802684" y="2146554"/>
             <a:ext cx="4145176" cy="534924"/>
           </a:xfrm>
           <a:prstGeom prst="rect">
@@ -10559,13 +10664,13 @@
       </p:sp>
       <p:sp>
         <p:nvSpPr>
-          <p:cNvPr id="20" name="TextBox 19"/>
-          <p:cNvSpPr txBox="1"/>
-          <p:nvPr/>
-        </p:nvSpPr>
-        <p:spPr>
-          <a:xfrm>
-            <a:off x="7680767" y="1831086"/>
+          <p:cNvPr id="21" name="TextBox 20"/>
+          <p:cNvSpPr txBox="1"/>
+          <p:nvPr/>
+        </p:nvSpPr>
+        <p:spPr>
+          <a:xfrm>
+            <a:off x="7802684" y="2173986"/>
             <a:ext cx="4145176" cy="480060"/>
           </a:xfrm>
           <a:prstGeom prst="rect">
@@ -10581,7 +10686,7 @@
           <a:p>
             <a:pPr algn="l"/>
             <a:r>
-              <a:rPr sz="750" b="0">
+              <a:rPr sz="800" b="0">
                 <a:solidFill>
                   <a:srgbClr val="1A1A1A"/>
                 </a:solidFill>
@@ -10594,13 +10699,13 @@
       </p:sp>
       <p:sp>
         <p:nvSpPr>
-          <p:cNvPr id="21" name="Rectangle 20"/>
+          <p:cNvPr id="22" name="Rectangle 21"/>
           <p:cNvSpPr/>
           <p:nvPr/>
         </p:nvSpPr>
         <p:spPr>
           <a:xfrm>
-            <a:off x="365750" y="2338578"/>
+            <a:off x="487667" y="2681478"/>
             <a:ext cx="3169840" cy="534924"/>
           </a:xfrm>
           <a:prstGeom prst="rect">
@@ -10640,13 +10745,13 @@
       </p:sp>
       <p:sp>
         <p:nvSpPr>
-          <p:cNvPr id="22" name="TextBox 21"/>
-          <p:cNvSpPr txBox="1"/>
-          <p:nvPr/>
-        </p:nvSpPr>
-        <p:spPr>
-          <a:xfrm>
-            <a:off x="365750" y="2366010"/>
+          <p:cNvPr id="23" name="TextBox 22"/>
+          <p:cNvSpPr txBox="1"/>
+          <p:nvPr/>
+        </p:nvSpPr>
+        <p:spPr>
+          <a:xfrm>
+            <a:off x="487667" y="2708910"/>
             <a:ext cx="3169840" cy="480060"/>
           </a:xfrm>
           <a:prstGeom prst="rect">
@@ -10662,7 +10767,7 @@
           <a:p>
             <a:pPr algn="l"/>
             <a:r>
-              <a:rPr sz="750" b="0">
+              <a:rPr sz="800" b="0">
                 <a:solidFill>
                   <a:srgbClr val="1A1A1A"/>
                 </a:solidFill>
@@ -10675,13 +10780,13 @@
       </p:sp>
       <p:sp>
         <p:nvSpPr>
-          <p:cNvPr id="23" name="Rectangle 22"/>
+          <p:cNvPr id="24" name="Rectangle 23"/>
           <p:cNvSpPr/>
           <p:nvPr/>
         </p:nvSpPr>
         <p:spPr>
           <a:xfrm>
-            <a:off x="3535591" y="2338578"/>
+            <a:off x="3657508" y="2681478"/>
             <a:ext cx="4145176" cy="534924"/>
           </a:xfrm>
           <a:prstGeom prst="rect">
@@ -10721,13 +10826,13 @@
       </p:sp>
       <p:sp>
         <p:nvSpPr>
-          <p:cNvPr id="24" name="TextBox 23"/>
-          <p:cNvSpPr txBox="1"/>
-          <p:nvPr/>
-        </p:nvSpPr>
-        <p:spPr>
-          <a:xfrm>
-            <a:off x="3535591" y="2366010"/>
+          <p:cNvPr id="25" name="TextBox 24"/>
+          <p:cNvSpPr txBox="1"/>
+          <p:nvPr/>
+        </p:nvSpPr>
+        <p:spPr>
+          <a:xfrm>
+            <a:off x="3657508" y="2708910"/>
             <a:ext cx="4145176" cy="480060"/>
           </a:xfrm>
           <a:prstGeom prst="rect">
@@ -10743,7 +10848,7 @@
           <a:p>
             <a:pPr algn="l"/>
             <a:r>
-              <a:rPr sz="750" b="0">
+              <a:rPr sz="800" b="0">
                 <a:solidFill>
                   <a:srgbClr val="1A1A1A"/>
                 </a:solidFill>
@@ -10756,13 +10861,13 @@
       </p:sp>
       <p:sp>
         <p:nvSpPr>
-          <p:cNvPr id="25" name="Rectangle 24"/>
+          <p:cNvPr id="26" name="Rectangle 25"/>
           <p:cNvSpPr/>
           <p:nvPr/>
         </p:nvSpPr>
         <p:spPr>
           <a:xfrm>
-            <a:off x="7680767" y="2338578"/>
+            <a:off x="7802684" y="2681478"/>
             <a:ext cx="4145176" cy="534924"/>
           </a:xfrm>
           <a:prstGeom prst="rect">
@@ -10802,13 +10907,13 @@
       </p:sp>
       <p:sp>
         <p:nvSpPr>
-          <p:cNvPr id="26" name="TextBox 25"/>
-          <p:cNvSpPr txBox="1"/>
-          <p:nvPr/>
-        </p:nvSpPr>
-        <p:spPr>
-          <a:xfrm>
-            <a:off x="7680767" y="2366010"/>
+          <p:cNvPr id="27" name="TextBox 26"/>
+          <p:cNvSpPr txBox="1"/>
+          <p:nvPr/>
+        </p:nvSpPr>
+        <p:spPr>
+          <a:xfrm>
+            <a:off x="7802684" y="2708910"/>
             <a:ext cx="4145176" cy="480060"/>
           </a:xfrm>
           <a:prstGeom prst="rect">
@@ -10824,7 +10929,7 @@
           <a:p>
             <a:pPr algn="l"/>
             <a:r>
-              <a:rPr sz="750" b="0">
+              <a:rPr sz="800" b="0">
                 <a:solidFill>
                   <a:srgbClr val="1A1A1A"/>
                 </a:solidFill>
@@ -10837,13 +10942,13 @@
       </p:sp>
       <p:sp>
         <p:nvSpPr>
-          <p:cNvPr id="27" name="Rectangle 26"/>
+          <p:cNvPr id="28" name="Rectangle 27"/>
           <p:cNvSpPr/>
           <p:nvPr/>
         </p:nvSpPr>
         <p:spPr>
           <a:xfrm>
-            <a:off x="365750" y="2873502"/>
+            <a:off x="487667" y="3216402"/>
             <a:ext cx="3169840" cy="534924"/>
           </a:xfrm>
           <a:prstGeom prst="rect">
@@ -10883,13 +10988,13 @@
       </p:sp>
       <p:sp>
         <p:nvSpPr>
-          <p:cNvPr id="28" name="TextBox 27"/>
-          <p:cNvSpPr txBox="1"/>
-          <p:nvPr/>
-        </p:nvSpPr>
-        <p:spPr>
-          <a:xfrm>
-            <a:off x="365750" y="2900934"/>
+          <p:cNvPr id="29" name="TextBox 28"/>
+          <p:cNvSpPr txBox="1"/>
+          <p:nvPr/>
+        </p:nvSpPr>
+        <p:spPr>
+          <a:xfrm>
+            <a:off x="487667" y="3243834"/>
             <a:ext cx="3169840" cy="480060"/>
           </a:xfrm>
           <a:prstGeom prst="rect">
@@ -10905,7 +11010,7 @@
           <a:p>
             <a:pPr algn="l"/>
             <a:r>
-              <a:rPr sz="750" b="0">
+              <a:rPr sz="800" b="0">
                 <a:solidFill>
                   <a:srgbClr val="1A1A1A"/>
                 </a:solidFill>
@@ -10918,13 +11023,13 @@
       </p:sp>
       <p:sp>
         <p:nvSpPr>
-          <p:cNvPr id="29" name="Rectangle 28"/>
+          <p:cNvPr id="30" name="Rectangle 29"/>
           <p:cNvSpPr/>
           <p:nvPr/>
         </p:nvSpPr>
         <p:spPr>
           <a:xfrm>
-            <a:off x="3535591" y="2873502"/>
+            <a:off x="3657508" y="3216402"/>
             <a:ext cx="4145176" cy="534924"/>
           </a:xfrm>
           <a:prstGeom prst="rect">
@@ -10964,13 +11069,13 @@
       </p:sp>
       <p:sp>
         <p:nvSpPr>
-          <p:cNvPr id="30" name="TextBox 29"/>
-          <p:cNvSpPr txBox="1"/>
-          <p:nvPr/>
-        </p:nvSpPr>
-        <p:spPr>
-          <a:xfrm>
-            <a:off x="3535591" y="2900934"/>
+          <p:cNvPr id="31" name="TextBox 30"/>
+          <p:cNvSpPr txBox="1"/>
+          <p:nvPr/>
+        </p:nvSpPr>
+        <p:spPr>
+          <a:xfrm>
+            <a:off x="3657508" y="3243834"/>
             <a:ext cx="4145176" cy="480060"/>
           </a:xfrm>
           <a:prstGeom prst="rect">
@@ -10986,7 +11091,7 @@
           <a:p>
             <a:pPr algn="l"/>
             <a:r>
-              <a:rPr sz="750" b="0">
+              <a:rPr sz="800" b="0">
                 <a:solidFill>
                   <a:srgbClr val="1A1A1A"/>
                 </a:solidFill>
@@ -10999,13 +11104,13 @@
       </p:sp>
       <p:sp>
         <p:nvSpPr>
-          <p:cNvPr id="31" name="Rectangle 30"/>
+          <p:cNvPr id="32" name="Rectangle 31"/>
           <p:cNvSpPr/>
           <p:nvPr/>
         </p:nvSpPr>
         <p:spPr>
           <a:xfrm>
-            <a:off x="7680767" y="2873502"/>
+            <a:off x="7802684" y="3216402"/>
             <a:ext cx="4145176" cy="534924"/>
           </a:xfrm>
           <a:prstGeom prst="rect">
@@ -11045,13 +11150,13 @@
       </p:sp>
       <p:sp>
         <p:nvSpPr>
-          <p:cNvPr id="32" name="TextBox 31"/>
-          <p:cNvSpPr txBox="1"/>
-          <p:nvPr/>
-        </p:nvSpPr>
-        <p:spPr>
-          <a:xfrm>
-            <a:off x="7680767" y="2900934"/>
+          <p:cNvPr id="33" name="TextBox 32"/>
+          <p:cNvSpPr txBox="1"/>
+          <p:nvPr/>
+        </p:nvSpPr>
+        <p:spPr>
+          <a:xfrm>
+            <a:off x="7802684" y="3243834"/>
             <a:ext cx="4145176" cy="480060"/>
           </a:xfrm>
           <a:prstGeom prst="rect">
@@ -11067,7 +11172,7 @@
           <a:p>
             <a:pPr algn="l"/>
             <a:r>
-              <a:rPr sz="750" b="0">
+              <a:rPr sz="800" b="0">
                 <a:solidFill>
                   <a:srgbClr val="1A1A1A"/>
                 </a:solidFill>
@@ -11080,7 +11185,7 @@
       </p:sp>
       <p:sp>
         <p:nvSpPr>
-          <p:cNvPr id="33" name="TextBox 32"/>
+          <p:cNvPr id="34" name="TextBox 33"/>
           <p:cNvSpPr txBox="1"/>
           <p:nvPr/>
         </p:nvSpPr>
@@ -11115,7 +11220,7 @@
       </p:sp>
       <p:sp>
         <p:nvSpPr>
-          <p:cNvPr id="34" name="TextBox 33"/>
+          <p:cNvPr id="35" name="TextBox 34"/>
           <p:cNvSpPr txBox="1"/>
           <p:nvPr/>
         </p:nvSpPr>
@@ -11174,42 +11279,77 @@
         </p:nvSpPr>
         <p:spPr>
           <a:xfrm>
-            <a:off x="365750" y="274320"/>
-            <a:ext cx="10972525" cy="480060"/>
-          </a:xfrm>
-          <a:prstGeom prst="rect">
-            <a:avLst/>
-          </a:prstGeom>
-          <a:noFill/>
-        </p:spPr>
-        <p:txBody>
-          <a:bodyPr wrap="square" lIns="36000" rIns="36000" tIns="18000" bIns="18000">
-            <a:spAutoFit/>
-          </a:bodyPr>
-          <a:lstStyle/>
-          <a:p>
-            <a:pPr algn="l"/>
-            <a:r>
-              <a:rPr sz="1700" b="1">
+            <a:off x="487667" y="137160"/>
+            <a:ext cx="7315017" cy="274320"/>
+          </a:xfrm>
+          <a:prstGeom prst="rect">
+            <a:avLst/>
+          </a:prstGeom>
+          <a:noFill/>
+        </p:spPr>
+        <p:txBody>
+          <a:bodyPr wrap="square" lIns="36000" rIns="36000" tIns="18000" bIns="18000">
+            <a:spAutoFit/>
+          </a:bodyPr>
+          <a:lstStyle/>
+          <a:p>
+            <a:pPr algn="l"/>
+            <a:r>
+              <a:rPr sz="900" b="0">
+                <a:solidFill>
+                  <a:srgbClr val="767676"/>
+                </a:solidFill>
+                <a:latin typeface="Pretendard"/>
+              </a:rPr>
+              <a:t>환경분석보고서</a:t>
+            </a:r>
+          </a:p>
+        </p:txBody>
+      </p:sp>
+      <p:sp>
+        <p:nvSpPr>
+          <p:cNvPr id="3" name="TextBox 2"/>
+          <p:cNvSpPr txBox="1"/>
+          <p:nvPr/>
+        </p:nvSpPr>
+        <p:spPr>
+          <a:xfrm>
+            <a:off x="487667" y="548640"/>
+            <a:ext cx="11216359" cy="548640"/>
+          </a:xfrm>
+          <a:prstGeom prst="rect">
+            <a:avLst/>
+          </a:prstGeom>
+          <a:noFill/>
+        </p:spPr>
+        <p:txBody>
+          <a:bodyPr wrap="square" lIns="36000" rIns="36000" tIns="18000" bIns="18000">
+            <a:spAutoFit/>
+          </a:bodyPr>
+          <a:lstStyle/>
+          <a:p>
+            <a:pPr algn="l"/>
+            <a:r>
+              <a:rPr sz="2400" b="1">
                 <a:solidFill>
                   <a:srgbClr val="1A1A1A"/>
                 </a:solidFill>
                 <a:latin typeface="Pretendard"/>
               </a:rPr>
-              <a:t>4. 경쟁 구도</a:t>
-            </a:r>
-          </a:p>
-        </p:txBody>
-      </p:sp>
-      <p:sp>
-        <p:nvSpPr>
-          <p:cNvPr id="3" name="Rectangle 2"/>
+              <a:t>경쟁 구도</a:t>
+            </a:r>
+          </a:p>
+        </p:txBody>
+      </p:sp>
+      <p:sp>
+        <p:nvSpPr>
+          <p:cNvPr id="4" name="Rectangle 3"/>
           <p:cNvSpPr/>
           <p:nvPr/>
         </p:nvSpPr>
         <p:spPr>
           <a:xfrm>
-            <a:off x="365750" y="891540"/>
+            <a:off x="487667" y="1234440"/>
             <a:ext cx="3169840" cy="377190"/>
           </a:xfrm>
           <a:prstGeom prst="rect">
@@ -11249,13 +11389,13 @@
       </p:sp>
       <p:sp>
         <p:nvSpPr>
-          <p:cNvPr id="4" name="TextBox 3"/>
-          <p:cNvSpPr txBox="1"/>
-          <p:nvPr/>
-        </p:nvSpPr>
-        <p:spPr>
-          <a:xfrm>
-            <a:off x="365750" y="946404"/>
+          <p:cNvPr id="5" name="TextBox 4"/>
+          <p:cNvSpPr txBox="1"/>
+          <p:nvPr/>
+        </p:nvSpPr>
+        <p:spPr>
+          <a:xfrm>
+            <a:off x="487667" y="1289304"/>
             <a:ext cx="3169840" cy="301752"/>
           </a:xfrm>
           <a:prstGeom prst="rect">
@@ -11284,13 +11424,13 @@
       </p:sp>
       <p:sp>
         <p:nvSpPr>
-          <p:cNvPr id="5" name="Rectangle 4"/>
+          <p:cNvPr id="6" name="Rectangle 5"/>
           <p:cNvSpPr/>
           <p:nvPr/>
         </p:nvSpPr>
         <p:spPr>
           <a:xfrm>
-            <a:off x="3535591" y="891540"/>
+            <a:off x="3657508" y="1234440"/>
             <a:ext cx="8290352" cy="377190"/>
           </a:xfrm>
           <a:prstGeom prst="rect">
@@ -11330,13 +11470,13 @@
       </p:sp>
       <p:sp>
         <p:nvSpPr>
-          <p:cNvPr id="6" name="TextBox 5"/>
-          <p:cNvSpPr txBox="1"/>
-          <p:nvPr/>
-        </p:nvSpPr>
-        <p:spPr>
-          <a:xfrm>
-            <a:off x="3535591" y="946404"/>
+          <p:cNvPr id="7" name="TextBox 6"/>
+          <p:cNvSpPr txBox="1"/>
+          <p:nvPr/>
+        </p:nvSpPr>
+        <p:spPr>
+          <a:xfrm>
+            <a:off x="3657508" y="1289304"/>
             <a:ext cx="8290352" cy="301752"/>
           </a:xfrm>
           <a:prstGeom prst="rect">
@@ -11365,13 +11505,13 @@
       </p:sp>
       <p:sp>
         <p:nvSpPr>
-          <p:cNvPr id="7" name="Rectangle 6"/>
+          <p:cNvPr id="8" name="Rectangle 7"/>
           <p:cNvSpPr/>
           <p:nvPr/>
         </p:nvSpPr>
         <p:spPr>
           <a:xfrm>
-            <a:off x="365750" y="1268730"/>
+            <a:off x="487667" y="1611630"/>
             <a:ext cx="3169840" cy="411480"/>
           </a:xfrm>
           <a:prstGeom prst="rect">
@@ -11411,13 +11551,13 @@
       </p:sp>
       <p:sp>
         <p:nvSpPr>
-          <p:cNvPr id="8" name="TextBox 7"/>
-          <p:cNvSpPr txBox="1"/>
-          <p:nvPr/>
-        </p:nvSpPr>
-        <p:spPr>
-          <a:xfrm>
-            <a:off x="365750" y="1296161"/>
+          <p:cNvPr id="9" name="TextBox 8"/>
+          <p:cNvSpPr txBox="1"/>
+          <p:nvPr/>
+        </p:nvSpPr>
+        <p:spPr>
+          <a:xfrm>
+            <a:off x="487667" y="1639062"/>
             <a:ext cx="3169840" cy="356616"/>
           </a:xfrm>
           <a:prstGeom prst="rect">
@@ -11433,7 +11573,7 @@
           <a:p>
             <a:pPr algn="l"/>
             <a:r>
-              <a:rPr sz="750" b="0">
+              <a:rPr sz="800" b="0">
                 <a:solidFill>
                   <a:srgbClr val="1A1A1A"/>
                 </a:solidFill>
@@ -11446,13 +11586,13 @@
       </p:sp>
       <p:sp>
         <p:nvSpPr>
-          <p:cNvPr id="9" name="Rectangle 8"/>
+          <p:cNvPr id="10" name="Rectangle 9"/>
           <p:cNvSpPr/>
           <p:nvPr/>
         </p:nvSpPr>
         <p:spPr>
           <a:xfrm>
-            <a:off x="3535591" y="1268730"/>
+            <a:off x="3657508" y="1611630"/>
             <a:ext cx="8290352" cy="411480"/>
           </a:xfrm>
           <a:prstGeom prst="rect">
@@ -11492,13 +11632,13 @@
       </p:sp>
       <p:sp>
         <p:nvSpPr>
-          <p:cNvPr id="10" name="TextBox 9"/>
-          <p:cNvSpPr txBox="1"/>
-          <p:nvPr/>
-        </p:nvSpPr>
-        <p:spPr>
-          <a:xfrm>
-            <a:off x="3535591" y="1296161"/>
+          <p:cNvPr id="11" name="TextBox 10"/>
+          <p:cNvSpPr txBox="1"/>
+          <p:nvPr/>
+        </p:nvSpPr>
+        <p:spPr>
+          <a:xfrm>
+            <a:off x="3657508" y="1639062"/>
             <a:ext cx="8290352" cy="356616"/>
           </a:xfrm>
           <a:prstGeom prst="rect">
@@ -11514,7 +11654,7 @@
           <a:p>
             <a:pPr algn="l"/>
             <a:r>
-              <a:rPr sz="750" b="0">
+              <a:rPr sz="800" b="0">
                 <a:solidFill>
                   <a:srgbClr val="1A1A1A"/>
                 </a:solidFill>
@@ -11527,13 +11667,13 @@
       </p:sp>
       <p:sp>
         <p:nvSpPr>
-          <p:cNvPr id="11" name="Rectangle 10"/>
+          <p:cNvPr id="12" name="Rectangle 11"/>
           <p:cNvSpPr/>
           <p:nvPr/>
         </p:nvSpPr>
         <p:spPr>
           <a:xfrm>
-            <a:off x="365750" y="1680210"/>
+            <a:off x="487667" y="2023110"/>
             <a:ext cx="3169840" cy="699516"/>
           </a:xfrm>
           <a:prstGeom prst="rect">
@@ -11573,13 +11713,13 @@
       </p:sp>
       <p:sp>
         <p:nvSpPr>
-          <p:cNvPr id="12" name="TextBox 11"/>
-          <p:cNvSpPr txBox="1"/>
-          <p:nvPr/>
-        </p:nvSpPr>
-        <p:spPr>
-          <a:xfrm>
-            <a:off x="365750" y="1707642"/>
+          <p:cNvPr id="13" name="TextBox 12"/>
+          <p:cNvSpPr txBox="1"/>
+          <p:nvPr/>
+        </p:nvSpPr>
+        <p:spPr>
+          <a:xfrm>
+            <a:off x="487667" y="2050542"/>
             <a:ext cx="3169840" cy="644651"/>
           </a:xfrm>
           <a:prstGeom prst="rect">
@@ -11595,7 +11735,7 @@
           <a:p>
             <a:pPr algn="l"/>
             <a:r>
-              <a:rPr sz="750" b="0">
+              <a:rPr sz="800" b="0">
                 <a:solidFill>
                   <a:srgbClr val="1A1A1A"/>
                 </a:solidFill>
@@ -11608,13 +11748,13 @@
       </p:sp>
       <p:sp>
         <p:nvSpPr>
-          <p:cNvPr id="13" name="Rectangle 12"/>
+          <p:cNvPr id="14" name="Rectangle 13"/>
           <p:cNvSpPr/>
           <p:nvPr/>
         </p:nvSpPr>
         <p:spPr>
           <a:xfrm>
-            <a:off x="3535591" y="1680210"/>
+            <a:off x="3657508" y="2023110"/>
             <a:ext cx="8290352" cy="699516"/>
           </a:xfrm>
           <a:prstGeom prst="rect">
@@ -11654,13 +11794,13 @@
       </p:sp>
       <p:sp>
         <p:nvSpPr>
-          <p:cNvPr id="14" name="TextBox 13"/>
-          <p:cNvSpPr txBox="1"/>
-          <p:nvPr/>
-        </p:nvSpPr>
-        <p:spPr>
-          <a:xfrm>
-            <a:off x="3535591" y="1707642"/>
+          <p:cNvPr id="15" name="TextBox 14"/>
+          <p:cNvSpPr txBox="1"/>
+          <p:nvPr/>
+        </p:nvSpPr>
+        <p:spPr>
+          <a:xfrm>
+            <a:off x="3657508" y="2050542"/>
             <a:ext cx="8290352" cy="644651"/>
           </a:xfrm>
           <a:prstGeom prst="rect">
@@ -11676,7 +11816,7 @@
           <a:p>
             <a:pPr algn="l"/>
             <a:r>
-              <a:rPr sz="750" b="0">
+              <a:rPr sz="800" b="0">
                 <a:solidFill>
                   <a:srgbClr val="1A1A1A"/>
                 </a:solidFill>
@@ -11689,13 +11829,13 @@
       </p:sp>
       <p:sp>
         <p:nvSpPr>
-          <p:cNvPr id="15" name="Rectangle 14"/>
+          <p:cNvPr id="16" name="Rectangle 15"/>
           <p:cNvSpPr/>
           <p:nvPr/>
         </p:nvSpPr>
         <p:spPr>
           <a:xfrm>
-            <a:off x="365750" y="2379726"/>
+            <a:off x="487667" y="2722626"/>
             <a:ext cx="3169840" cy="534924"/>
           </a:xfrm>
           <a:prstGeom prst="rect">
@@ -11735,13 +11875,13 @@
       </p:sp>
       <p:sp>
         <p:nvSpPr>
-          <p:cNvPr id="16" name="TextBox 15"/>
-          <p:cNvSpPr txBox="1"/>
-          <p:nvPr/>
-        </p:nvSpPr>
-        <p:spPr>
-          <a:xfrm>
-            <a:off x="365750" y="2407158"/>
+          <p:cNvPr id="17" name="TextBox 16"/>
+          <p:cNvSpPr txBox="1"/>
+          <p:nvPr/>
+        </p:nvSpPr>
+        <p:spPr>
+          <a:xfrm>
+            <a:off x="487667" y="2750058"/>
             <a:ext cx="3169840" cy="480060"/>
           </a:xfrm>
           <a:prstGeom prst="rect">
@@ -11757,7 +11897,7 @@
           <a:p>
             <a:pPr algn="l"/>
             <a:r>
-              <a:rPr sz="750" b="0">
+              <a:rPr sz="800" b="0">
                 <a:solidFill>
                   <a:srgbClr val="1A1A1A"/>
                 </a:solidFill>
@@ -11770,13 +11910,13 @@
       </p:sp>
       <p:sp>
         <p:nvSpPr>
-          <p:cNvPr id="17" name="Rectangle 16"/>
+          <p:cNvPr id="18" name="Rectangle 17"/>
           <p:cNvSpPr/>
           <p:nvPr/>
         </p:nvSpPr>
         <p:spPr>
           <a:xfrm>
-            <a:off x="3535591" y="2379726"/>
+            <a:off x="3657508" y="2722626"/>
             <a:ext cx="8290352" cy="534924"/>
           </a:xfrm>
           <a:prstGeom prst="rect">
@@ -11816,13 +11956,13 @@
       </p:sp>
       <p:sp>
         <p:nvSpPr>
-          <p:cNvPr id="18" name="TextBox 17"/>
-          <p:cNvSpPr txBox="1"/>
-          <p:nvPr/>
-        </p:nvSpPr>
-        <p:spPr>
-          <a:xfrm>
-            <a:off x="3535591" y="2407158"/>
+          <p:cNvPr id="19" name="TextBox 18"/>
+          <p:cNvSpPr txBox="1"/>
+          <p:nvPr/>
+        </p:nvSpPr>
+        <p:spPr>
+          <a:xfrm>
+            <a:off x="3657508" y="2750058"/>
             <a:ext cx="8290352" cy="480060"/>
           </a:xfrm>
           <a:prstGeom prst="rect">
@@ -11838,7 +11978,7 @@
           <a:p>
             <a:pPr algn="l"/>
             <a:r>
-              <a:rPr sz="750" b="0">
+              <a:rPr sz="800" b="0">
                 <a:solidFill>
                   <a:srgbClr val="1A1A1A"/>
                 </a:solidFill>
@@ -11851,7 +11991,7 @@
       </p:sp>
       <p:sp>
         <p:nvSpPr>
-          <p:cNvPr id="19" name="TextBox 18"/>
+          <p:cNvPr id="20" name="TextBox 19"/>
           <p:cNvSpPr txBox="1"/>
           <p:nvPr/>
         </p:nvSpPr>
@@ -11886,7 +12026,7 @@
       </p:sp>
       <p:sp>
         <p:nvSpPr>
-          <p:cNvPr id="20" name="TextBox 19"/>
+          <p:cNvPr id="21" name="TextBox 20"/>
           <p:cNvSpPr txBox="1"/>
           <p:nvPr/>
         </p:nvSpPr>
@@ -11945,42 +12085,77 @@
         </p:nvSpPr>
         <p:spPr>
           <a:xfrm>
-            <a:off x="365750" y="274320"/>
-            <a:ext cx="10972525" cy="480060"/>
-          </a:xfrm>
-          <a:prstGeom prst="rect">
-            <a:avLst/>
-          </a:prstGeom>
-          <a:noFill/>
-        </p:spPr>
-        <p:txBody>
-          <a:bodyPr wrap="square" lIns="36000" rIns="36000" tIns="18000" bIns="18000">
-            <a:spAutoFit/>
-          </a:bodyPr>
-          <a:lstStyle/>
-          <a:p>
-            <a:pPr algn="l"/>
-            <a:r>
-              <a:rPr sz="1700" b="1">
+            <a:off x="487667" y="137160"/>
+            <a:ext cx="7315017" cy="274320"/>
+          </a:xfrm>
+          <a:prstGeom prst="rect">
+            <a:avLst/>
+          </a:prstGeom>
+          <a:noFill/>
+        </p:spPr>
+        <p:txBody>
+          <a:bodyPr wrap="square" lIns="36000" rIns="36000" tIns="18000" bIns="18000">
+            <a:spAutoFit/>
+          </a:bodyPr>
+          <a:lstStyle/>
+          <a:p>
+            <a:pPr algn="l"/>
+            <a:r>
+              <a:rPr sz="900" b="0">
+                <a:solidFill>
+                  <a:srgbClr val="767676"/>
+                </a:solidFill>
+                <a:latin typeface="Pretendard"/>
+              </a:rPr>
+              <a:t>환경분석보고서</a:t>
+            </a:r>
+          </a:p>
+        </p:txBody>
+      </p:sp>
+      <p:sp>
+        <p:nvSpPr>
+          <p:cNvPr id="3" name="TextBox 2"/>
+          <p:cNvSpPr txBox="1"/>
+          <p:nvPr/>
+        </p:nvSpPr>
+        <p:spPr>
+          <a:xfrm>
+            <a:off x="487667" y="548640"/>
+            <a:ext cx="11216359" cy="548640"/>
+          </a:xfrm>
+          <a:prstGeom prst="rect">
+            <a:avLst/>
+          </a:prstGeom>
+          <a:noFill/>
+        </p:spPr>
+        <p:txBody>
+          <a:bodyPr wrap="square" lIns="36000" rIns="36000" tIns="18000" bIns="18000">
+            <a:spAutoFit/>
+          </a:bodyPr>
+          <a:lstStyle/>
+          <a:p>
+            <a:pPr algn="l"/>
+            <a:r>
+              <a:rPr sz="2400" b="1">
                 <a:solidFill>
                   <a:srgbClr val="1A1A1A"/>
                 </a:solidFill>
                 <a:latin typeface="Pretendard"/>
               </a:rPr>
-              <a:t>5. RFP / 제안서 분석 + 컴플라이언스 매트릭스</a:t>
-            </a:r>
-          </a:p>
-        </p:txBody>
-      </p:sp>
-      <p:sp>
-        <p:nvSpPr>
-          <p:cNvPr id="3" name="Rectangle 2"/>
+              <a:t>RFP / 제안서 분석 + 컴플라이언스 매트릭스</a:t>
+            </a:r>
+          </a:p>
+        </p:txBody>
+      </p:sp>
+      <p:sp>
+        <p:nvSpPr>
+          <p:cNvPr id="4" name="Rectangle 3"/>
           <p:cNvSpPr/>
           <p:nvPr/>
         </p:nvSpPr>
         <p:spPr>
           <a:xfrm>
-            <a:off x="365750" y="891540"/>
+            <a:off x="487667" y="1234440"/>
             <a:ext cx="3169840" cy="377190"/>
           </a:xfrm>
           <a:prstGeom prst="rect">
@@ -12020,13 +12195,13 @@
       </p:sp>
       <p:sp>
         <p:nvSpPr>
-          <p:cNvPr id="4" name="TextBox 3"/>
-          <p:cNvSpPr txBox="1"/>
-          <p:nvPr/>
-        </p:nvSpPr>
-        <p:spPr>
-          <a:xfrm>
-            <a:off x="365750" y="946404"/>
+          <p:cNvPr id="5" name="TextBox 4"/>
+          <p:cNvSpPr txBox="1"/>
+          <p:nvPr/>
+        </p:nvSpPr>
+        <p:spPr>
+          <a:xfrm>
+            <a:off x="487667" y="1289304"/>
             <a:ext cx="3169840" cy="301752"/>
           </a:xfrm>
           <a:prstGeom prst="rect">
@@ -12055,13 +12230,13 @@
       </p:sp>
       <p:sp>
         <p:nvSpPr>
-          <p:cNvPr id="5" name="Rectangle 4"/>
+          <p:cNvPr id="6" name="Rectangle 5"/>
           <p:cNvSpPr/>
           <p:nvPr/>
         </p:nvSpPr>
         <p:spPr>
           <a:xfrm>
-            <a:off x="3535591" y="891540"/>
+            <a:off x="3657508" y="1234440"/>
             <a:ext cx="4145176" cy="377190"/>
           </a:xfrm>
           <a:prstGeom prst="rect">
@@ -12101,13 +12276,13 @@
       </p:sp>
       <p:sp>
         <p:nvSpPr>
-          <p:cNvPr id="6" name="TextBox 5"/>
-          <p:cNvSpPr txBox="1"/>
-          <p:nvPr/>
-        </p:nvSpPr>
-        <p:spPr>
-          <a:xfrm>
-            <a:off x="3535591" y="946404"/>
+          <p:cNvPr id="7" name="TextBox 6"/>
+          <p:cNvSpPr txBox="1"/>
+          <p:nvPr/>
+        </p:nvSpPr>
+        <p:spPr>
+          <a:xfrm>
+            <a:off x="3657508" y="1289304"/>
             <a:ext cx="4145176" cy="301752"/>
           </a:xfrm>
           <a:prstGeom prst="rect">
@@ -12136,13 +12311,13 @@
       </p:sp>
       <p:sp>
         <p:nvSpPr>
-          <p:cNvPr id="7" name="Rectangle 6"/>
+          <p:cNvPr id="8" name="Rectangle 7"/>
           <p:cNvSpPr/>
           <p:nvPr/>
         </p:nvSpPr>
         <p:spPr>
           <a:xfrm>
-            <a:off x="7680767" y="891540"/>
+            <a:off x="7802684" y="1234440"/>
             <a:ext cx="4145176" cy="377190"/>
           </a:xfrm>
           <a:prstGeom prst="rect">
@@ -12182,13 +12357,13 @@
       </p:sp>
       <p:sp>
         <p:nvSpPr>
-          <p:cNvPr id="8" name="TextBox 7"/>
-          <p:cNvSpPr txBox="1"/>
-          <p:nvPr/>
-        </p:nvSpPr>
-        <p:spPr>
-          <a:xfrm>
-            <a:off x="7680767" y="946404"/>
+          <p:cNvPr id="9" name="TextBox 8"/>
+          <p:cNvSpPr txBox="1"/>
+          <p:nvPr/>
+        </p:nvSpPr>
+        <p:spPr>
+          <a:xfrm>
+            <a:off x="7802684" y="1289304"/>
             <a:ext cx="4145176" cy="301752"/>
           </a:xfrm>
           <a:prstGeom prst="rect">
@@ -12217,13 +12392,13 @@
       </p:sp>
       <p:sp>
         <p:nvSpPr>
-          <p:cNvPr id="9" name="Rectangle 8"/>
+          <p:cNvPr id="10" name="Rectangle 9"/>
           <p:cNvSpPr/>
           <p:nvPr/>
         </p:nvSpPr>
         <p:spPr>
           <a:xfrm>
-            <a:off x="365750" y="1268730"/>
+            <a:off x="487667" y="1611630"/>
             <a:ext cx="3169840" cy="534924"/>
           </a:xfrm>
           <a:prstGeom prst="rect">
@@ -12263,13 +12438,13 @@
       </p:sp>
       <p:sp>
         <p:nvSpPr>
-          <p:cNvPr id="10" name="TextBox 9"/>
-          <p:cNvSpPr txBox="1"/>
-          <p:nvPr/>
-        </p:nvSpPr>
-        <p:spPr>
-          <a:xfrm>
-            <a:off x="365750" y="1296161"/>
+          <p:cNvPr id="11" name="TextBox 10"/>
+          <p:cNvSpPr txBox="1"/>
+          <p:nvPr/>
+        </p:nvSpPr>
+        <p:spPr>
+          <a:xfrm>
+            <a:off x="487667" y="1639062"/>
             <a:ext cx="3169840" cy="480060"/>
           </a:xfrm>
           <a:prstGeom prst="rect">
@@ -12285,7 +12460,7 @@
           <a:p>
             <a:pPr algn="l"/>
             <a:r>
-              <a:rPr sz="750" b="0">
+              <a:rPr sz="800" b="0">
                 <a:solidFill>
                   <a:srgbClr val="1A1A1A"/>
                 </a:solidFill>
@@ -12298,13 +12473,13 @@
       </p:sp>
       <p:sp>
         <p:nvSpPr>
-          <p:cNvPr id="11" name="Rectangle 10"/>
+          <p:cNvPr id="12" name="Rectangle 11"/>
           <p:cNvSpPr/>
           <p:nvPr/>
         </p:nvSpPr>
         <p:spPr>
           <a:xfrm>
-            <a:off x="3535591" y="1268730"/>
+            <a:off x="3657508" y="1611630"/>
             <a:ext cx="4145176" cy="534924"/>
           </a:xfrm>
           <a:prstGeom prst="rect">
@@ -12344,13 +12519,13 @@
       </p:sp>
       <p:sp>
         <p:nvSpPr>
-          <p:cNvPr id="12" name="TextBox 11"/>
-          <p:cNvSpPr txBox="1"/>
-          <p:nvPr/>
-        </p:nvSpPr>
-        <p:spPr>
-          <a:xfrm>
-            <a:off x="3535591" y="1296161"/>
+          <p:cNvPr id="13" name="TextBox 12"/>
+          <p:cNvSpPr txBox="1"/>
+          <p:nvPr/>
+        </p:nvSpPr>
+        <p:spPr>
+          <a:xfrm>
+            <a:off x="3657508" y="1639062"/>
             <a:ext cx="4145176" cy="480060"/>
           </a:xfrm>
           <a:prstGeom prst="rect">
@@ -12366,7 +12541,7 @@
           <a:p>
             <a:pPr algn="l"/>
             <a:r>
-              <a:rPr sz="750" b="0">
+              <a:rPr sz="800" b="0">
                 <a:solidFill>
                   <a:srgbClr val="1A1A1A"/>
                 </a:solidFill>
@@ -12379,13 +12554,13 @@
       </p:sp>
       <p:sp>
         <p:nvSpPr>
-          <p:cNvPr id="13" name="Rectangle 12"/>
+          <p:cNvPr id="14" name="Rectangle 13"/>
           <p:cNvSpPr/>
           <p:nvPr/>
         </p:nvSpPr>
         <p:spPr>
           <a:xfrm>
-            <a:off x="7680767" y="1268730"/>
+            <a:off x="7802684" y="1611630"/>
             <a:ext cx="4145176" cy="534924"/>
           </a:xfrm>
           <a:prstGeom prst="rect">
@@ -12425,13 +12600,13 @@
       </p:sp>
       <p:sp>
         <p:nvSpPr>
-          <p:cNvPr id="14" name="TextBox 13"/>
-          <p:cNvSpPr txBox="1"/>
-          <p:nvPr/>
-        </p:nvSpPr>
-        <p:spPr>
-          <a:xfrm>
-            <a:off x="7680767" y="1296161"/>
+          <p:cNvPr id="15" name="TextBox 14"/>
+          <p:cNvSpPr txBox="1"/>
+          <p:nvPr/>
+        </p:nvSpPr>
+        <p:spPr>
+          <a:xfrm>
+            <a:off x="7802684" y="1639062"/>
             <a:ext cx="4145176" cy="480060"/>
           </a:xfrm>
           <a:prstGeom prst="rect">
@@ -12447,7 +12622,7 @@
           <a:p>
             <a:pPr algn="l"/>
             <a:r>
-              <a:rPr sz="750" b="0">
+              <a:rPr sz="800" b="0">
                 <a:solidFill>
                   <a:srgbClr val="1A1A1A"/>
                 </a:solidFill>
@@ -12460,13 +12635,13 @@
       </p:sp>
       <p:sp>
         <p:nvSpPr>
-          <p:cNvPr id="15" name="Rectangle 14"/>
+          <p:cNvPr id="16" name="Rectangle 15"/>
           <p:cNvSpPr/>
           <p:nvPr/>
         </p:nvSpPr>
         <p:spPr>
           <a:xfrm>
-            <a:off x="365750" y="1803654"/>
+            <a:off x="487667" y="2146554"/>
             <a:ext cx="3169840" cy="699516"/>
           </a:xfrm>
           <a:prstGeom prst="rect">
@@ -12506,13 +12681,13 @@
       </p:sp>
       <p:sp>
         <p:nvSpPr>
-          <p:cNvPr id="16" name="TextBox 15"/>
-          <p:cNvSpPr txBox="1"/>
-          <p:nvPr/>
-        </p:nvSpPr>
-        <p:spPr>
-          <a:xfrm>
-            <a:off x="365750" y="1831086"/>
+          <p:cNvPr id="17" name="TextBox 16"/>
+          <p:cNvSpPr txBox="1"/>
+          <p:nvPr/>
+        </p:nvSpPr>
+        <p:spPr>
+          <a:xfrm>
+            <a:off x="487667" y="2173986"/>
             <a:ext cx="3169840" cy="644651"/>
           </a:xfrm>
           <a:prstGeom prst="rect">
@@ -12528,7 +12703,7 @@
           <a:p>
             <a:pPr algn="l"/>
             <a:r>
-              <a:rPr sz="750" b="0">
+              <a:rPr sz="800" b="0">
                 <a:solidFill>
                   <a:srgbClr val="1A1A1A"/>
                 </a:solidFill>
@@ -12541,13 +12716,13 @@
       </p:sp>
       <p:sp>
         <p:nvSpPr>
-          <p:cNvPr id="17" name="Rectangle 16"/>
+          <p:cNvPr id="18" name="Rectangle 17"/>
           <p:cNvSpPr/>
           <p:nvPr/>
         </p:nvSpPr>
         <p:spPr>
           <a:xfrm>
-            <a:off x="3535591" y="1803654"/>
+            <a:off x="3657508" y="2146554"/>
             <a:ext cx="4145176" cy="699516"/>
           </a:xfrm>
           <a:prstGeom prst="rect">
@@ -12587,13 +12762,13 @@
       </p:sp>
       <p:sp>
         <p:nvSpPr>
-          <p:cNvPr id="18" name="TextBox 17"/>
-          <p:cNvSpPr txBox="1"/>
-          <p:nvPr/>
-        </p:nvSpPr>
-        <p:spPr>
-          <a:xfrm>
-            <a:off x="3535591" y="1831086"/>
+          <p:cNvPr id="19" name="TextBox 18"/>
+          <p:cNvSpPr txBox="1"/>
+          <p:nvPr/>
+        </p:nvSpPr>
+        <p:spPr>
+          <a:xfrm>
+            <a:off x="3657508" y="2173986"/>
             <a:ext cx="4145176" cy="644651"/>
           </a:xfrm>
           <a:prstGeom prst="rect">
@@ -12609,7 +12784,7 @@
           <a:p>
             <a:pPr algn="l"/>
             <a:r>
-              <a:rPr sz="750" b="0">
+              <a:rPr sz="800" b="0">
                 <a:solidFill>
                   <a:srgbClr val="1A1A1A"/>
                 </a:solidFill>
@@ -12622,13 +12797,13 @@
       </p:sp>
       <p:sp>
         <p:nvSpPr>
-          <p:cNvPr id="19" name="Rectangle 18"/>
+          <p:cNvPr id="20" name="Rectangle 19"/>
           <p:cNvSpPr/>
           <p:nvPr/>
         </p:nvSpPr>
         <p:spPr>
           <a:xfrm>
-            <a:off x="7680767" y="1803654"/>
+            <a:off x="7802684" y="2146554"/>
             <a:ext cx="4145176" cy="699516"/>
           </a:xfrm>
           <a:prstGeom prst="rect">
@@ -12668,13 +12843,13 @@
       </p:sp>
       <p:sp>
         <p:nvSpPr>
-          <p:cNvPr id="20" name="TextBox 19"/>
-          <p:cNvSpPr txBox="1"/>
-          <p:nvPr/>
-        </p:nvSpPr>
-        <p:spPr>
-          <a:xfrm>
-            <a:off x="7680767" y="1831086"/>
+          <p:cNvPr id="21" name="TextBox 20"/>
+          <p:cNvSpPr txBox="1"/>
+          <p:nvPr/>
+        </p:nvSpPr>
+        <p:spPr>
+          <a:xfrm>
+            <a:off x="7802684" y="2173986"/>
             <a:ext cx="4145176" cy="644651"/>
           </a:xfrm>
           <a:prstGeom prst="rect">
@@ -12690,7 +12865,7 @@
           <a:p>
             <a:pPr algn="l"/>
             <a:r>
-              <a:rPr sz="750" b="0">
+              <a:rPr sz="800" b="0">
                 <a:solidFill>
                   <a:srgbClr val="1A1A1A"/>
                 </a:solidFill>
@@ -12703,13 +12878,13 @@
       </p:sp>
       <p:sp>
         <p:nvSpPr>
-          <p:cNvPr id="21" name="Rectangle 20"/>
+          <p:cNvPr id="22" name="Rectangle 21"/>
           <p:cNvSpPr/>
           <p:nvPr/>
         </p:nvSpPr>
         <p:spPr>
           <a:xfrm>
-            <a:off x="365750" y="2503170"/>
+            <a:off x="487667" y="2846070"/>
             <a:ext cx="3169840" cy="411480"/>
           </a:xfrm>
           <a:prstGeom prst="rect">
@@ -12749,13 +12924,13 @@
       </p:sp>
       <p:sp>
         <p:nvSpPr>
-          <p:cNvPr id="22" name="TextBox 21"/>
-          <p:cNvSpPr txBox="1"/>
-          <p:nvPr/>
-        </p:nvSpPr>
-        <p:spPr>
-          <a:xfrm>
-            <a:off x="365750" y="2530602"/>
+          <p:cNvPr id="23" name="TextBox 22"/>
+          <p:cNvSpPr txBox="1"/>
+          <p:nvPr/>
+        </p:nvSpPr>
+        <p:spPr>
+          <a:xfrm>
+            <a:off x="487667" y="2873502"/>
             <a:ext cx="3169840" cy="356616"/>
           </a:xfrm>
           <a:prstGeom prst="rect">
@@ -12771,7 +12946,7 @@
           <a:p>
             <a:pPr algn="l"/>
             <a:r>
-              <a:rPr sz="750" b="0">
+              <a:rPr sz="800" b="0">
                 <a:solidFill>
                   <a:srgbClr val="1A1A1A"/>
                 </a:solidFill>
@@ -12784,13 +12959,13 @@
       </p:sp>
       <p:sp>
         <p:nvSpPr>
-          <p:cNvPr id="23" name="Rectangle 22"/>
+          <p:cNvPr id="24" name="Rectangle 23"/>
           <p:cNvSpPr/>
           <p:nvPr/>
         </p:nvSpPr>
         <p:spPr>
           <a:xfrm>
-            <a:off x="3535591" y="2503170"/>
+            <a:off x="3657508" y="2846070"/>
             <a:ext cx="4145176" cy="411480"/>
           </a:xfrm>
           <a:prstGeom prst="rect">
@@ -12830,13 +13005,13 @@
       </p:sp>
       <p:sp>
         <p:nvSpPr>
-          <p:cNvPr id="24" name="TextBox 23"/>
-          <p:cNvSpPr txBox="1"/>
-          <p:nvPr/>
-        </p:nvSpPr>
-        <p:spPr>
-          <a:xfrm>
-            <a:off x="3535591" y="2530602"/>
+          <p:cNvPr id="25" name="TextBox 24"/>
+          <p:cNvSpPr txBox="1"/>
+          <p:nvPr/>
+        </p:nvSpPr>
+        <p:spPr>
+          <a:xfrm>
+            <a:off x="3657508" y="2873502"/>
             <a:ext cx="4145176" cy="356616"/>
           </a:xfrm>
           <a:prstGeom prst="rect">
@@ -12852,7 +13027,7 @@
           <a:p>
             <a:pPr algn="l"/>
             <a:r>
-              <a:rPr sz="750" b="0">
+              <a:rPr sz="800" b="0">
                 <a:solidFill>
                   <a:srgbClr val="1A1A1A"/>
                 </a:solidFill>
@@ -12865,13 +13040,13 @@
       </p:sp>
       <p:sp>
         <p:nvSpPr>
-          <p:cNvPr id="25" name="Rectangle 24"/>
+          <p:cNvPr id="26" name="Rectangle 25"/>
           <p:cNvSpPr/>
           <p:nvPr/>
         </p:nvSpPr>
         <p:spPr>
           <a:xfrm>
-            <a:off x="7680767" y="2503170"/>
+            <a:off x="7802684" y="2846070"/>
             <a:ext cx="4145176" cy="411480"/>
           </a:xfrm>
           <a:prstGeom prst="rect">
@@ -12911,13 +13086,13 @@
       </p:sp>
       <p:sp>
         <p:nvSpPr>
-          <p:cNvPr id="26" name="TextBox 25"/>
-          <p:cNvSpPr txBox="1"/>
-          <p:nvPr/>
-        </p:nvSpPr>
-        <p:spPr>
-          <a:xfrm>
-            <a:off x="7680767" y="2530602"/>
+          <p:cNvPr id="27" name="TextBox 26"/>
+          <p:cNvSpPr txBox="1"/>
+          <p:nvPr/>
+        </p:nvSpPr>
+        <p:spPr>
+          <a:xfrm>
+            <a:off x="7802684" y="2873502"/>
             <a:ext cx="4145176" cy="356616"/>
           </a:xfrm>
           <a:prstGeom prst="rect">
@@ -12933,7 +13108,7 @@
           <a:p>
             <a:pPr algn="l"/>
             <a:r>
-              <a:rPr sz="750" b="0">
+              <a:rPr sz="800" b="0">
                 <a:solidFill>
                   <a:srgbClr val="1A1A1A"/>
                 </a:solidFill>
@@ -12946,13 +13121,13 @@
       </p:sp>
       <p:sp>
         <p:nvSpPr>
-          <p:cNvPr id="27" name="Rectangle 26"/>
+          <p:cNvPr id="28" name="Rectangle 27"/>
           <p:cNvSpPr/>
           <p:nvPr/>
         </p:nvSpPr>
         <p:spPr>
           <a:xfrm>
-            <a:off x="365750" y="2914650"/>
+            <a:off x="487667" y="3257550"/>
             <a:ext cx="3169840" cy="699516"/>
           </a:xfrm>
           <a:prstGeom prst="rect">
@@ -12992,13 +13167,13 @@
       </p:sp>
       <p:sp>
         <p:nvSpPr>
-          <p:cNvPr id="28" name="TextBox 27"/>
-          <p:cNvSpPr txBox="1"/>
-          <p:nvPr/>
-        </p:nvSpPr>
-        <p:spPr>
-          <a:xfrm>
-            <a:off x="365750" y="2942082"/>
+          <p:cNvPr id="29" name="TextBox 28"/>
+          <p:cNvSpPr txBox="1"/>
+          <p:nvPr/>
+        </p:nvSpPr>
+        <p:spPr>
+          <a:xfrm>
+            <a:off x="487667" y="3284982"/>
             <a:ext cx="3169840" cy="644651"/>
           </a:xfrm>
           <a:prstGeom prst="rect">
@@ -13014,7 +13189,7 @@
           <a:p>
             <a:pPr algn="l"/>
             <a:r>
-              <a:rPr sz="750" b="0">
+              <a:rPr sz="800" b="0">
                 <a:solidFill>
                   <a:srgbClr val="1A1A1A"/>
                 </a:solidFill>
@@ -13027,13 +13202,13 @@
       </p:sp>
       <p:sp>
         <p:nvSpPr>
-          <p:cNvPr id="29" name="Rectangle 28"/>
+          <p:cNvPr id="30" name="Rectangle 29"/>
           <p:cNvSpPr/>
           <p:nvPr/>
         </p:nvSpPr>
         <p:spPr>
           <a:xfrm>
-            <a:off x="3535591" y="2914650"/>
+            <a:off x="3657508" y="3257550"/>
             <a:ext cx="4145176" cy="699516"/>
           </a:xfrm>
           <a:prstGeom prst="rect">
@@ -13073,13 +13248,13 @@
       </p:sp>
       <p:sp>
         <p:nvSpPr>
-          <p:cNvPr id="30" name="TextBox 29"/>
-          <p:cNvSpPr txBox="1"/>
-          <p:nvPr/>
-        </p:nvSpPr>
-        <p:spPr>
-          <a:xfrm>
-            <a:off x="3535591" y="2942082"/>
+          <p:cNvPr id="31" name="TextBox 30"/>
+          <p:cNvSpPr txBox="1"/>
+          <p:nvPr/>
+        </p:nvSpPr>
+        <p:spPr>
+          <a:xfrm>
+            <a:off x="3657508" y="3284982"/>
             <a:ext cx="4145176" cy="644651"/>
           </a:xfrm>
           <a:prstGeom prst="rect">
@@ -13095,7 +13270,7 @@
           <a:p>
             <a:pPr algn="l"/>
             <a:r>
-              <a:rPr sz="750" b="0">
+              <a:rPr sz="800" b="0">
                 <a:solidFill>
                   <a:srgbClr val="1A1A1A"/>
                 </a:solidFill>
@@ -13108,13 +13283,13 @@
       </p:sp>
       <p:sp>
         <p:nvSpPr>
-          <p:cNvPr id="31" name="Rectangle 30"/>
+          <p:cNvPr id="32" name="Rectangle 31"/>
           <p:cNvSpPr/>
           <p:nvPr/>
         </p:nvSpPr>
         <p:spPr>
           <a:xfrm>
-            <a:off x="7680767" y="2914650"/>
+            <a:off x="7802684" y="3257550"/>
             <a:ext cx="4145176" cy="699516"/>
           </a:xfrm>
           <a:prstGeom prst="rect">
@@ -13154,13 +13329,13 @@
       </p:sp>
       <p:sp>
         <p:nvSpPr>
-          <p:cNvPr id="32" name="TextBox 31"/>
-          <p:cNvSpPr txBox="1"/>
-          <p:nvPr/>
-        </p:nvSpPr>
-        <p:spPr>
-          <a:xfrm>
-            <a:off x="7680767" y="2942082"/>
+          <p:cNvPr id="33" name="TextBox 32"/>
+          <p:cNvSpPr txBox="1"/>
+          <p:nvPr/>
+        </p:nvSpPr>
+        <p:spPr>
+          <a:xfrm>
+            <a:off x="7802684" y="3284982"/>
             <a:ext cx="4145176" cy="644651"/>
           </a:xfrm>
           <a:prstGeom prst="rect">
@@ -13176,7 +13351,7 @@
           <a:p>
             <a:pPr algn="l"/>
             <a:r>
-              <a:rPr sz="750" b="0">
+              <a:rPr sz="800" b="0">
                 <a:solidFill>
                   <a:srgbClr val="1A1A1A"/>
                 </a:solidFill>
@@ -13189,13 +13364,13 @@
       </p:sp>
       <p:sp>
         <p:nvSpPr>
-          <p:cNvPr id="33" name="Rectangle 32"/>
+          <p:cNvPr id="34" name="Rectangle 33"/>
           <p:cNvSpPr/>
           <p:nvPr/>
         </p:nvSpPr>
         <p:spPr>
           <a:xfrm>
-            <a:off x="365750" y="3614166"/>
+            <a:off x="487667" y="3957066"/>
             <a:ext cx="3169840" cy="411480"/>
           </a:xfrm>
           <a:prstGeom prst="rect">
@@ -13235,13 +13410,13 @@
       </p:sp>
       <p:sp>
         <p:nvSpPr>
-          <p:cNvPr id="34" name="TextBox 33"/>
-          <p:cNvSpPr txBox="1"/>
-          <p:nvPr/>
-        </p:nvSpPr>
-        <p:spPr>
-          <a:xfrm>
-            <a:off x="365750" y="3641598"/>
+          <p:cNvPr id="35" name="TextBox 34"/>
+          <p:cNvSpPr txBox="1"/>
+          <p:nvPr/>
+        </p:nvSpPr>
+        <p:spPr>
+          <a:xfrm>
+            <a:off x="487667" y="3984498"/>
             <a:ext cx="3169840" cy="356616"/>
           </a:xfrm>
           <a:prstGeom prst="rect">
@@ -13257,7 +13432,7 @@
           <a:p>
             <a:pPr algn="l"/>
             <a:r>
-              <a:rPr sz="750" b="0">
+              <a:rPr sz="800" b="0">
                 <a:solidFill>
                   <a:srgbClr val="1A1A1A"/>
                 </a:solidFill>
@@ -13270,13 +13445,13 @@
       </p:sp>
       <p:sp>
         <p:nvSpPr>
-          <p:cNvPr id="35" name="Rectangle 34"/>
+          <p:cNvPr id="36" name="Rectangle 35"/>
           <p:cNvSpPr/>
           <p:nvPr/>
         </p:nvSpPr>
         <p:spPr>
           <a:xfrm>
-            <a:off x="3535591" y="3614166"/>
+            <a:off x="3657508" y="3957066"/>
             <a:ext cx="4145176" cy="411480"/>
           </a:xfrm>
           <a:prstGeom prst="rect">
@@ -13316,13 +13491,13 @@
       </p:sp>
       <p:sp>
         <p:nvSpPr>
-          <p:cNvPr id="36" name="TextBox 35"/>
-          <p:cNvSpPr txBox="1"/>
-          <p:nvPr/>
-        </p:nvSpPr>
-        <p:spPr>
-          <a:xfrm>
-            <a:off x="3535591" y="3641598"/>
+          <p:cNvPr id="37" name="TextBox 36"/>
+          <p:cNvSpPr txBox="1"/>
+          <p:nvPr/>
+        </p:nvSpPr>
+        <p:spPr>
+          <a:xfrm>
+            <a:off x="3657508" y="3984498"/>
             <a:ext cx="4145176" cy="356616"/>
           </a:xfrm>
           <a:prstGeom prst="rect">
@@ -13338,7 +13513,7 @@
           <a:p>
             <a:pPr algn="l"/>
             <a:r>
-              <a:rPr sz="750" b="0">
+              <a:rPr sz="800" b="0">
                 <a:solidFill>
                   <a:srgbClr val="1A1A1A"/>
                 </a:solidFill>
@@ -13351,13 +13526,13 @@
       </p:sp>
       <p:sp>
         <p:nvSpPr>
-          <p:cNvPr id="37" name="Rectangle 36"/>
+          <p:cNvPr id="38" name="Rectangle 37"/>
           <p:cNvSpPr/>
           <p:nvPr/>
         </p:nvSpPr>
         <p:spPr>
           <a:xfrm>
-            <a:off x="7680767" y="3614166"/>
+            <a:off x="7802684" y="3957066"/>
             <a:ext cx="4145176" cy="411480"/>
           </a:xfrm>
           <a:prstGeom prst="rect">
@@ -13397,13 +13572,13 @@
       </p:sp>
       <p:sp>
         <p:nvSpPr>
-          <p:cNvPr id="38" name="TextBox 37"/>
-          <p:cNvSpPr txBox="1"/>
-          <p:nvPr/>
-        </p:nvSpPr>
-        <p:spPr>
-          <a:xfrm>
-            <a:off x="7680767" y="3641598"/>
+          <p:cNvPr id="39" name="TextBox 38"/>
+          <p:cNvSpPr txBox="1"/>
+          <p:nvPr/>
+        </p:nvSpPr>
+        <p:spPr>
+          <a:xfrm>
+            <a:off x="7802684" y="3984498"/>
             <a:ext cx="4145176" cy="356616"/>
           </a:xfrm>
           <a:prstGeom prst="rect">
@@ -13419,7 +13594,7 @@
           <a:p>
             <a:pPr algn="l"/>
             <a:r>
-              <a:rPr sz="750" b="0">
+              <a:rPr sz="800" b="0">
                 <a:solidFill>
                   <a:srgbClr val="1A1A1A"/>
                 </a:solidFill>
@@ -13432,13 +13607,13 @@
       </p:sp>
       <p:sp>
         <p:nvSpPr>
-          <p:cNvPr id="39" name="Rectangle 38"/>
+          <p:cNvPr id="40" name="Rectangle 39"/>
           <p:cNvSpPr/>
           <p:nvPr/>
         </p:nvSpPr>
         <p:spPr>
           <a:xfrm>
-            <a:off x="365750" y="4025646"/>
+            <a:off x="487667" y="4368546"/>
             <a:ext cx="3169840" cy="534924"/>
           </a:xfrm>
           <a:prstGeom prst="rect">
@@ -13478,13 +13653,13 @@
       </p:sp>
       <p:sp>
         <p:nvSpPr>
-          <p:cNvPr id="40" name="TextBox 39"/>
-          <p:cNvSpPr txBox="1"/>
-          <p:nvPr/>
-        </p:nvSpPr>
-        <p:spPr>
-          <a:xfrm>
-            <a:off x="365750" y="4053078"/>
+          <p:cNvPr id="41" name="TextBox 40"/>
+          <p:cNvSpPr txBox="1"/>
+          <p:nvPr/>
+        </p:nvSpPr>
+        <p:spPr>
+          <a:xfrm>
+            <a:off x="487667" y="4395978"/>
             <a:ext cx="3169840" cy="480060"/>
           </a:xfrm>
           <a:prstGeom prst="rect">
@@ -13500,7 +13675,7 @@
           <a:p>
             <a:pPr algn="l"/>
             <a:r>
-              <a:rPr sz="750" b="0">
+              <a:rPr sz="800" b="0">
                 <a:solidFill>
                   <a:srgbClr val="1A1A1A"/>
                 </a:solidFill>
@@ -13513,13 +13688,13 @@
       </p:sp>
       <p:sp>
         <p:nvSpPr>
-          <p:cNvPr id="41" name="Rectangle 40"/>
+          <p:cNvPr id="42" name="Rectangle 41"/>
           <p:cNvSpPr/>
           <p:nvPr/>
         </p:nvSpPr>
         <p:spPr>
           <a:xfrm>
-            <a:off x="3535591" y="4025646"/>
+            <a:off x="3657508" y="4368546"/>
             <a:ext cx="4145176" cy="534924"/>
           </a:xfrm>
           <a:prstGeom prst="rect">
@@ -13559,13 +13734,13 @@
       </p:sp>
       <p:sp>
         <p:nvSpPr>
-          <p:cNvPr id="42" name="TextBox 41"/>
-          <p:cNvSpPr txBox="1"/>
-          <p:nvPr/>
-        </p:nvSpPr>
-        <p:spPr>
-          <a:xfrm>
-            <a:off x="3535591" y="4053078"/>
+          <p:cNvPr id="43" name="TextBox 42"/>
+          <p:cNvSpPr txBox="1"/>
+          <p:nvPr/>
+        </p:nvSpPr>
+        <p:spPr>
+          <a:xfrm>
+            <a:off x="3657508" y="4395978"/>
             <a:ext cx="4145176" cy="480060"/>
           </a:xfrm>
           <a:prstGeom prst="rect">
@@ -13581,7 +13756,7 @@
           <a:p>
             <a:pPr algn="l"/>
             <a:r>
-              <a:rPr sz="750" b="0">
+              <a:rPr sz="800" b="0">
                 <a:solidFill>
                   <a:srgbClr val="1A1A1A"/>
                 </a:solidFill>
@@ -13594,13 +13769,13 @@
       </p:sp>
       <p:sp>
         <p:nvSpPr>
-          <p:cNvPr id="43" name="Rectangle 42"/>
+          <p:cNvPr id="44" name="Rectangle 43"/>
           <p:cNvSpPr/>
           <p:nvPr/>
         </p:nvSpPr>
         <p:spPr>
           <a:xfrm>
-            <a:off x="7680767" y="4025646"/>
+            <a:off x="7802684" y="4368546"/>
             <a:ext cx="4145176" cy="534924"/>
           </a:xfrm>
           <a:prstGeom prst="rect">
@@ -13640,13 +13815,13 @@
       </p:sp>
       <p:sp>
         <p:nvSpPr>
-          <p:cNvPr id="44" name="TextBox 43"/>
-          <p:cNvSpPr txBox="1"/>
-          <p:nvPr/>
-        </p:nvSpPr>
-        <p:spPr>
-          <a:xfrm>
-            <a:off x="7680767" y="4053078"/>
+          <p:cNvPr id="45" name="TextBox 44"/>
+          <p:cNvSpPr txBox="1"/>
+          <p:nvPr/>
+        </p:nvSpPr>
+        <p:spPr>
+          <a:xfrm>
+            <a:off x="7802684" y="4395978"/>
             <a:ext cx="4145176" cy="480060"/>
           </a:xfrm>
           <a:prstGeom prst="rect">
@@ -13662,7 +13837,7 @@
           <a:p>
             <a:pPr algn="l"/>
             <a:r>
-              <a:rPr sz="750" b="0">
+              <a:rPr sz="800" b="0">
                 <a:solidFill>
                   <a:srgbClr val="1A1A1A"/>
                 </a:solidFill>
@@ -13675,13 +13850,13 @@
       </p:sp>
       <p:sp>
         <p:nvSpPr>
-          <p:cNvPr id="45" name="Rectangle 44"/>
+          <p:cNvPr id="46" name="Rectangle 45"/>
           <p:cNvSpPr/>
           <p:nvPr/>
         </p:nvSpPr>
         <p:spPr>
           <a:xfrm>
-            <a:off x="365750" y="4560570"/>
+            <a:off x="487667" y="4903470"/>
             <a:ext cx="3169840" cy="534924"/>
           </a:xfrm>
           <a:prstGeom prst="rect">
@@ -13721,13 +13896,13 @@
       </p:sp>
       <p:sp>
         <p:nvSpPr>
-          <p:cNvPr id="46" name="TextBox 45"/>
-          <p:cNvSpPr txBox="1"/>
-          <p:nvPr/>
-        </p:nvSpPr>
-        <p:spPr>
-          <a:xfrm>
-            <a:off x="365750" y="4588002"/>
+          <p:cNvPr id="47" name="TextBox 46"/>
+          <p:cNvSpPr txBox="1"/>
+          <p:nvPr/>
+        </p:nvSpPr>
+        <p:spPr>
+          <a:xfrm>
+            <a:off x="487667" y="4930902"/>
             <a:ext cx="3169840" cy="480060"/>
           </a:xfrm>
           <a:prstGeom prst="rect">
@@ -13743,7 +13918,7 @@
           <a:p>
             <a:pPr algn="l"/>
             <a:r>
-              <a:rPr sz="750" b="0">
+              <a:rPr sz="800" b="0">
                 <a:solidFill>
                   <a:srgbClr val="1A1A1A"/>
                 </a:solidFill>
@@ -13756,13 +13931,13 @@
       </p:sp>
       <p:sp>
         <p:nvSpPr>
-          <p:cNvPr id="47" name="Rectangle 46"/>
+          <p:cNvPr id="48" name="Rectangle 47"/>
           <p:cNvSpPr/>
           <p:nvPr/>
         </p:nvSpPr>
         <p:spPr>
           <a:xfrm>
-            <a:off x="3535591" y="4560570"/>
+            <a:off x="3657508" y="4903470"/>
             <a:ext cx="4145176" cy="534924"/>
           </a:xfrm>
           <a:prstGeom prst="rect">
@@ -13802,13 +13977,13 @@
       </p:sp>
       <p:sp>
         <p:nvSpPr>
-          <p:cNvPr id="48" name="TextBox 47"/>
-          <p:cNvSpPr txBox="1"/>
-          <p:nvPr/>
-        </p:nvSpPr>
-        <p:spPr>
-          <a:xfrm>
-            <a:off x="3535591" y="4588002"/>
+          <p:cNvPr id="49" name="TextBox 48"/>
+          <p:cNvSpPr txBox="1"/>
+          <p:nvPr/>
+        </p:nvSpPr>
+        <p:spPr>
+          <a:xfrm>
+            <a:off x="3657508" y="4930902"/>
             <a:ext cx="4145176" cy="480060"/>
           </a:xfrm>
           <a:prstGeom prst="rect">
@@ -13824,7 +13999,7 @@
           <a:p>
             <a:pPr algn="l"/>
             <a:r>
-              <a:rPr sz="750" b="0">
+              <a:rPr sz="800" b="0">
                 <a:solidFill>
                   <a:srgbClr val="1A1A1A"/>
                 </a:solidFill>
@@ -13837,13 +14012,13 @@
       </p:sp>
       <p:sp>
         <p:nvSpPr>
-          <p:cNvPr id="49" name="Rectangle 48"/>
+          <p:cNvPr id="50" name="Rectangle 49"/>
           <p:cNvSpPr/>
           <p:nvPr/>
         </p:nvSpPr>
         <p:spPr>
           <a:xfrm>
-            <a:off x="7680767" y="4560570"/>
+            <a:off x="7802684" y="4903470"/>
             <a:ext cx="4145176" cy="534924"/>
           </a:xfrm>
           <a:prstGeom prst="rect">
@@ -13883,13 +14058,13 @@
       </p:sp>
       <p:sp>
         <p:nvSpPr>
-          <p:cNvPr id="50" name="TextBox 49"/>
-          <p:cNvSpPr txBox="1"/>
-          <p:nvPr/>
-        </p:nvSpPr>
-        <p:spPr>
-          <a:xfrm>
-            <a:off x="7680767" y="4588002"/>
+          <p:cNvPr id="51" name="TextBox 50"/>
+          <p:cNvSpPr txBox="1"/>
+          <p:nvPr/>
+        </p:nvSpPr>
+        <p:spPr>
+          <a:xfrm>
+            <a:off x="7802684" y="4930902"/>
             <a:ext cx="4145176" cy="480060"/>
           </a:xfrm>
           <a:prstGeom prst="rect">
@@ -13905,7 +14080,7 @@
           <a:p>
             <a:pPr algn="l"/>
             <a:r>
-              <a:rPr sz="750" b="0">
+              <a:rPr sz="800" b="0">
                 <a:solidFill>
                   <a:srgbClr val="1A1A1A"/>
                 </a:solidFill>
@@ -13918,13 +14093,13 @@
       </p:sp>
       <p:sp>
         <p:nvSpPr>
-          <p:cNvPr id="51" name="Rectangle 50"/>
+          <p:cNvPr id="52" name="Rectangle 51"/>
           <p:cNvSpPr/>
           <p:nvPr/>
         </p:nvSpPr>
         <p:spPr>
           <a:xfrm>
-            <a:off x="365750" y="5095494"/>
+            <a:off x="487667" y="5438394"/>
             <a:ext cx="3169840" cy="534924"/>
           </a:xfrm>
           <a:prstGeom prst="rect">
@@ -13964,13 +14139,13 @@
       </p:sp>
       <p:sp>
         <p:nvSpPr>
-          <p:cNvPr id="52" name="TextBox 51"/>
-          <p:cNvSpPr txBox="1"/>
-          <p:nvPr/>
-        </p:nvSpPr>
-        <p:spPr>
-          <a:xfrm>
-            <a:off x="365750" y="5122926"/>
+          <p:cNvPr id="53" name="TextBox 52"/>
+          <p:cNvSpPr txBox="1"/>
+          <p:nvPr/>
+        </p:nvSpPr>
+        <p:spPr>
+          <a:xfrm>
+            <a:off x="487667" y="5465826"/>
             <a:ext cx="3169840" cy="480060"/>
           </a:xfrm>
           <a:prstGeom prst="rect">
@@ -13986,7 +14161,7 @@
           <a:p>
             <a:pPr algn="l"/>
             <a:r>
-              <a:rPr sz="750" b="0">
+              <a:rPr sz="800" b="0">
                 <a:solidFill>
                   <a:srgbClr val="1A1A1A"/>
                 </a:solidFill>
@@ -13999,13 +14174,13 @@
       </p:sp>
       <p:sp>
         <p:nvSpPr>
-          <p:cNvPr id="53" name="Rectangle 52"/>
+          <p:cNvPr id="54" name="Rectangle 53"/>
           <p:cNvSpPr/>
           <p:nvPr/>
         </p:nvSpPr>
         <p:spPr>
           <a:xfrm>
-            <a:off x="3535591" y="5095494"/>
+            <a:off x="3657508" y="5438394"/>
             <a:ext cx="4145176" cy="534924"/>
           </a:xfrm>
           <a:prstGeom prst="rect">
@@ -14045,13 +14220,13 @@
       </p:sp>
       <p:sp>
         <p:nvSpPr>
-          <p:cNvPr id="54" name="TextBox 53"/>
-          <p:cNvSpPr txBox="1"/>
-          <p:nvPr/>
-        </p:nvSpPr>
-        <p:spPr>
-          <a:xfrm>
-            <a:off x="3535591" y="5122926"/>
+          <p:cNvPr id="55" name="TextBox 54"/>
+          <p:cNvSpPr txBox="1"/>
+          <p:nvPr/>
+        </p:nvSpPr>
+        <p:spPr>
+          <a:xfrm>
+            <a:off x="3657508" y="5465826"/>
             <a:ext cx="4145176" cy="480060"/>
           </a:xfrm>
           <a:prstGeom prst="rect">
@@ -14067,7 +14242,7 @@
           <a:p>
             <a:pPr algn="l"/>
             <a:r>
-              <a:rPr sz="750" b="0">
+              <a:rPr sz="800" b="0">
                 <a:solidFill>
                   <a:srgbClr val="1A1A1A"/>
                 </a:solidFill>
@@ -14080,13 +14255,13 @@
       </p:sp>
       <p:sp>
         <p:nvSpPr>
-          <p:cNvPr id="55" name="Rectangle 54"/>
+          <p:cNvPr id="56" name="Rectangle 55"/>
           <p:cNvSpPr/>
           <p:nvPr/>
         </p:nvSpPr>
         <p:spPr>
           <a:xfrm>
-            <a:off x="7680767" y="5095494"/>
+            <a:off x="7802684" y="5438394"/>
             <a:ext cx="4145176" cy="534924"/>
           </a:xfrm>
           <a:prstGeom prst="rect">
@@ -14126,13 +14301,13 @@
       </p:sp>
       <p:sp>
         <p:nvSpPr>
-          <p:cNvPr id="56" name="TextBox 55"/>
-          <p:cNvSpPr txBox="1"/>
-          <p:nvPr/>
-        </p:nvSpPr>
-        <p:spPr>
-          <a:xfrm>
-            <a:off x="7680767" y="5122926"/>
+          <p:cNvPr id="57" name="TextBox 56"/>
+          <p:cNvSpPr txBox="1"/>
+          <p:nvPr/>
+        </p:nvSpPr>
+        <p:spPr>
+          <a:xfrm>
+            <a:off x="7802684" y="5465826"/>
             <a:ext cx="4145176" cy="480060"/>
           </a:xfrm>
           <a:prstGeom prst="rect">
@@ -14148,7 +14323,7 @@
           <a:p>
             <a:pPr algn="l"/>
             <a:r>
-              <a:rPr sz="750" b="0">
+              <a:rPr sz="800" b="0">
                 <a:solidFill>
                   <a:srgbClr val="1A1A1A"/>
                 </a:solidFill>
@@ -14161,257 +14336,14 @@
       </p:sp>
       <p:sp>
         <p:nvSpPr>
-          <p:cNvPr id="57" name="Rectangle 56"/>
-          <p:cNvSpPr/>
-          <p:nvPr/>
-        </p:nvSpPr>
-        <p:spPr>
-          <a:xfrm>
-            <a:off x="365750" y="5630418"/>
-            <a:ext cx="3169840" cy="534924"/>
-          </a:xfrm>
-          <a:prstGeom prst="rect">
-            <a:avLst/>
-          </a:prstGeom>
-          <a:solidFill>
-            <a:srgbClr val="FFFFFF"/>
-          </a:solidFill>
-          <a:ln w="9525">
-            <a:solidFill>
-              <a:srgbClr val="D8D8D8"/>
-            </a:solidFill>
-          </a:ln>
-          <a:effectLst/>
-        </p:spPr>
-        <p:style>
-          <a:lnRef idx="1">
-            <a:schemeClr val="accent1"/>
-          </a:lnRef>
-          <a:fillRef idx="3">
-            <a:schemeClr val="accent1"/>
-          </a:fillRef>
-          <a:effectRef idx="2">
-            <a:schemeClr val="accent1"/>
-          </a:effectRef>
-          <a:fontRef idx="minor">
-            <a:schemeClr val="lt1"/>
-          </a:fontRef>
-        </p:style>
-        <p:txBody>
-          <a:bodyPr rtlCol="0" anchor="ctr"/>
-          <a:lstStyle/>
-          <a:p>
-            <a:pPr algn="ctr"/>
-          </a:p>
-        </p:txBody>
-      </p:sp>
-      <p:sp>
-        <p:nvSpPr>
           <p:cNvPr id="58" name="TextBox 57"/>
           <p:cNvSpPr txBox="1"/>
           <p:nvPr/>
         </p:nvSpPr>
         <p:spPr>
           <a:xfrm>
-            <a:off x="365750" y="5657850"/>
-            <a:ext cx="3169840" cy="480060"/>
-          </a:xfrm>
-          <a:prstGeom prst="rect">
-            <a:avLst/>
-          </a:prstGeom>
-          <a:noFill/>
-        </p:spPr>
-        <p:txBody>
-          <a:bodyPr wrap="square" lIns="36000" rIns="36000" tIns="18000" bIns="18000">
-            <a:spAutoFit/>
-          </a:bodyPr>
-          <a:lstStyle/>
-          <a:p>
-            <a:pPr algn="l"/>
-            <a:r>
-              <a:rPr sz="750" b="0">
-                <a:solidFill>
-                  <a:srgbClr val="1A1A1A"/>
-                </a:solidFill>
-                <a:latin typeface="Pretendard"/>
-              </a:rPr>
-              <a:t>R04</a:t>
-            </a:r>
-          </a:p>
-        </p:txBody>
-      </p:sp>
-      <p:sp>
-        <p:nvSpPr>
-          <p:cNvPr id="59" name="Rectangle 58"/>
-          <p:cNvSpPr/>
-          <p:nvPr/>
-        </p:nvSpPr>
-        <p:spPr>
-          <a:xfrm>
-            <a:off x="3535591" y="5630418"/>
-            <a:ext cx="4145176" cy="534924"/>
-          </a:xfrm>
-          <a:prstGeom prst="rect">
-            <a:avLst/>
-          </a:prstGeom>
-          <a:solidFill>
-            <a:srgbClr val="FFFFFF"/>
-          </a:solidFill>
-          <a:ln w="9525">
-            <a:solidFill>
-              <a:srgbClr val="D8D8D8"/>
-            </a:solidFill>
-          </a:ln>
-          <a:effectLst/>
-        </p:spPr>
-        <p:style>
-          <a:lnRef idx="1">
-            <a:schemeClr val="accent1"/>
-          </a:lnRef>
-          <a:fillRef idx="3">
-            <a:schemeClr val="accent1"/>
-          </a:fillRef>
-          <a:effectRef idx="2">
-            <a:schemeClr val="accent1"/>
-          </a:effectRef>
-          <a:fontRef idx="minor">
-            <a:schemeClr val="lt1"/>
-          </a:fontRef>
-        </p:style>
-        <p:txBody>
-          <a:bodyPr rtlCol="0" anchor="ctr"/>
-          <a:lstStyle/>
-          <a:p>
-            <a:pPr algn="ctr"/>
-          </a:p>
-        </p:txBody>
-      </p:sp>
-      <p:sp>
-        <p:nvSpPr>
-          <p:cNvPr id="60" name="TextBox 59"/>
-          <p:cNvSpPr txBox="1"/>
-          <p:nvPr/>
-        </p:nvSpPr>
-        <p:spPr>
-          <a:xfrm>
-            <a:off x="3535591" y="5657850"/>
-            <a:ext cx="4145176" cy="480060"/>
-          </a:xfrm>
-          <a:prstGeom prst="rect">
-            <a:avLst/>
-          </a:prstGeom>
-          <a:noFill/>
-        </p:spPr>
-        <p:txBody>
-          <a:bodyPr wrap="square" lIns="36000" rIns="36000" tIns="18000" bIns="18000">
-            <a:spAutoFit/>
-          </a:bodyPr>
-          <a:lstStyle/>
-          <a:p>
-            <a:pPr algn="l"/>
-            <a:r>
-              <a:rPr sz="750" b="0">
-                <a:solidFill>
-                  <a:srgbClr val="1A1A1A"/>
-                </a:solidFill>
-                <a:latin typeface="Pretendard"/>
-              </a:rPr>
-              <a:t>Admin 신규/변경 시 기획·퍼블리싱만 (디자인 제외)</a:t>
-            </a:r>
-          </a:p>
-        </p:txBody>
-      </p:sp>
-      <p:sp>
-        <p:nvSpPr>
-          <p:cNvPr id="61" name="Rectangle 60"/>
-          <p:cNvSpPr/>
-          <p:nvPr/>
-        </p:nvSpPr>
-        <p:spPr>
-          <a:xfrm>
-            <a:off x="7680767" y="5630418"/>
-            <a:ext cx="4145176" cy="534924"/>
-          </a:xfrm>
-          <a:prstGeom prst="rect">
-            <a:avLst/>
-          </a:prstGeom>
-          <a:solidFill>
-            <a:srgbClr val="FFFFFF"/>
-          </a:solidFill>
-          <a:ln w="9525">
-            <a:solidFill>
-              <a:srgbClr val="D8D8D8"/>
-            </a:solidFill>
-          </a:ln>
-          <a:effectLst/>
-        </p:spPr>
-        <p:style>
-          <a:lnRef idx="1">
-            <a:schemeClr val="accent1"/>
-          </a:lnRef>
-          <a:fillRef idx="3">
-            <a:schemeClr val="accent1"/>
-          </a:fillRef>
-          <a:effectRef idx="2">
-            <a:schemeClr val="accent1"/>
-          </a:effectRef>
-          <a:fontRef idx="minor">
-            <a:schemeClr val="lt1"/>
-          </a:fontRef>
-        </p:style>
-        <p:txBody>
-          <a:bodyPr rtlCol="0" anchor="ctr"/>
-          <a:lstStyle/>
-          <a:p>
-            <a:pPr algn="ctr"/>
-          </a:p>
-        </p:txBody>
-      </p:sp>
-      <p:sp>
-        <p:nvSpPr>
-          <p:cNvPr id="62" name="TextBox 61"/>
-          <p:cNvSpPr txBox="1"/>
-          <p:nvPr/>
-        </p:nvSpPr>
-        <p:spPr>
-          <a:xfrm>
-            <a:off x="7680767" y="5657850"/>
-            <a:ext cx="4145176" cy="480060"/>
-          </a:xfrm>
-          <a:prstGeom prst="rect">
-            <a:avLst/>
-          </a:prstGeom>
-          <a:noFill/>
-        </p:spPr>
-        <p:txBody>
-          <a:bodyPr wrap="square" lIns="36000" rIns="36000" tIns="18000" bIns="18000">
-            <a:spAutoFit/>
-          </a:bodyPr>
-          <a:lstStyle/>
-          <a:p>
-            <a:pPr algn="l"/>
-            <a:r>
-              <a:rPr sz="750" b="0">
-                <a:solidFill>
-                  <a:srgbClr val="1A1A1A"/>
-                </a:solidFill>
-                <a:latin typeface="Pretendard"/>
-              </a:rPr>
-              <a:t>I3 #13</a:t>
-            </a:r>
-          </a:p>
-        </p:txBody>
-      </p:sp>
-      <p:sp>
-        <p:nvSpPr>
-          <p:cNvPr id="63" name="TextBox 62"/>
-          <p:cNvSpPr txBox="1"/>
-          <p:nvPr/>
-        </p:nvSpPr>
-        <p:spPr>
-          <a:xfrm>
-            <a:off x="365750" y="6233922"/>
-            <a:ext cx="10972525" cy="274320"/>
+            <a:off x="487667" y="6041898"/>
+            <a:ext cx="11216359" cy="274320"/>
           </a:xfrm>
           <a:prstGeom prst="rect">
             <a:avLst/>
@@ -14432,14 +14364,14 @@
                 </a:solidFill>
                 <a:latin typeface="Pretendard"/>
               </a:rPr>
-              <a:t>※ 이하 14행은 원장·문서 참조</a:t>
-            </a:r>
-          </a:p>
-        </p:txBody>
-      </p:sp>
-      <p:sp>
-        <p:nvSpPr>
-          <p:cNvPr id="64" name="TextBox 63"/>
+              <a:t>※ 이하 15행은 원장·문서 참조</a:t>
+            </a:r>
+          </a:p>
+        </p:txBody>
+      </p:sp>
+      <p:sp>
+        <p:nvSpPr>
+          <p:cNvPr id="59" name="TextBox 58"/>
           <p:cNvSpPr txBox="1"/>
           <p:nvPr/>
         </p:nvSpPr>
@@ -14474,7 +14406,7 @@
       </p:sp>
       <p:sp>
         <p:nvSpPr>
-          <p:cNvPr id="65" name="TextBox 64"/>
+          <p:cNvPr id="60" name="TextBox 59"/>
           <p:cNvSpPr txBox="1"/>
           <p:nvPr/>
         </p:nvSpPr>
@@ -14533,42 +14465,77 @@
         </p:nvSpPr>
         <p:spPr>
           <a:xfrm>
-            <a:off x="365750" y="274320"/>
-            <a:ext cx="10972525" cy="480060"/>
-          </a:xfrm>
-          <a:prstGeom prst="rect">
-            <a:avLst/>
-          </a:prstGeom>
-          <a:noFill/>
-        </p:spPr>
-        <p:txBody>
-          <a:bodyPr wrap="square" lIns="36000" rIns="36000" tIns="18000" bIns="18000">
-            <a:spAutoFit/>
-          </a:bodyPr>
-          <a:lstStyle/>
-          <a:p>
-            <a:pPr algn="l"/>
-            <a:r>
-              <a:rPr sz="1700" b="1">
+            <a:off x="487667" y="137160"/>
+            <a:ext cx="7315017" cy="274320"/>
+          </a:xfrm>
+          <a:prstGeom prst="rect">
+            <a:avLst/>
+          </a:prstGeom>
+          <a:noFill/>
+        </p:spPr>
+        <p:txBody>
+          <a:bodyPr wrap="square" lIns="36000" rIns="36000" tIns="18000" bIns="18000">
+            <a:spAutoFit/>
+          </a:bodyPr>
+          <a:lstStyle/>
+          <a:p>
+            <a:pPr algn="l"/>
+            <a:r>
+              <a:rPr sz="900" b="0">
+                <a:solidFill>
+                  <a:srgbClr val="767676"/>
+                </a:solidFill>
+                <a:latin typeface="Pretendard"/>
+              </a:rPr>
+              <a:t>환경분석보고서</a:t>
+            </a:r>
+          </a:p>
+        </p:txBody>
+      </p:sp>
+      <p:sp>
+        <p:nvSpPr>
+          <p:cNvPr id="3" name="TextBox 2"/>
+          <p:cNvSpPr txBox="1"/>
+          <p:nvPr/>
+        </p:nvSpPr>
+        <p:spPr>
+          <a:xfrm>
+            <a:off x="487667" y="548640"/>
+            <a:ext cx="11216359" cy="548640"/>
+          </a:xfrm>
+          <a:prstGeom prst="rect">
+            <a:avLst/>
+          </a:prstGeom>
+          <a:noFill/>
+        </p:spPr>
+        <p:txBody>
+          <a:bodyPr wrap="square" lIns="36000" rIns="36000" tIns="18000" bIns="18000">
+            <a:spAutoFit/>
+          </a:bodyPr>
+          <a:lstStyle/>
+          <a:p>
+            <a:pPr algn="l"/>
+            <a:r>
+              <a:rPr sz="2400" b="1">
                 <a:solidFill>
                   <a:srgbClr val="1A1A1A"/>
                 </a:solidFill>
                 <a:latin typeface="Pretendard"/>
               </a:rPr>
-              <a:t>6. 시사점 (후속 요구분석·전략으로 전달)</a:t>
-            </a:r>
-          </a:p>
-        </p:txBody>
-      </p:sp>
-      <p:sp>
-        <p:nvSpPr>
-          <p:cNvPr id="3" name="Rectangle 2"/>
+              <a:t>시사점 (후속 요구분석·전략으로 전달)</a:t>
+            </a:r>
+          </a:p>
+        </p:txBody>
+      </p:sp>
+      <p:sp>
+        <p:nvSpPr>
+          <p:cNvPr id="4" name="Rectangle 3"/>
           <p:cNvSpPr/>
           <p:nvPr/>
         </p:nvSpPr>
         <p:spPr>
           <a:xfrm>
-            <a:off x="365750" y="891540"/>
+            <a:off x="487667" y="1234440"/>
             <a:ext cx="2804089" cy="377190"/>
           </a:xfrm>
           <a:prstGeom prst="rect">
@@ -14608,13 +14575,13 @@
       </p:sp>
       <p:sp>
         <p:nvSpPr>
-          <p:cNvPr id="4" name="TextBox 3"/>
-          <p:cNvSpPr txBox="1"/>
-          <p:nvPr/>
-        </p:nvSpPr>
-        <p:spPr>
-          <a:xfrm>
-            <a:off x="365750" y="946404"/>
+          <p:cNvPr id="5" name="TextBox 4"/>
+          <p:cNvSpPr txBox="1"/>
+          <p:nvPr/>
+        </p:nvSpPr>
+        <p:spPr>
+          <a:xfrm>
+            <a:off x="487667" y="1289304"/>
             <a:ext cx="2804089" cy="301752"/>
           </a:xfrm>
           <a:prstGeom prst="rect">
@@ -14643,13 +14610,13 @@
       </p:sp>
       <p:sp>
         <p:nvSpPr>
-          <p:cNvPr id="5" name="Rectangle 4"/>
+          <p:cNvPr id="6" name="Rectangle 5"/>
           <p:cNvSpPr/>
           <p:nvPr/>
         </p:nvSpPr>
         <p:spPr>
           <a:xfrm>
-            <a:off x="3169840" y="891540"/>
+            <a:off x="3291757" y="1234440"/>
             <a:ext cx="2804089" cy="377190"/>
           </a:xfrm>
           <a:prstGeom prst="rect">
@@ -14689,13 +14656,13 @@
       </p:sp>
       <p:sp>
         <p:nvSpPr>
-          <p:cNvPr id="6" name="TextBox 5"/>
-          <p:cNvSpPr txBox="1"/>
-          <p:nvPr/>
-        </p:nvSpPr>
-        <p:spPr>
-          <a:xfrm>
-            <a:off x="3169840" y="946404"/>
+          <p:cNvPr id="7" name="TextBox 6"/>
+          <p:cNvSpPr txBox="1"/>
+          <p:nvPr/>
+        </p:nvSpPr>
+        <p:spPr>
+          <a:xfrm>
+            <a:off x="3291757" y="1289304"/>
             <a:ext cx="2804089" cy="301752"/>
           </a:xfrm>
           <a:prstGeom prst="rect">
@@ -14724,13 +14691,13 @@
       </p:sp>
       <p:sp>
         <p:nvSpPr>
-          <p:cNvPr id="7" name="Rectangle 6"/>
+          <p:cNvPr id="8" name="Rectangle 7"/>
           <p:cNvSpPr/>
           <p:nvPr/>
         </p:nvSpPr>
         <p:spPr>
           <a:xfrm>
-            <a:off x="5973930" y="891540"/>
+            <a:off x="6095847" y="1234440"/>
             <a:ext cx="2804089" cy="377190"/>
           </a:xfrm>
           <a:prstGeom prst="rect">
@@ -14770,13 +14737,13 @@
       </p:sp>
       <p:sp>
         <p:nvSpPr>
-          <p:cNvPr id="8" name="TextBox 7"/>
-          <p:cNvSpPr txBox="1"/>
-          <p:nvPr/>
-        </p:nvSpPr>
-        <p:spPr>
-          <a:xfrm>
-            <a:off x="5973930" y="946404"/>
+          <p:cNvPr id="9" name="TextBox 8"/>
+          <p:cNvSpPr txBox="1"/>
+          <p:nvPr/>
+        </p:nvSpPr>
+        <p:spPr>
+          <a:xfrm>
+            <a:off x="6095847" y="1289304"/>
             <a:ext cx="2804089" cy="301752"/>
           </a:xfrm>
           <a:prstGeom prst="rect">
@@ -14805,13 +14772,13 @@
       </p:sp>
       <p:sp>
         <p:nvSpPr>
-          <p:cNvPr id="9" name="Rectangle 8"/>
+          <p:cNvPr id="10" name="Rectangle 9"/>
           <p:cNvSpPr/>
           <p:nvPr/>
         </p:nvSpPr>
         <p:spPr>
           <a:xfrm>
-            <a:off x="8778020" y="891540"/>
+            <a:off x="8899937" y="1234440"/>
             <a:ext cx="2804089" cy="377190"/>
           </a:xfrm>
           <a:prstGeom prst="rect">
@@ -14851,13 +14818,13 @@
       </p:sp>
       <p:sp>
         <p:nvSpPr>
-          <p:cNvPr id="10" name="TextBox 9"/>
-          <p:cNvSpPr txBox="1"/>
-          <p:nvPr/>
-        </p:nvSpPr>
-        <p:spPr>
-          <a:xfrm>
-            <a:off x="8778020" y="946404"/>
+          <p:cNvPr id="11" name="TextBox 10"/>
+          <p:cNvSpPr txBox="1"/>
+          <p:nvPr/>
+        </p:nvSpPr>
+        <p:spPr>
+          <a:xfrm>
+            <a:off x="8899937" y="1289304"/>
             <a:ext cx="2804089" cy="301752"/>
           </a:xfrm>
           <a:prstGeom prst="rect">
@@ -14886,13 +14853,13 @@
       </p:sp>
       <p:sp>
         <p:nvSpPr>
-          <p:cNvPr id="11" name="Rectangle 10"/>
+          <p:cNvPr id="12" name="Rectangle 11"/>
           <p:cNvSpPr/>
           <p:nvPr/>
         </p:nvSpPr>
         <p:spPr>
           <a:xfrm>
-            <a:off x="365750" y="1268730"/>
+            <a:off x="487667" y="1611630"/>
             <a:ext cx="2804089" cy="699516"/>
           </a:xfrm>
           <a:prstGeom prst="rect">
@@ -14932,13 +14899,13 @@
       </p:sp>
       <p:sp>
         <p:nvSpPr>
-          <p:cNvPr id="12" name="TextBox 11"/>
-          <p:cNvSpPr txBox="1"/>
-          <p:nvPr/>
-        </p:nvSpPr>
-        <p:spPr>
-          <a:xfrm>
-            <a:off x="365750" y="1296161"/>
+          <p:cNvPr id="13" name="TextBox 12"/>
+          <p:cNvSpPr txBox="1"/>
+          <p:nvPr/>
+        </p:nvSpPr>
+        <p:spPr>
+          <a:xfrm>
+            <a:off x="487667" y="1639062"/>
             <a:ext cx="2804089" cy="644651"/>
           </a:xfrm>
           <a:prstGeom prst="rect">
@@ -14954,7 +14921,7 @@
           <a:p>
             <a:pPr algn="l"/>
             <a:r>
-              <a:rPr sz="750" b="0">
+              <a:rPr sz="800" b="0">
                 <a:solidFill>
                   <a:srgbClr val="1A1A1A"/>
                 </a:solidFill>
@@ -14967,13 +14934,13 @@
       </p:sp>
       <p:sp>
         <p:nvSpPr>
-          <p:cNvPr id="13" name="Rectangle 12"/>
+          <p:cNvPr id="14" name="Rectangle 13"/>
           <p:cNvSpPr/>
           <p:nvPr/>
         </p:nvSpPr>
         <p:spPr>
           <a:xfrm>
-            <a:off x="3169840" y="1268730"/>
+            <a:off x="3291757" y="1611630"/>
             <a:ext cx="2804089" cy="699516"/>
           </a:xfrm>
           <a:prstGeom prst="rect">
@@ -15013,13 +14980,13 @@
       </p:sp>
       <p:sp>
         <p:nvSpPr>
-          <p:cNvPr id="14" name="TextBox 13"/>
-          <p:cNvSpPr txBox="1"/>
-          <p:nvPr/>
-        </p:nvSpPr>
-        <p:spPr>
-          <a:xfrm>
-            <a:off x="3169840" y="1296161"/>
+          <p:cNvPr id="15" name="TextBox 14"/>
+          <p:cNvSpPr txBox="1"/>
+          <p:nvPr/>
+        </p:nvSpPr>
+        <p:spPr>
+          <a:xfrm>
+            <a:off x="3291757" y="1639062"/>
             <a:ext cx="2804089" cy="644651"/>
           </a:xfrm>
           <a:prstGeom prst="rect">
@@ -15035,7 +15002,7 @@
           <a:p>
             <a:pPr algn="l"/>
             <a:r>
-              <a:rPr sz="750" b="0">
+              <a:rPr sz="800" b="0">
                 <a:solidFill>
                   <a:srgbClr val="1A1A1A"/>
                 </a:solidFill>
@@ -15048,13 +15015,13 @@
       </p:sp>
       <p:sp>
         <p:nvSpPr>
-          <p:cNvPr id="15" name="Rectangle 14"/>
+          <p:cNvPr id="16" name="Rectangle 15"/>
           <p:cNvSpPr/>
           <p:nvPr/>
         </p:nvSpPr>
         <p:spPr>
           <a:xfrm>
-            <a:off x="5973930" y="1268730"/>
+            <a:off x="6095847" y="1611630"/>
             <a:ext cx="2804089" cy="699516"/>
           </a:xfrm>
           <a:prstGeom prst="rect">
@@ -15094,13 +15061,13 @@
       </p:sp>
       <p:sp>
         <p:nvSpPr>
-          <p:cNvPr id="16" name="TextBox 15"/>
-          <p:cNvSpPr txBox="1"/>
-          <p:nvPr/>
-        </p:nvSpPr>
-        <p:spPr>
-          <a:xfrm>
-            <a:off x="5973930" y="1296161"/>
+          <p:cNvPr id="17" name="TextBox 16"/>
+          <p:cNvSpPr txBox="1"/>
+          <p:nvPr/>
+        </p:nvSpPr>
+        <p:spPr>
+          <a:xfrm>
+            <a:off x="6095847" y="1639062"/>
             <a:ext cx="2804089" cy="644651"/>
           </a:xfrm>
           <a:prstGeom prst="rect">
@@ -15116,7 +15083,7 @@
           <a:p>
             <a:pPr algn="l"/>
             <a:r>
-              <a:rPr sz="750" b="0">
+              <a:rPr sz="800" b="0">
                 <a:solidFill>
                   <a:srgbClr val="1A1A1A"/>
                 </a:solidFill>
@@ -15129,13 +15096,13 @@
       </p:sp>
       <p:sp>
         <p:nvSpPr>
-          <p:cNvPr id="17" name="Rectangle 16"/>
+          <p:cNvPr id="18" name="Rectangle 17"/>
           <p:cNvSpPr/>
           <p:nvPr/>
         </p:nvSpPr>
         <p:spPr>
           <a:xfrm>
-            <a:off x="8778020" y="1268730"/>
+            <a:off x="8899937" y="1611630"/>
             <a:ext cx="2804089" cy="699516"/>
           </a:xfrm>
           <a:prstGeom prst="rect">
@@ -15175,13 +15142,13 @@
       </p:sp>
       <p:sp>
         <p:nvSpPr>
-          <p:cNvPr id="18" name="TextBox 17"/>
-          <p:cNvSpPr txBox="1"/>
-          <p:nvPr/>
-        </p:nvSpPr>
-        <p:spPr>
-          <a:xfrm>
-            <a:off x="8778020" y="1296161"/>
+          <p:cNvPr id="19" name="TextBox 18"/>
+          <p:cNvSpPr txBox="1"/>
+          <p:nvPr/>
+        </p:nvSpPr>
+        <p:spPr>
+          <a:xfrm>
+            <a:off x="8899937" y="1639062"/>
             <a:ext cx="2804089" cy="644651"/>
           </a:xfrm>
           <a:prstGeom prst="rect">
@@ -15197,7 +15164,7 @@
           <a:p>
             <a:pPr algn="l"/>
             <a:r>
-              <a:rPr sz="750" b="0">
+              <a:rPr sz="800" b="0">
                 <a:solidFill>
                   <a:srgbClr val="1A1A1A"/>
                 </a:solidFill>
@@ -15210,13 +15177,13 @@
       </p:sp>
       <p:sp>
         <p:nvSpPr>
-          <p:cNvPr id="19" name="Rectangle 18"/>
+          <p:cNvPr id="20" name="Rectangle 19"/>
           <p:cNvSpPr/>
           <p:nvPr/>
         </p:nvSpPr>
         <p:spPr>
           <a:xfrm>
-            <a:off x="365750" y="1968246"/>
+            <a:off x="487667" y="2311146"/>
             <a:ext cx="2804089" cy="534924"/>
           </a:xfrm>
           <a:prstGeom prst="rect">
@@ -15256,13 +15223,13 @@
       </p:sp>
       <p:sp>
         <p:nvSpPr>
-          <p:cNvPr id="20" name="TextBox 19"/>
-          <p:cNvSpPr txBox="1"/>
-          <p:nvPr/>
-        </p:nvSpPr>
-        <p:spPr>
-          <a:xfrm>
-            <a:off x="365750" y="1995678"/>
+          <p:cNvPr id="21" name="TextBox 20"/>
+          <p:cNvSpPr txBox="1"/>
+          <p:nvPr/>
+        </p:nvSpPr>
+        <p:spPr>
+          <a:xfrm>
+            <a:off x="487667" y="2338578"/>
             <a:ext cx="2804089" cy="480060"/>
           </a:xfrm>
           <a:prstGeom prst="rect">
@@ -15278,7 +15245,7 @@
           <a:p>
             <a:pPr algn="l"/>
             <a:r>
-              <a:rPr sz="750" b="0">
+              <a:rPr sz="800" b="0">
                 <a:solidFill>
                   <a:srgbClr val="1A1A1A"/>
                 </a:solidFill>
@@ -15291,13 +15258,13 @@
       </p:sp>
       <p:sp>
         <p:nvSpPr>
-          <p:cNvPr id="21" name="Rectangle 20"/>
+          <p:cNvPr id="22" name="Rectangle 21"/>
           <p:cNvSpPr/>
           <p:nvPr/>
         </p:nvSpPr>
         <p:spPr>
           <a:xfrm>
-            <a:off x="3169840" y="1968246"/>
+            <a:off x="3291757" y="2311146"/>
             <a:ext cx="2804089" cy="534924"/>
           </a:xfrm>
           <a:prstGeom prst="rect">
@@ -15337,13 +15304,13 @@
       </p:sp>
       <p:sp>
         <p:nvSpPr>
-          <p:cNvPr id="22" name="TextBox 21"/>
-          <p:cNvSpPr txBox="1"/>
-          <p:nvPr/>
-        </p:nvSpPr>
-        <p:spPr>
-          <a:xfrm>
-            <a:off x="3169840" y="1995678"/>
+          <p:cNvPr id="23" name="TextBox 22"/>
+          <p:cNvSpPr txBox="1"/>
+          <p:nvPr/>
+        </p:nvSpPr>
+        <p:spPr>
+          <a:xfrm>
+            <a:off x="3291757" y="2338578"/>
             <a:ext cx="2804089" cy="480060"/>
           </a:xfrm>
           <a:prstGeom prst="rect">
@@ -15359,7 +15326,7 @@
           <a:p>
             <a:pPr algn="l"/>
             <a:r>
-              <a:rPr sz="750" b="0">
+              <a:rPr sz="800" b="0">
                 <a:solidFill>
                   <a:srgbClr val="1A1A1A"/>
                 </a:solidFill>
@@ -15372,13 +15339,13 @@
       </p:sp>
       <p:sp>
         <p:nvSpPr>
-          <p:cNvPr id="23" name="Rectangle 22"/>
+          <p:cNvPr id="24" name="Rectangle 23"/>
           <p:cNvSpPr/>
           <p:nvPr/>
         </p:nvSpPr>
         <p:spPr>
           <a:xfrm>
-            <a:off x="5973930" y="1968246"/>
+            <a:off x="6095847" y="2311146"/>
             <a:ext cx="2804089" cy="534924"/>
           </a:xfrm>
           <a:prstGeom prst="rect">
@@ -15418,13 +15385,13 @@
       </p:sp>
       <p:sp>
         <p:nvSpPr>
-          <p:cNvPr id="24" name="TextBox 23"/>
-          <p:cNvSpPr txBox="1"/>
-          <p:nvPr/>
-        </p:nvSpPr>
-        <p:spPr>
-          <a:xfrm>
-            <a:off x="5973930" y="1995678"/>
+          <p:cNvPr id="25" name="TextBox 24"/>
+          <p:cNvSpPr txBox="1"/>
+          <p:nvPr/>
+        </p:nvSpPr>
+        <p:spPr>
+          <a:xfrm>
+            <a:off x="6095847" y="2338578"/>
             <a:ext cx="2804089" cy="480060"/>
           </a:xfrm>
           <a:prstGeom prst="rect">
@@ -15440,7 +15407,7 @@
           <a:p>
             <a:pPr algn="l"/>
             <a:r>
-              <a:rPr sz="750" b="0">
+              <a:rPr sz="800" b="0">
                 <a:solidFill>
                   <a:srgbClr val="1A1A1A"/>
                 </a:solidFill>
@@ -15453,13 +15420,13 @@
       </p:sp>
       <p:sp>
         <p:nvSpPr>
-          <p:cNvPr id="25" name="Rectangle 24"/>
+          <p:cNvPr id="26" name="Rectangle 25"/>
           <p:cNvSpPr/>
           <p:nvPr/>
         </p:nvSpPr>
         <p:spPr>
           <a:xfrm>
-            <a:off x="8778020" y="1968246"/>
+            <a:off x="8899937" y="2311146"/>
             <a:ext cx="2804089" cy="534924"/>
           </a:xfrm>
           <a:prstGeom prst="rect">
@@ -15499,13 +15466,13 @@
       </p:sp>
       <p:sp>
         <p:nvSpPr>
-          <p:cNvPr id="26" name="TextBox 25"/>
-          <p:cNvSpPr txBox="1"/>
-          <p:nvPr/>
-        </p:nvSpPr>
-        <p:spPr>
-          <a:xfrm>
-            <a:off x="8778020" y="1995678"/>
+          <p:cNvPr id="27" name="TextBox 26"/>
+          <p:cNvSpPr txBox="1"/>
+          <p:nvPr/>
+        </p:nvSpPr>
+        <p:spPr>
+          <a:xfrm>
+            <a:off x="8899937" y="2338578"/>
             <a:ext cx="2804089" cy="480060"/>
           </a:xfrm>
           <a:prstGeom prst="rect">
@@ -15521,7 +15488,7 @@
           <a:p>
             <a:pPr algn="l"/>
             <a:r>
-              <a:rPr sz="750" b="0">
+              <a:rPr sz="800" b="0">
                 <a:solidFill>
                   <a:srgbClr val="1A1A1A"/>
                 </a:solidFill>
@@ -15534,13 +15501,13 @@
       </p:sp>
       <p:sp>
         <p:nvSpPr>
-          <p:cNvPr id="27" name="Rectangle 26"/>
+          <p:cNvPr id="28" name="Rectangle 27"/>
           <p:cNvSpPr/>
           <p:nvPr/>
         </p:nvSpPr>
         <p:spPr>
           <a:xfrm>
-            <a:off x="365750" y="2503170"/>
+            <a:off x="487667" y="2846070"/>
             <a:ext cx="2804089" cy="534924"/>
           </a:xfrm>
           <a:prstGeom prst="rect">
@@ -15580,13 +15547,13 @@
       </p:sp>
       <p:sp>
         <p:nvSpPr>
-          <p:cNvPr id="28" name="TextBox 27"/>
-          <p:cNvSpPr txBox="1"/>
-          <p:nvPr/>
-        </p:nvSpPr>
-        <p:spPr>
-          <a:xfrm>
-            <a:off x="365750" y="2530602"/>
+          <p:cNvPr id="29" name="TextBox 28"/>
+          <p:cNvSpPr txBox="1"/>
+          <p:nvPr/>
+        </p:nvSpPr>
+        <p:spPr>
+          <a:xfrm>
+            <a:off x="487667" y="2873502"/>
             <a:ext cx="2804089" cy="480060"/>
           </a:xfrm>
           <a:prstGeom prst="rect">
@@ -15602,7 +15569,7 @@
           <a:p>
             <a:pPr algn="l"/>
             <a:r>
-              <a:rPr sz="750" b="0">
+              <a:rPr sz="800" b="0">
                 <a:solidFill>
                   <a:srgbClr val="1A1A1A"/>
                 </a:solidFill>
@@ -15615,13 +15582,13 @@
       </p:sp>
       <p:sp>
         <p:nvSpPr>
-          <p:cNvPr id="29" name="Rectangle 28"/>
+          <p:cNvPr id="30" name="Rectangle 29"/>
           <p:cNvSpPr/>
           <p:nvPr/>
         </p:nvSpPr>
         <p:spPr>
           <a:xfrm>
-            <a:off x="3169840" y="2503170"/>
+            <a:off x="3291757" y="2846070"/>
             <a:ext cx="2804089" cy="534924"/>
           </a:xfrm>
           <a:prstGeom prst="rect">
@@ -15661,13 +15628,13 @@
       </p:sp>
       <p:sp>
         <p:nvSpPr>
-          <p:cNvPr id="30" name="TextBox 29"/>
-          <p:cNvSpPr txBox="1"/>
-          <p:nvPr/>
-        </p:nvSpPr>
-        <p:spPr>
-          <a:xfrm>
-            <a:off x="3169840" y="2530602"/>
+          <p:cNvPr id="31" name="TextBox 30"/>
+          <p:cNvSpPr txBox="1"/>
+          <p:nvPr/>
+        </p:nvSpPr>
+        <p:spPr>
+          <a:xfrm>
+            <a:off x="3291757" y="2873502"/>
             <a:ext cx="2804089" cy="480060"/>
           </a:xfrm>
           <a:prstGeom prst="rect">
@@ -15683,7 +15650,7 @@
           <a:p>
             <a:pPr algn="l"/>
             <a:r>
-              <a:rPr sz="750" b="0">
+              <a:rPr sz="800" b="0">
                 <a:solidFill>
                   <a:srgbClr val="1A1A1A"/>
                 </a:solidFill>
@@ -15696,13 +15663,13 @@
       </p:sp>
       <p:sp>
         <p:nvSpPr>
-          <p:cNvPr id="31" name="Rectangle 30"/>
+          <p:cNvPr id="32" name="Rectangle 31"/>
           <p:cNvSpPr/>
           <p:nvPr/>
         </p:nvSpPr>
         <p:spPr>
           <a:xfrm>
-            <a:off x="5973930" y="2503170"/>
+            <a:off x="6095847" y="2846070"/>
             <a:ext cx="2804089" cy="534924"/>
           </a:xfrm>
           <a:prstGeom prst="rect">
@@ -15742,13 +15709,13 @@
       </p:sp>
       <p:sp>
         <p:nvSpPr>
-          <p:cNvPr id="32" name="TextBox 31"/>
-          <p:cNvSpPr txBox="1"/>
-          <p:nvPr/>
-        </p:nvSpPr>
-        <p:spPr>
-          <a:xfrm>
-            <a:off x="5973930" y="2530602"/>
+          <p:cNvPr id="33" name="TextBox 32"/>
+          <p:cNvSpPr txBox="1"/>
+          <p:nvPr/>
+        </p:nvSpPr>
+        <p:spPr>
+          <a:xfrm>
+            <a:off x="6095847" y="2873502"/>
             <a:ext cx="2804089" cy="480060"/>
           </a:xfrm>
           <a:prstGeom prst="rect">
@@ -15764,7 +15731,7 @@
           <a:p>
             <a:pPr algn="l"/>
             <a:r>
-              <a:rPr sz="750" b="0">
+              <a:rPr sz="800" b="0">
                 <a:solidFill>
                   <a:srgbClr val="1A1A1A"/>
                 </a:solidFill>
@@ -15777,13 +15744,13 @@
       </p:sp>
       <p:sp>
         <p:nvSpPr>
-          <p:cNvPr id="33" name="Rectangle 32"/>
+          <p:cNvPr id="34" name="Rectangle 33"/>
           <p:cNvSpPr/>
           <p:nvPr/>
         </p:nvSpPr>
         <p:spPr>
           <a:xfrm>
-            <a:off x="8778020" y="2503170"/>
+            <a:off x="8899937" y="2846070"/>
             <a:ext cx="2804089" cy="534924"/>
           </a:xfrm>
           <a:prstGeom prst="rect">
@@ -15823,13 +15790,13 @@
       </p:sp>
       <p:sp>
         <p:nvSpPr>
-          <p:cNvPr id="34" name="TextBox 33"/>
-          <p:cNvSpPr txBox="1"/>
-          <p:nvPr/>
-        </p:nvSpPr>
-        <p:spPr>
-          <a:xfrm>
-            <a:off x="8778020" y="2530602"/>
+          <p:cNvPr id="35" name="TextBox 34"/>
+          <p:cNvSpPr txBox="1"/>
+          <p:nvPr/>
+        </p:nvSpPr>
+        <p:spPr>
+          <a:xfrm>
+            <a:off x="8899937" y="2873502"/>
             <a:ext cx="2804089" cy="480060"/>
           </a:xfrm>
           <a:prstGeom prst="rect">
@@ -15845,7 +15812,7 @@
           <a:p>
             <a:pPr algn="l"/>
             <a:r>
-              <a:rPr sz="750" b="0">
+              <a:rPr sz="800" b="0">
                 <a:solidFill>
                   <a:srgbClr val="1A1A1A"/>
                 </a:solidFill>
@@ -15858,13 +15825,13 @@
       </p:sp>
       <p:sp>
         <p:nvSpPr>
-          <p:cNvPr id="35" name="Rectangle 34"/>
+          <p:cNvPr id="36" name="Rectangle 35"/>
           <p:cNvSpPr/>
           <p:nvPr/>
         </p:nvSpPr>
         <p:spPr>
           <a:xfrm>
-            <a:off x="365750" y="3038094"/>
+            <a:off x="487667" y="3380994"/>
             <a:ext cx="2804089" cy="534924"/>
           </a:xfrm>
           <a:prstGeom prst="rect">
@@ -15904,13 +15871,13 @@
       </p:sp>
       <p:sp>
         <p:nvSpPr>
-          <p:cNvPr id="36" name="TextBox 35"/>
-          <p:cNvSpPr txBox="1"/>
-          <p:nvPr/>
-        </p:nvSpPr>
-        <p:spPr>
-          <a:xfrm>
-            <a:off x="365750" y="3065526"/>
+          <p:cNvPr id="37" name="TextBox 36"/>
+          <p:cNvSpPr txBox="1"/>
+          <p:nvPr/>
+        </p:nvSpPr>
+        <p:spPr>
+          <a:xfrm>
+            <a:off x="487667" y="3408426"/>
             <a:ext cx="2804089" cy="480060"/>
           </a:xfrm>
           <a:prstGeom prst="rect">
@@ -15926,7 +15893,7 @@
           <a:p>
             <a:pPr algn="l"/>
             <a:r>
-              <a:rPr sz="750" b="0">
+              <a:rPr sz="800" b="0">
                 <a:solidFill>
                   <a:srgbClr val="1A1A1A"/>
                 </a:solidFill>
@@ -15939,13 +15906,13 @@
       </p:sp>
       <p:sp>
         <p:nvSpPr>
-          <p:cNvPr id="37" name="Rectangle 36"/>
+          <p:cNvPr id="38" name="Rectangle 37"/>
           <p:cNvSpPr/>
           <p:nvPr/>
         </p:nvSpPr>
         <p:spPr>
           <a:xfrm>
-            <a:off x="3169840" y="3038094"/>
+            <a:off x="3291757" y="3380994"/>
             <a:ext cx="2804089" cy="534924"/>
           </a:xfrm>
           <a:prstGeom prst="rect">
@@ -15985,13 +15952,13 @@
       </p:sp>
       <p:sp>
         <p:nvSpPr>
-          <p:cNvPr id="38" name="TextBox 37"/>
-          <p:cNvSpPr txBox="1"/>
-          <p:nvPr/>
-        </p:nvSpPr>
-        <p:spPr>
-          <a:xfrm>
-            <a:off x="3169840" y="3065526"/>
+          <p:cNvPr id="39" name="TextBox 38"/>
+          <p:cNvSpPr txBox="1"/>
+          <p:nvPr/>
+        </p:nvSpPr>
+        <p:spPr>
+          <a:xfrm>
+            <a:off x="3291757" y="3408426"/>
             <a:ext cx="2804089" cy="480060"/>
           </a:xfrm>
           <a:prstGeom prst="rect">
@@ -16007,7 +15974,7 @@
           <a:p>
             <a:pPr algn="l"/>
             <a:r>
-              <a:rPr sz="750" b="0">
+              <a:rPr sz="800" b="0">
                 <a:solidFill>
                   <a:srgbClr val="1A1A1A"/>
                 </a:solidFill>
@@ -16020,13 +15987,13 @@
       </p:sp>
       <p:sp>
         <p:nvSpPr>
-          <p:cNvPr id="39" name="Rectangle 38"/>
+          <p:cNvPr id="40" name="Rectangle 39"/>
           <p:cNvSpPr/>
           <p:nvPr/>
         </p:nvSpPr>
         <p:spPr>
           <a:xfrm>
-            <a:off x="5973930" y="3038094"/>
+            <a:off x="6095847" y="3380994"/>
             <a:ext cx="2804089" cy="534924"/>
           </a:xfrm>
           <a:prstGeom prst="rect">
@@ -16066,13 +16033,13 @@
       </p:sp>
       <p:sp>
         <p:nvSpPr>
-          <p:cNvPr id="40" name="TextBox 39"/>
-          <p:cNvSpPr txBox="1"/>
-          <p:nvPr/>
-        </p:nvSpPr>
-        <p:spPr>
-          <a:xfrm>
-            <a:off x="5973930" y="3065526"/>
+          <p:cNvPr id="41" name="TextBox 40"/>
+          <p:cNvSpPr txBox="1"/>
+          <p:nvPr/>
+        </p:nvSpPr>
+        <p:spPr>
+          <a:xfrm>
+            <a:off x="6095847" y="3408426"/>
             <a:ext cx="2804089" cy="480060"/>
           </a:xfrm>
           <a:prstGeom prst="rect">
@@ -16088,7 +16055,7 @@
           <a:p>
             <a:pPr algn="l"/>
             <a:r>
-              <a:rPr sz="750" b="0">
+              <a:rPr sz="800" b="0">
                 <a:solidFill>
                   <a:srgbClr val="1A1A1A"/>
                 </a:solidFill>
@@ -16101,13 +16068,13 @@
       </p:sp>
       <p:sp>
         <p:nvSpPr>
-          <p:cNvPr id="41" name="Rectangle 40"/>
+          <p:cNvPr id="42" name="Rectangle 41"/>
           <p:cNvSpPr/>
           <p:nvPr/>
         </p:nvSpPr>
         <p:spPr>
           <a:xfrm>
-            <a:off x="8778020" y="3038094"/>
+            <a:off x="8899937" y="3380994"/>
             <a:ext cx="2804089" cy="534924"/>
           </a:xfrm>
           <a:prstGeom prst="rect">
@@ -16147,13 +16114,13 @@
       </p:sp>
       <p:sp>
         <p:nvSpPr>
-          <p:cNvPr id="42" name="TextBox 41"/>
-          <p:cNvSpPr txBox="1"/>
-          <p:nvPr/>
-        </p:nvSpPr>
-        <p:spPr>
-          <a:xfrm>
-            <a:off x="8778020" y="3065526"/>
+          <p:cNvPr id="43" name="TextBox 42"/>
+          <p:cNvSpPr txBox="1"/>
+          <p:nvPr/>
+        </p:nvSpPr>
+        <p:spPr>
+          <a:xfrm>
+            <a:off x="8899937" y="3408426"/>
             <a:ext cx="2804089" cy="480060"/>
           </a:xfrm>
           <a:prstGeom prst="rect">
@@ -16169,7 +16136,7 @@
           <a:p>
             <a:pPr algn="l"/>
             <a:r>
-              <a:rPr sz="750" b="0">
+              <a:rPr sz="800" b="0">
                 <a:solidFill>
                   <a:srgbClr val="1A1A1A"/>
                 </a:solidFill>
@@ -16182,13 +16149,13 @@
       </p:sp>
       <p:sp>
         <p:nvSpPr>
-          <p:cNvPr id="43" name="Rectangle 42"/>
+          <p:cNvPr id="44" name="Rectangle 43"/>
           <p:cNvSpPr/>
           <p:nvPr/>
         </p:nvSpPr>
         <p:spPr>
           <a:xfrm>
-            <a:off x="365750" y="3573017"/>
+            <a:off x="487667" y="3915917"/>
             <a:ext cx="2804089" cy="534924"/>
           </a:xfrm>
           <a:prstGeom prst="rect">
@@ -16228,13 +16195,13 @@
       </p:sp>
       <p:sp>
         <p:nvSpPr>
-          <p:cNvPr id="44" name="TextBox 43"/>
-          <p:cNvSpPr txBox="1"/>
-          <p:nvPr/>
-        </p:nvSpPr>
-        <p:spPr>
-          <a:xfrm>
-            <a:off x="365750" y="3600449"/>
+          <p:cNvPr id="45" name="TextBox 44"/>
+          <p:cNvSpPr txBox="1"/>
+          <p:nvPr/>
+        </p:nvSpPr>
+        <p:spPr>
+          <a:xfrm>
+            <a:off x="487667" y="3943349"/>
             <a:ext cx="2804089" cy="480060"/>
           </a:xfrm>
           <a:prstGeom prst="rect">
@@ -16250,7 +16217,7 @@
           <a:p>
             <a:pPr algn="l"/>
             <a:r>
-              <a:rPr sz="750" b="0">
+              <a:rPr sz="800" b="0">
                 <a:solidFill>
                   <a:srgbClr val="1A1A1A"/>
                 </a:solidFill>
@@ -16263,13 +16230,13 @@
       </p:sp>
       <p:sp>
         <p:nvSpPr>
-          <p:cNvPr id="45" name="Rectangle 44"/>
+          <p:cNvPr id="46" name="Rectangle 45"/>
           <p:cNvSpPr/>
           <p:nvPr/>
         </p:nvSpPr>
         <p:spPr>
           <a:xfrm>
-            <a:off x="3169840" y="3573017"/>
+            <a:off x="3291757" y="3915917"/>
             <a:ext cx="2804089" cy="534924"/>
           </a:xfrm>
           <a:prstGeom prst="rect">
@@ -16309,13 +16276,13 @@
       </p:sp>
       <p:sp>
         <p:nvSpPr>
-          <p:cNvPr id="46" name="TextBox 45"/>
-          <p:cNvSpPr txBox="1"/>
-          <p:nvPr/>
-        </p:nvSpPr>
-        <p:spPr>
-          <a:xfrm>
-            <a:off x="3169840" y="3600449"/>
+          <p:cNvPr id="47" name="TextBox 46"/>
+          <p:cNvSpPr txBox="1"/>
+          <p:nvPr/>
+        </p:nvSpPr>
+        <p:spPr>
+          <a:xfrm>
+            <a:off x="3291757" y="3943349"/>
             <a:ext cx="2804089" cy="480060"/>
           </a:xfrm>
           <a:prstGeom prst="rect">
@@ -16331,7 +16298,7 @@
           <a:p>
             <a:pPr algn="l"/>
             <a:r>
-              <a:rPr sz="750" b="0">
+              <a:rPr sz="800" b="0">
                 <a:solidFill>
                   <a:srgbClr val="1A1A1A"/>
                 </a:solidFill>
@@ -16344,13 +16311,13 @@
       </p:sp>
       <p:sp>
         <p:nvSpPr>
-          <p:cNvPr id="47" name="Rectangle 46"/>
+          <p:cNvPr id="48" name="Rectangle 47"/>
           <p:cNvSpPr/>
           <p:nvPr/>
         </p:nvSpPr>
         <p:spPr>
           <a:xfrm>
-            <a:off x="5973930" y="3573017"/>
+            <a:off x="6095847" y="3915917"/>
             <a:ext cx="2804089" cy="534924"/>
           </a:xfrm>
           <a:prstGeom prst="rect">
@@ -16390,13 +16357,13 @@
       </p:sp>
       <p:sp>
         <p:nvSpPr>
-          <p:cNvPr id="48" name="TextBox 47"/>
-          <p:cNvSpPr txBox="1"/>
-          <p:nvPr/>
-        </p:nvSpPr>
-        <p:spPr>
-          <a:xfrm>
-            <a:off x="5973930" y="3600449"/>
+          <p:cNvPr id="49" name="TextBox 48"/>
+          <p:cNvSpPr txBox="1"/>
+          <p:nvPr/>
+        </p:nvSpPr>
+        <p:spPr>
+          <a:xfrm>
+            <a:off x="6095847" y="3943349"/>
             <a:ext cx="2804089" cy="480060"/>
           </a:xfrm>
           <a:prstGeom prst="rect">
@@ -16412,7 +16379,7 @@
           <a:p>
             <a:pPr algn="l"/>
             <a:r>
-              <a:rPr sz="750" b="0">
+              <a:rPr sz="800" b="0">
                 <a:solidFill>
                   <a:srgbClr val="1A1A1A"/>
                 </a:solidFill>
@@ -16425,13 +16392,13 @@
       </p:sp>
       <p:sp>
         <p:nvSpPr>
-          <p:cNvPr id="49" name="Rectangle 48"/>
+          <p:cNvPr id="50" name="Rectangle 49"/>
           <p:cNvSpPr/>
           <p:nvPr/>
         </p:nvSpPr>
         <p:spPr>
           <a:xfrm>
-            <a:off x="8778020" y="3573017"/>
+            <a:off x="8899937" y="3915917"/>
             <a:ext cx="2804089" cy="534924"/>
           </a:xfrm>
           <a:prstGeom prst="rect">
@@ -16471,13 +16438,13 @@
       </p:sp>
       <p:sp>
         <p:nvSpPr>
-          <p:cNvPr id="50" name="TextBox 49"/>
-          <p:cNvSpPr txBox="1"/>
-          <p:nvPr/>
-        </p:nvSpPr>
-        <p:spPr>
-          <a:xfrm>
-            <a:off x="8778020" y="3600449"/>
+          <p:cNvPr id="51" name="TextBox 50"/>
+          <p:cNvSpPr txBox="1"/>
+          <p:nvPr/>
+        </p:nvSpPr>
+        <p:spPr>
+          <a:xfrm>
+            <a:off x="8899937" y="3943349"/>
             <a:ext cx="2804089" cy="480060"/>
           </a:xfrm>
           <a:prstGeom prst="rect">
@@ -16493,7 +16460,7 @@
           <a:p>
             <a:pPr algn="l"/>
             <a:r>
-              <a:rPr sz="750" b="0">
+              <a:rPr sz="800" b="0">
                 <a:solidFill>
                   <a:srgbClr val="1A1A1A"/>
                 </a:solidFill>
@@ -16506,13 +16473,13 @@
       </p:sp>
       <p:sp>
         <p:nvSpPr>
-          <p:cNvPr id="51" name="Rectangle 50"/>
+          <p:cNvPr id="52" name="Rectangle 51"/>
           <p:cNvSpPr/>
           <p:nvPr/>
         </p:nvSpPr>
         <p:spPr>
           <a:xfrm>
-            <a:off x="365750" y="4107941"/>
+            <a:off x="487667" y="4450841"/>
             <a:ext cx="2804089" cy="699516"/>
           </a:xfrm>
           <a:prstGeom prst="rect">
@@ -16552,13 +16519,13 @@
       </p:sp>
       <p:sp>
         <p:nvSpPr>
-          <p:cNvPr id="52" name="TextBox 51"/>
-          <p:cNvSpPr txBox="1"/>
-          <p:nvPr/>
-        </p:nvSpPr>
-        <p:spPr>
-          <a:xfrm>
-            <a:off x="365750" y="4135373"/>
+          <p:cNvPr id="53" name="TextBox 52"/>
+          <p:cNvSpPr txBox="1"/>
+          <p:nvPr/>
+        </p:nvSpPr>
+        <p:spPr>
+          <a:xfrm>
+            <a:off x="487667" y="4478274"/>
             <a:ext cx="2804089" cy="644651"/>
           </a:xfrm>
           <a:prstGeom prst="rect">
@@ -16574,7 +16541,7 @@
           <a:p>
             <a:pPr algn="l"/>
             <a:r>
-              <a:rPr sz="750" b="0">
+              <a:rPr sz="800" b="0">
                 <a:solidFill>
                   <a:srgbClr val="1A1A1A"/>
                 </a:solidFill>
@@ -16587,13 +16554,13 @@
       </p:sp>
       <p:sp>
         <p:nvSpPr>
-          <p:cNvPr id="53" name="Rectangle 52"/>
+          <p:cNvPr id="54" name="Rectangle 53"/>
           <p:cNvSpPr/>
           <p:nvPr/>
         </p:nvSpPr>
         <p:spPr>
           <a:xfrm>
-            <a:off x="3169840" y="4107941"/>
+            <a:off x="3291757" y="4450841"/>
             <a:ext cx="2804089" cy="699516"/>
           </a:xfrm>
           <a:prstGeom prst="rect">
@@ -16633,13 +16600,13 @@
       </p:sp>
       <p:sp>
         <p:nvSpPr>
-          <p:cNvPr id="54" name="TextBox 53"/>
-          <p:cNvSpPr txBox="1"/>
-          <p:nvPr/>
-        </p:nvSpPr>
-        <p:spPr>
-          <a:xfrm>
-            <a:off x="3169840" y="4135373"/>
+          <p:cNvPr id="55" name="TextBox 54"/>
+          <p:cNvSpPr txBox="1"/>
+          <p:nvPr/>
+        </p:nvSpPr>
+        <p:spPr>
+          <a:xfrm>
+            <a:off x="3291757" y="4478274"/>
             <a:ext cx="2804089" cy="644651"/>
           </a:xfrm>
           <a:prstGeom prst="rect">
@@ -16655,7 +16622,7 @@
           <a:p>
             <a:pPr algn="l"/>
             <a:r>
-              <a:rPr sz="750" b="0">
+              <a:rPr sz="800" b="0">
                 <a:solidFill>
                   <a:srgbClr val="1A1A1A"/>
                 </a:solidFill>
@@ -16668,13 +16635,13 @@
       </p:sp>
       <p:sp>
         <p:nvSpPr>
-          <p:cNvPr id="55" name="Rectangle 54"/>
+          <p:cNvPr id="56" name="Rectangle 55"/>
           <p:cNvSpPr/>
           <p:nvPr/>
         </p:nvSpPr>
         <p:spPr>
           <a:xfrm>
-            <a:off x="5973930" y="4107941"/>
+            <a:off x="6095847" y="4450841"/>
             <a:ext cx="2804089" cy="699516"/>
           </a:xfrm>
           <a:prstGeom prst="rect">
@@ -16714,13 +16681,13 @@
       </p:sp>
       <p:sp>
         <p:nvSpPr>
-          <p:cNvPr id="56" name="TextBox 55"/>
-          <p:cNvSpPr txBox="1"/>
-          <p:nvPr/>
-        </p:nvSpPr>
-        <p:spPr>
-          <a:xfrm>
-            <a:off x="5973930" y="4135373"/>
+          <p:cNvPr id="57" name="TextBox 56"/>
+          <p:cNvSpPr txBox="1"/>
+          <p:nvPr/>
+        </p:nvSpPr>
+        <p:spPr>
+          <a:xfrm>
+            <a:off x="6095847" y="4478274"/>
             <a:ext cx="2804089" cy="644651"/>
           </a:xfrm>
           <a:prstGeom prst="rect">
@@ -16736,7 +16703,7 @@
           <a:p>
             <a:pPr algn="l"/>
             <a:r>
-              <a:rPr sz="750" b="0">
+              <a:rPr sz="800" b="0">
                 <a:solidFill>
                   <a:srgbClr val="1A1A1A"/>
                 </a:solidFill>
@@ -16749,13 +16716,13 @@
       </p:sp>
       <p:sp>
         <p:nvSpPr>
-          <p:cNvPr id="57" name="Rectangle 56"/>
+          <p:cNvPr id="58" name="Rectangle 57"/>
           <p:cNvSpPr/>
           <p:nvPr/>
         </p:nvSpPr>
         <p:spPr>
           <a:xfrm>
-            <a:off x="8778020" y="4107941"/>
+            <a:off x="8899937" y="4450841"/>
             <a:ext cx="2804089" cy="699516"/>
           </a:xfrm>
           <a:prstGeom prst="rect">
@@ -16795,13 +16762,13 @@
       </p:sp>
       <p:sp>
         <p:nvSpPr>
-          <p:cNvPr id="58" name="TextBox 57"/>
-          <p:cNvSpPr txBox="1"/>
-          <p:nvPr/>
-        </p:nvSpPr>
-        <p:spPr>
-          <a:xfrm>
-            <a:off x="8778020" y="4135373"/>
+          <p:cNvPr id="59" name="TextBox 58"/>
+          <p:cNvSpPr txBox="1"/>
+          <p:nvPr/>
+        </p:nvSpPr>
+        <p:spPr>
+          <a:xfrm>
+            <a:off x="8899937" y="4478274"/>
             <a:ext cx="2804089" cy="644651"/>
           </a:xfrm>
           <a:prstGeom prst="rect">
@@ -16817,7 +16784,7 @@
           <a:p>
             <a:pPr algn="l"/>
             <a:r>
-              <a:rPr sz="750" b="0">
+              <a:rPr sz="800" b="0">
                 <a:solidFill>
                   <a:srgbClr val="1A1A1A"/>
                 </a:solidFill>
@@ -16830,13 +16797,13 @@
       </p:sp>
       <p:sp>
         <p:nvSpPr>
-          <p:cNvPr id="59" name="Rectangle 58"/>
+          <p:cNvPr id="60" name="Rectangle 59"/>
           <p:cNvSpPr/>
           <p:nvPr/>
         </p:nvSpPr>
         <p:spPr>
           <a:xfrm>
-            <a:off x="365750" y="4807457"/>
+            <a:off x="487667" y="5150357"/>
             <a:ext cx="2804089" cy="534924"/>
           </a:xfrm>
           <a:prstGeom prst="rect">
@@ -16876,13 +16843,13 @@
       </p:sp>
       <p:sp>
         <p:nvSpPr>
-          <p:cNvPr id="60" name="TextBox 59"/>
-          <p:cNvSpPr txBox="1"/>
-          <p:nvPr/>
-        </p:nvSpPr>
-        <p:spPr>
-          <a:xfrm>
-            <a:off x="365750" y="4834890"/>
+          <p:cNvPr id="61" name="TextBox 60"/>
+          <p:cNvSpPr txBox="1"/>
+          <p:nvPr/>
+        </p:nvSpPr>
+        <p:spPr>
+          <a:xfrm>
+            <a:off x="487667" y="5177790"/>
             <a:ext cx="2804089" cy="480060"/>
           </a:xfrm>
           <a:prstGeom prst="rect">
@@ -16898,7 +16865,7 @@
           <a:p>
             <a:pPr algn="l"/>
             <a:r>
-              <a:rPr sz="750" b="0">
+              <a:rPr sz="800" b="0">
                 <a:solidFill>
                   <a:srgbClr val="1A1A1A"/>
                 </a:solidFill>
@@ -16911,13 +16878,13 @@
       </p:sp>
       <p:sp>
         <p:nvSpPr>
-          <p:cNvPr id="61" name="Rectangle 60"/>
+          <p:cNvPr id="62" name="Rectangle 61"/>
           <p:cNvSpPr/>
           <p:nvPr/>
         </p:nvSpPr>
         <p:spPr>
           <a:xfrm>
-            <a:off x="3169840" y="4807457"/>
+            <a:off x="3291757" y="5150357"/>
             <a:ext cx="2804089" cy="534924"/>
           </a:xfrm>
           <a:prstGeom prst="rect">
@@ -16957,13 +16924,13 @@
       </p:sp>
       <p:sp>
         <p:nvSpPr>
-          <p:cNvPr id="62" name="TextBox 61"/>
-          <p:cNvSpPr txBox="1"/>
-          <p:nvPr/>
-        </p:nvSpPr>
-        <p:spPr>
-          <a:xfrm>
-            <a:off x="3169840" y="4834890"/>
+          <p:cNvPr id="63" name="TextBox 62"/>
+          <p:cNvSpPr txBox="1"/>
+          <p:nvPr/>
+        </p:nvSpPr>
+        <p:spPr>
+          <a:xfrm>
+            <a:off x="3291757" y="5177790"/>
             <a:ext cx="2804089" cy="480060"/>
           </a:xfrm>
           <a:prstGeom prst="rect">
@@ -16979,7 +16946,7 @@
           <a:p>
             <a:pPr algn="l"/>
             <a:r>
-              <a:rPr sz="750" b="0">
+              <a:rPr sz="800" b="0">
                 <a:solidFill>
                   <a:srgbClr val="1A1A1A"/>
                 </a:solidFill>
@@ -16992,13 +16959,13 @@
       </p:sp>
       <p:sp>
         <p:nvSpPr>
-          <p:cNvPr id="63" name="Rectangle 62"/>
+          <p:cNvPr id="64" name="Rectangle 63"/>
           <p:cNvSpPr/>
           <p:nvPr/>
         </p:nvSpPr>
         <p:spPr>
           <a:xfrm>
-            <a:off x="5973930" y="4807457"/>
+            <a:off x="6095847" y="5150357"/>
             <a:ext cx="2804089" cy="534924"/>
           </a:xfrm>
           <a:prstGeom prst="rect">
@@ -17038,13 +17005,13 @@
       </p:sp>
       <p:sp>
         <p:nvSpPr>
-          <p:cNvPr id="64" name="TextBox 63"/>
-          <p:cNvSpPr txBox="1"/>
-          <p:nvPr/>
-        </p:nvSpPr>
-        <p:spPr>
-          <a:xfrm>
-            <a:off x="5973930" y="4834890"/>
+          <p:cNvPr id="65" name="TextBox 64"/>
+          <p:cNvSpPr txBox="1"/>
+          <p:nvPr/>
+        </p:nvSpPr>
+        <p:spPr>
+          <a:xfrm>
+            <a:off x="6095847" y="5177790"/>
             <a:ext cx="2804089" cy="480060"/>
           </a:xfrm>
           <a:prstGeom prst="rect">
@@ -17060,7 +17027,7 @@
           <a:p>
             <a:pPr algn="l"/>
             <a:r>
-              <a:rPr sz="750" b="0">
+              <a:rPr sz="800" b="0">
                 <a:solidFill>
                   <a:srgbClr val="1A1A1A"/>
                 </a:solidFill>
@@ -17073,13 +17040,13 @@
       </p:sp>
       <p:sp>
         <p:nvSpPr>
-          <p:cNvPr id="65" name="Rectangle 64"/>
+          <p:cNvPr id="66" name="Rectangle 65"/>
           <p:cNvSpPr/>
           <p:nvPr/>
         </p:nvSpPr>
         <p:spPr>
           <a:xfrm>
-            <a:off x="8778020" y="4807457"/>
+            <a:off x="8899937" y="5150357"/>
             <a:ext cx="2804089" cy="534924"/>
           </a:xfrm>
           <a:prstGeom prst="rect">
@@ -17119,13 +17086,13 @@
       </p:sp>
       <p:sp>
         <p:nvSpPr>
-          <p:cNvPr id="66" name="TextBox 65"/>
-          <p:cNvSpPr txBox="1"/>
-          <p:nvPr/>
-        </p:nvSpPr>
-        <p:spPr>
-          <a:xfrm>
-            <a:off x="8778020" y="4834890"/>
+          <p:cNvPr id="67" name="TextBox 66"/>
+          <p:cNvSpPr txBox="1"/>
+          <p:nvPr/>
+        </p:nvSpPr>
+        <p:spPr>
+          <a:xfrm>
+            <a:off x="8899937" y="5177790"/>
             <a:ext cx="2804089" cy="480060"/>
           </a:xfrm>
           <a:prstGeom prst="rect">
@@ -17141,7 +17108,7 @@
           <a:p>
             <a:pPr algn="l"/>
             <a:r>
-              <a:rPr sz="750" b="0">
+              <a:rPr sz="800" b="0">
                 <a:solidFill>
                   <a:srgbClr val="1A1A1A"/>
                 </a:solidFill>
@@ -17154,7 +17121,7 @@
       </p:sp>
       <p:sp>
         <p:nvSpPr>
-          <p:cNvPr id="67" name="TextBox 66"/>
+          <p:cNvPr id="68" name="TextBox 67"/>
           <p:cNvSpPr txBox="1"/>
           <p:nvPr/>
         </p:nvSpPr>
@@ -17189,7 +17156,7 @@
       </p:sp>
       <p:sp>
         <p:nvSpPr>
-          <p:cNvPr id="68" name="TextBox 67"/>
+          <p:cNvPr id="69" name="TextBox 68"/>
           <p:cNvSpPr txBox="1"/>
           <p:nvPr/>
         </p:nvSpPr>
@@ -17248,58 +17215,93 @@
         </p:nvSpPr>
         <p:spPr>
           <a:xfrm>
-            <a:off x="365750" y="274320"/>
-            <a:ext cx="10972525" cy="480060"/>
-          </a:xfrm>
-          <a:prstGeom prst="rect">
-            <a:avLst/>
-          </a:prstGeom>
-          <a:noFill/>
-        </p:spPr>
-        <p:txBody>
-          <a:bodyPr wrap="square" lIns="36000" rIns="36000" tIns="18000" bIns="18000">
-            <a:spAutoFit/>
-          </a:bodyPr>
-          <a:lstStyle/>
-          <a:p>
-            <a:pPr algn="l"/>
-            <a:r>
-              <a:rPr sz="1700" b="1">
+            <a:off x="487667" y="137160"/>
+            <a:ext cx="7315017" cy="274320"/>
+          </a:xfrm>
+          <a:prstGeom prst="rect">
+            <a:avLst/>
+          </a:prstGeom>
+          <a:noFill/>
+        </p:spPr>
+        <p:txBody>
+          <a:bodyPr wrap="square" lIns="36000" rIns="36000" tIns="18000" bIns="18000">
+            <a:spAutoFit/>
+          </a:bodyPr>
+          <a:lstStyle/>
+          <a:p>
+            <a:pPr algn="l"/>
+            <a:r>
+              <a:rPr sz="900" b="0">
+                <a:solidFill>
+                  <a:srgbClr val="767676"/>
+                </a:solidFill>
+                <a:latin typeface="Pretendard"/>
+              </a:rPr>
+              <a:t>환경분석보고서</a:t>
+            </a:r>
+          </a:p>
+        </p:txBody>
+      </p:sp>
+      <p:sp>
+        <p:nvSpPr>
+          <p:cNvPr id="3" name="TextBox 2"/>
+          <p:cNvSpPr txBox="1"/>
+          <p:nvPr/>
+        </p:nvSpPr>
+        <p:spPr>
+          <a:xfrm>
+            <a:off x="487667" y="548640"/>
+            <a:ext cx="11216359" cy="548640"/>
+          </a:xfrm>
+          <a:prstGeom prst="rect">
+            <a:avLst/>
+          </a:prstGeom>
+          <a:noFill/>
+        </p:spPr>
+        <p:txBody>
+          <a:bodyPr wrap="square" lIns="36000" rIns="36000" tIns="18000" bIns="18000">
+            <a:spAutoFit/>
+          </a:bodyPr>
+          <a:lstStyle/>
+          <a:p>
+            <a:pPr algn="l"/>
+            <a:r>
+              <a:rPr sz="2400" b="1">
                 <a:solidFill>
                   <a:srgbClr val="1A1A1A"/>
                 </a:solidFill>
                 <a:latin typeface="Pretendard"/>
               </a:rPr>
-              <a:t>7. [미확인] · [확인필요]</a:t>
-            </a:r>
-          </a:p>
-        </p:txBody>
-      </p:sp>
-      <p:sp>
-        <p:nvSpPr>
-          <p:cNvPr id="3" name="TextBox 2"/>
-          <p:cNvSpPr txBox="1"/>
-          <p:nvPr/>
-        </p:nvSpPr>
-        <p:spPr>
-          <a:xfrm>
-            <a:off x="365750" y="891540"/>
-            <a:ext cx="10972525" cy="5349240"/>
-          </a:xfrm>
-          <a:prstGeom prst="rect">
-            <a:avLst/>
-          </a:prstGeom>
-          <a:noFill/>
-        </p:spPr>
-        <p:txBody>
-          <a:bodyPr wrap="square" lIns="36000" rIns="36000" tIns="18000" bIns="18000">
-            <a:spAutoFit/>
-          </a:bodyPr>
-          <a:lstStyle/>
-          <a:p>
-            <a:pPr algn="l"/>
-            <a:r>
-              <a:rPr sz="1100" b="0">
+              <a:t>[미확인] · [확인필요]</a:t>
+            </a:r>
+          </a:p>
+        </p:txBody>
+      </p:sp>
+      <p:sp>
+        <p:nvSpPr>
+          <p:cNvPr id="4" name="TextBox 3"/>
+          <p:cNvSpPr txBox="1"/>
+          <p:nvPr/>
+        </p:nvSpPr>
+        <p:spPr>
+          <a:xfrm>
+            <a:off x="487667" y="1234440"/>
+            <a:ext cx="11216359" cy="5074920"/>
+          </a:xfrm>
+          <a:prstGeom prst="rect">
+            <a:avLst/>
+          </a:prstGeom>
+          <a:noFill/>
+        </p:spPr>
+        <p:txBody>
+          <a:bodyPr wrap="square" lIns="36000" rIns="36000" tIns="18000" bIns="18000">
+            <a:spAutoFit/>
+          </a:bodyPr>
+          <a:lstStyle/>
+          <a:p>
+            <a:pPr algn="l"/>
+            <a:r>
+              <a:rPr sz="1150" b="0">
                 <a:solidFill>
                   <a:srgbClr val="1A1A1A"/>
                 </a:solidFill>
@@ -17311,7 +17313,7 @@
           <a:p>
             <a:pPr algn="l"/>
             <a:r>
-              <a:rPr sz="1100" b="0">
+              <a:rPr sz="1150" b="0">
                 <a:solidFill>
                   <a:srgbClr val="1A1A1A"/>
                 </a:solidFill>
@@ -17323,7 +17325,7 @@
           <a:p>
             <a:pPr algn="l"/>
             <a:r>
-              <a:rPr sz="1100" b="0">
+              <a:rPr sz="1150" b="0">
                 <a:solidFill>
                   <a:srgbClr val="1A1A1A"/>
                 </a:solidFill>
@@ -17335,7 +17337,7 @@
           <a:p>
             <a:pPr algn="l"/>
             <a:r>
-              <a:rPr sz="1100" b="0">
+              <a:rPr sz="1150" b="0">
                 <a:solidFill>
                   <a:srgbClr val="1A1A1A"/>
                 </a:solidFill>
@@ -17347,7 +17349,7 @@
           <a:p>
             <a:pPr algn="l"/>
             <a:r>
-              <a:rPr sz="1100" b="0">
+              <a:rPr sz="1150" b="0">
                 <a:solidFill>
                   <a:srgbClr val="1A1A1A"/>
                 </a:solidFill>
@@ -17359,7 +17361,7 @@
           <a:p>
             <a:pPr algn="l"/>
             <a:r>
-              <a:rPr sz="1100" b="0">
+              <a:rPr sz="1150" b="0">
                 <a:solidFill>
                   <a:srgbClr val="1A1A1A"/>
                 </a:solidFill>
@@ -17371,7 +17373,7 @@
           <a:p>
             <a:pPr algn="l"/>
             <a:r>
-              <a:rPr sz="1100" b="0">
+              <a:rPr sz="1150" b="0">
                 <a:solidFill>
                   <a:srgbClr val="1A1A1A"/>
                 </a:solidFill>
@@ -17383,7 +17385,7 @@
           <a:p>
             <a:pPr algn="l"/>
             <a:r>
-              <a:rPr sz="1100" b="0">
+              <a:rPr sz="1150" b="0">
                 <a:solidFill>
                   <a:srgbClr val="1A1A1A"/>
                 </a:solidFill>
@@ -17395,7 +17397,7 @@
           <a:p>
             <a:pPr algn="l"/>
             <a:r>
-              <a:rPr sz="1100" b="0">
+              <a:rPr sz="1150" b="0">
                 <a:solidFill>
                   <a:srgbClr val="1A1A1A"/>
                 </a:solidFill>
@@ -17408,7 +17410,7 @@
       </p:sp>
       <p:sp>
         <p:nvSpPr>
-          <p:cNvPr id="4" name="TextBox 3"/>
+          <p:cNvPr id="5" name="TextBox 4"/>
           <p:cNvSpPr txBox="1"/>
           <p:nvPr/>
         </p:nvSpPr>
@@ -17443,7 +17445,7 @@
       </p:sp>
       <p:sp>
         <p:nvSpPr>
-          <p:cNvPr id="5" name="TextBox 4"/>
+          <p:cNvPr id="6" name="TextBox 5"/>
           <p:cNvSpPr txBox="1"/>
           <p:nvPr/>
         </p:nvSpPr>
